--- a/presentation/Bocage_Champagne_Society_Pitch.pptx
+++ b/presentation/Bocage_Champagne_Society_Pitch.pptx
@@ -15,6 +15,7 @@
     <p:sldId id="263" r:id="rId14"/>
     <p:sldId id="264" r:id="rId15"/>
     <p:sldId id="265" r:id="rId16"/>
+    <p:sldId id="266" r:id="rId17"/>
   </p:sldIdLst>
   <p:sldSz cx="12191695" cy="6858000" type="screen4x3"/>
   <p:notesSz cx="6858000" cy="9144000"/>
@@ -3435,6 +3436,1346 @@
       <p:grpSpPr/>
       <p:sp>
         <p:nvSpPr>
+          <p:cNvPr id="2" name="TextBox 1"/>
+          <p:cNvSpPr txBox="1"/>
+          <p:nvPr/>
+        </p:nvSpPr>
+        <p:spPr>
+          <a:xfrm>
+            <a:off x="731520" y="457200"/>
+            <a:ext cx="10058400" cy="731520"/>
+          </a:xfrm>
+          <a:prstGeom prst="rect">
+            <a:avLst/>
+          </a:prstGeom>
+          <a:noFill/>
+        </p:spPr>
+        <p:txBody>
+          <a:bodyPr wrap="square">
+            <a:spAutoFit/>
+          </a:bodyPr>
+          <a:lstStyle/>
+          <a:p>
+            <a:pPr algn="l">
+              <a:defRPr sz="4000" b="1">
+                <a:solidFill>
+                  <a:srgbClr val="D4A843"/>
+                </a:solidFill>
+                <a:latin typeface="Georgia"/>
+              </a:defRPr>
+            </a:pPr>
+            <a:r>
+              <a:t>Launch Plan</a:t>
+            </a:r>
+          </a:p>
+        </p:txBody>
+      </p:sp>
+      <p:sp>
+        <p:nvSpPr>
+          <p:cNvPr id="3" name="Rectangle 2"/>
+          <p:cNvSpPr/>
+          <p:nvPr/>
+        </p:nvSpPr>
+        <p:spPr>
+          <a:xfrm>
+            <a:off x="731520" y="1188720"/>
+            <a:ext cx="3657600" cy="27432"/>
+          </a:xfrm>
+          <a:prstGeom prst="rect">
+            <a:avLst/>
+          </a:prstGeom>
+          <a:solidFill>
+            <a:srgbClr val="D4A843"/>
+          </a:solidFill>
+          <a:ln>
+            <a:noFill/>
+          </a:ln>
+        </p:spPr>
+        <p:style>
+          <a:lnRef idx="1">
+            <a:schemeClr val="accent1"/>
+          </a:lnRef>
+          <a:fillRef idx="3">
+            <a:schemeClr val="accent1"/>
+          </a:fillRef>
+          <a:effectRef idx="2">
+            <a:schemeClr val="accent1"/>
+          </a:effectRef>
+          <a:fontRef idx="minor">
+            <a:schemeClr val="lt1"/>
+          </a:fontRef>
+        </p:style>
+        <p:txBody>
+          <a:bodyPr rtlCol="0" anchor="ctr"/>
+          <a:lstStyle/>
+          <a:p>
+            <a:pPr algn="ctr"/>
+          </a:p>
+        </p:txBody>
+      </p:sp>
+      <p:sp>
+        <p:nvSpPr>
+          <p:cNvPr id="4" name="Rounded Rectangle 3"/>
+          <p:cNvSpPr/>
+          <p:nvPr/>
+        </p:nvSpPr>
+        <p:spPr>
+          <a:xfrm>
+            <a:off x="365760" y="1645920"/>
+            <a:ext cx="2148840" cy="4389120"/>
+          </a:xfrm>
+          <a:prstGeom prst="roundRect">
+            <a:avLst/>
+          </a:prstGeom>
+          <a:solidFill>
+            <a:srgbClr val="111111"/>
+          </a:solidFill>
+          <a:ln w="12700">
+            <a:solidFill>
+              <a:srgbClr val="2A2A2A"/>
+            </a:solidFill>
+          </a:ln>
+        </p:spPr>
+        <p:style>
+          <a:lnRef idx="1">
+            <a:schemeClr val="accent1"/>
+          </a:lnRef>
+          <a:fillRef idx="3">
+            <a:schemeClr val="accent1"/>
+          </a:fillRef>
+          <a:effectRef idx="2">
+            <a:schemeClr val="accent1"/>
+          </a:effectRef>
+          <a:fontRef idx="minor">
+            <a:schemeClr val="lt1"/>
+          </a:fontRef>
+        </p:style>
+        <p:txBody>
+          <a:bodyPr rtlCol="0" anchor="ctr"/>
+          <a:lstStyle/>
+          <a:p>
+            <a:pPr algn="ctr"/>
+          </a:p>
+        </p:txBody>
+      </p:sp>
+      <p:sp>
+        <p:nvSpPr>
+          <p:cNvPr id="5" name="TextBox 4"/>
+          <p:cNvSpPr txBox="1"/>
+          <p:nvPr/>
+        </p:nvSpPr>
+        <p:spPr>
+          <a:xfrm>
+            <a:off x="502920" y="1783080"/>
+            <a:ext cx="1874519" cy="274320"/>
+          </a:xfrm>
+          <a:prstGeom prst="rect">
+            <a:avLst/>
+          </a:prstGeom>
+          <a:noFill/>
+        </p:spPr>
+        <p:txBody>
+          <a:bodyPr wrap="square">
+            <a:spAutoFit/>
+          </a:bodyPr>
+          <a:lstStyle/>
+          <a:p>
+            <a:pPr algn="ctr">
+              <a:defRPr sz="1100" b="0">
+                <a:solidFill>
+                  <a:srgbClr val="6B6B6B"/>
+                </a:solidFill>
+                <a:latin typeface="Calibri"/>
+              </a:defRPr>
+            </a:pPr>
+            <a:r>
+              <a:t>Week 1–2</a:t>
+            </a:r>
+          </a:p>
+        </p:txBody>
+      </p:sp>
+      <p:sp>
+        <p:nvSpPr>
+          <p:cNvPr id="6" name="TextBox 5"/>
+          <p:cNvSpPr txBox="1"/>
+          <p:nvPr/>
+        </p:nvSpPr>
+        <p:spPr>
+          <a:xfrm>
+            <a:off x="502920" y="2057400"/>
+            <a:ext cx="1874519" cy="365760"/>
+          </a:xfrm>
+          <a:prstGeom prst="rect">
+            <a:avLst/>
+          </a:prstGeom>
+          <a:noFill/>
+        </p:spPr>
+        <p:txBody>
+          <a:bodyPr wrap="square">
+            <a:spAutoFit/>
+          </a:bodyPr>
+          <a:lstStyle/>
+          <a:p>
+            <a:pPr algn="ctr">
+              <a:defRPr sz="1600" b="1">
+                <a:solidFill>
+                  <a:srgbClr val="D4A843"/>
+                </a:solidFill>
+                <a:latin typeface="Calibri"/>
+              </a:defRPr>
+            </a:pPr>
+            <a:r>
+              <a:t>SETUP</a:t>
+            </a:r>
+          </a:p>
+        </p:txBody>
+      </p:sp>
+      <p:sp>
+        <p:nvSpPr>
+          <p:cNvPr id="7" name="Rectangle 6"/>
+          <p:cNvSpPr/>
+          <p:nvPr/>
+        </p:nvSpPr>
+        <p:spPr>
+          <a:xfrm>
+            <a:off x="640080" y="2468880"/>
+            <a:ext cx="1600200" cy="27432"/>
+          </a:xfrm>
+          <a:prstGeom prst="rect">
+            <a:avLst/>
+          </a:prstGeom>
+          <a:solidFill>
+            <a:srgbClr val="D4A843"/>
+          </a:solidFill>
+          <a:ln>
+            <a:noFill/>
+          </a:ln>
+        </p:spPr>
+        <p:style>
+          <a:lnRef idx="1">
+            <a:schemeClr val="accent1"/>
+          </a:lnRef>
+          <a:fillRef idx="3">
+            <a:schemeClr val="accent1"/>
+          </a:fillRef>
+          <a:effectRef idx="2">
+            <a:schemeClr val="accent1"/>
+          </a:effectRef>
+          <a:fontRef idx="minor">
+            <a:schemeClr val="lt1"/>
+          </a:fontRef>
+        </p:style>
+        <p:txBody>
+          <a:bodyPr rtlCol="0" anchor="ctr"/>
+          <a:lstStyle/>
+          <a:p>
+            <a:pPr algn="ctr"/>
+          </a:p>
+        </p:txBody>
+      </p:sp>
+      <p:sp>
+        <p:nvSpPr>
+          <p:cNvPr id="8" name="TextBox 7"/>
+          <p:cNvSpPr txBox="1"/>
+          <p:nvPr/>
+        </p:nvSpPr>
+        <p:spPr>
+          <a:xfrm>
+            <a:off x="502920" y="2606040"/>
+            <a:ext cx="1874519" cy="3200400"/>
+          </a:xfrm>
+          <a:prstGeom prst="rect">
+            <a:avLst/>
+          </a:prstGeom>
+          <a:noFill/>
+        </p:spPr>
+        <p:txBody>
+          <a:bodyPr wrap="square">
+            <a:spAutoFit/>
+          </a:bodyPr>
+          <a:lstStyle/>
+          <a:p>
+            <a:pPr>
+              <a:spcAft>
+                <a:spcPts val="600"/>
+              </a:spcAft>
+              <a:defRPr sz="1000">
+                <a:solidFill>
+                  <a:srgbClr val="FDF8EC"/>
+                </a:solidFill>
+                <a:latin typeface="Calibri"/>
+              </a:defRPr>
+            </a:pPr>
+            <a:r>
+              <a:t>  Connect Supabase database</a:t>
+            </a:r>
+          </a:p>
+          <a:p>
+            <a:pPr>
+              <a:spcAft>
+                <a:spcPts val="600"/>
+              </a:spcAft>
+              <a:defRPr sz="1000">
+                <a:solidFill>
+                  <a:srgbClr val="FDF8EC"/>
+                </a:solidFill>
+                <a:latin typeface="Calibri"/>
+              </a:defRPr>
+            </a:pPr>
+            <a:r>
+              <a:t>  Configure Stripe payments</a:t>
+            </a:r>
+          </a:p>
+          <a:p>
+            <a:pPr>
+              <a:spcAft>
+                <a:spcPts val="600"/>
+              </a:spcAft>
+              <a:defRPr sz="1000">
+                <a:solidFill>
+                  <a:srgbClr val="FDF8EC"/>
+                </a:solidFill>
+                <a:latin typeface="Calibri"/>
+              </a:defRPr>
+            </a:pPr>
+            <a:r>
+              <a:t>  Upload wine menu + photos</a:t>
+            </a:r>
+          </a:p>
+          <a:p>
+            <a:pPr>
+              <a:spcAft>
+                <a:spcPts val="600"/>
+              </a:spcAft>
+              <a:defRPr sz="1000">
+                <a:solidFill>
+                  <a:srgbClr val="FDF8EC"/>
+                </a:solidFill>
+                <a:latin typeface="Calibri"/>
+              </a:defRPr>
+            </a:pPr>
+            <a:r>
+              <a:t>  Set admin accounts for Clark &amp; Zac</a:t>
+            </a:r>
+          </a:p>
+        </p:txBody>
+      </p:sp>
+      <p:sp>
+        <p:nvSpPr>
+          <p:cNvPr id="9" name="Rounded Rectangle 8"/>
+          <p:cNvSpPr/>
+          <p:nvPr/>
+        </p:nvSpPr>
+        <p:spPr>
+          <a:xfrm>
+            <a:off x="2697479" y="1645920"/>
+            <a:ext cx="2148840" cy="4389120"/>
+          </a:xfrm>
+          <a:prstGeom prst="roundRect">
+            <a:avLst/>
+          </a:prstGeom>
+          <a:solidFill>
+            <a:srgbClr val="111111"/>
+          </a:solidFill>
+          <a:ln w="12700">
+            <a:solidFill>
+              <a:srgbClr val="2A2A2A"/>
+            </a:solidFill>
+          </a:ln>
+        </p:spPr>
+        <p:style>
+          <a:lnRef idx="1">
+            <a:schemeClr val="accent1"/>
+          </a:lnRef>
+          <a:fillRef idx="3">
+            <a:schemeClr val="accent1"/>
+          </a:fillRef>
+          <a:effectRef idx="2">
+            <a:schemeClr val="accent1"/>
+          </a:effectRef>
+          <a:fontRef idx="minor">
+            <a:schemeClr val="lt1"/>
+          </a:fontRef>
+        </p:style>
+        <p:txBody>
+          <a:bodyPr rtlCol="0" anchor="ctr"/>
+          <a:lstStyle/>
+          <a:p>
+            <a:pPr algn="ctr"/>
+          </a:p>
+        </p:txBody>
+      </p:sp>
+      <p:sp>
+        <p:nvSpPr>
+          <p:cNvPr id="10" name="TextBox 9"/>
+          <p:cNvSpPr txBox="1"/>
+          <p:nvPr/>
+        </p:nvSpPr>
+        <p:spPr>
+          <a:xfrm>
+            <a:off x="2834639" y="1783080"/>
+            <a:ext cx="1874519" cy="274320"/>
+          </a:xfrm>
+          <a:prstGeom prst="rect">
+            <a:avLst/>
+          </a:prstGeom>
+          <a:noFill/>
+        </p:spPr>
+        <p:txBody>
+          <a:bodyPr wrap="square">
+            <a:spAutoFit/>
+          </a:bodyPr>
+          <a:lstStyle/>
+          <a:p>
+            <a:pPr algn="ctr">
+              <a:defRPr sz="1100" b="0">
+                <a:solidFill>
+                  <a:srgbClr val="6B6B6B"/>
+                </a:solidFill>
+                <a:latin typeface="Calibri"/>
+              </a:defRPr>
+            </a:pPr>
+            <a:r>
+              <a:t>Week 3</a:t>
+            </a:r>
+          </a:p>
+        </p:txBody>
+      </p:sp>
+      <p:sp>
+        <p:nvSpPr>
+          <p:cNvPr id="11" name="TextBox 10"/>
+          <p:cNvSpPr txBox="1"/>
+          <p:nvPr/>
+        </p:nvSpPr>
+        <p:spPr>
+          <a:xfrm>
+            <a:off x="2834639" y="2057400"/>
+            <a:ext cx="1874519" cy="365760"/>
+          </a:xfrm>
+          <a:prstGeom prst="rect">
+            <a:avLst/>
+          </a:prstGeom>
+          <a:noFill/>
+        </p:spPr>
+        <p:txBody>
+          <a:bodyPr wrap="square">
+            <a:spAutoFit/>
+          </a:bodyPr>
+          <a:lstStyle/>
+          <a:p>
+            <a:pPr algn="ctr">
+              <a:defRPr sz="1600" b="1">
+                <a:solidFill>
+                  <a:srgbClr val="D4A843"/>
+                </a:solidFill>
+                <a:latin typeface="Calibri"/>
+              </a:defRPr>
+            </a:pPr>
+            <a:r>
+              <a:t>TESTING</a:t>
+            </a:r>
+          </a:p>
+        </p:txBody>
+      </p:sp>
+      <p:sp>
+        <p:nvSpPr>
+          <p:cNvPr id="12" name="Rectangle 11"/>
+          <p:cNvSpPr/>
+          <p:nvPr/>
+        </p:nvSpPr>
+        <p:spPr>
+          <a:xfrm>
+            <a:off x="2971799" y="2468880"/>
+            <a:ext cx="1600200" cy="27432"/>
+          </a:xfrm>
+          <a:prstGeom prst="rect">
+            <a:avLst/>
+          </a:prstGeom>
+          <a:solidFill>
+            <a:srgbClr val="D4A843"/>
+          </a:solidFill>
+          <a:ln>
+            <a:noFill/>
+          </a:ln>
+        </p:spPr>
+        <p:style>
+          <a:lnRef idx="1">
+            <a:schemeClr val="accent1"/>
+          </a:lnRef>
+          <a:fillRef idx="3">
+            <a:schemeClr val="accent1"/>
+          </a:fillRef>
+          <a:effectRef idx="2">
+            <a:schemeClr val="accent1"/>
+          </a:effectRef>
+          <a:fontRef idx="minor">
+            <a:schemeClr val="lt1"/>
+          </a:fontRef>
+        </p:style>
+        <p:txBody>
+          <a:bodyPr rtlCol="0" anchor="ctr"/>
+          <a:lstStyle/>
+          <a:p>
+            <a:pPr algn="ctr"/>
+          </a:p>
+        </p:txBody>
+      </p:sp>
+      <p:sp>
+        <p:nvSpPr>
+          <p:cNvPr id="13" name="TextBox 12"/>
+          <p:cNvSpPr txBox="1"/>
+          <p:nvPr/>
+        </p:nvSpPr>
+        <p:spPr>
+          <a:xfrm>
+            <a:off x="2834639" y="2606040"/>
+            <a:ext cx="1874519" cy="3200400"/>
+          </a:xfrm>
+          <a:prstGeom prst="rect">
+            <a:avLst/>
+          </a:prstGeom>
+          <a:noFill/>
+        </p:spPr>
+        <p:txBody>
+          <a:bodyPr wrap="square">
+            <a:spAutoFit/>
+          </a:bodyPr>
+          <a:lstStyle/>
+          <a:p>
+            <a:pPr>
+              <a:spcAft>
+                <a:spcPts val="600"/>
+              </a:spcAft>
+              <a:defRPr sz="1000">
+                <a:solidFill>
+                  <a:srgbClr val="FDF8EC"/>
+                </a:solidFill>
+                <a:latin typeface="Calibri"/>
+              </a:defRPr>
+            </a:pPr>
+            <a:r>
+              <a:t>  Internal testing with staff</a:t>
+            </a:r>
+          </a:p>
+          <a:p>
+            <a:pPr>
+              <a:spcAft>
+                <a:spcPts val="600"/>
+              </a:spcAft>
+              <a:defRPr sz="1000">
+                <a:solidFill>
+                  <a:srgbClr val="FDF8EC"/>
+                </a:solidFill>
+                <a:latin typeface="Calibri"/>
+              </a:defRPr>
+            </a:pPr>
+            <a:r>
+              <a:t>  Verify all menu items</a:t>
+            </a:r>
+          </a:p>
+          <a:p>
+            <a:pPr>
+              <a:spcAft>
+                <a:spcPts val="600"/>
+              </a:spcAft>
+              <a:defRPr sz="1000">
+                <a:solidFill>
+                  <a:srgbClr val="FDF8EC"/>
+                </a:solidFill>
+                <a:latin typeface="Calibri"/>
+              </a:defRPr>
+            </a:pPr>
+            <a:r>
+              <a:t>  Test event booking flow</a:t>
+            </a:r>
+          </a:p>
+          <a:p>
+            <a:pPr>
+              <a:spcAft>
+                <a:spcPts val="600"/>
+              </a:spcAft>
+              <a:defRPr sz="1000">
+                <a:solidFill>
+                  <a:srgbClr val="FDF8EC"/>
+                </a:solidFill>
+                <a:latin typeface="Calibri"/>
+              </a:defRPr>
+            </a:pPr>
+            <a:r>
+              <a:t>  QA on iOS, Android, and web</a:t>
+            </a:r>
+          </a:p>
+        </p:txBody>
+      </p:sp>
+      <p:sp>
+        <p:nvSpPr>
+          <p:cNvPr id="14" name="Rounded Rectangle 13"/>
+          <p:cNvSpPr/>
+          <p:nvPr/>
+        </p:nvSpPr>
+        <p:spPr>
+          <a:xfrm>
+            <a:off x="5029200" y="1645920"/>
+            <a:ext cx="2148840" cy="4389120"/>
+          </a:xfrm>
+          <a:prstGeom prst="roundRect">
+            <a:avLst/>
+          </a:prstGeom>
+          <a:solidFill>
+            <a:srgbClr val="111111"/>
+          </a:solidFill>
+          <a:ln w="12700">
+            <a:solidFill>
+              <a:srgbClr val="2A2A2A"/>
+            </a:solidFill>
+          </a:ln>
+        </p:spPr>
+        <p:style>
+          <a:lnRef idx="1">
+            <a:schemeClr val="accent1"/>
+          </a:lnRef>
+          <a:fillRef idx="3">
+            <a:schemeClr val="accent1"/>
+          </a:fillRef>
+          <a:effectRef idx="2">
+            <a:schemeClr val="accent1"/>
+          </a:effectRef>
+          <a:fontRef idx="minor">
+            <a:schemeClr val="lt1"/>
+          </a:fontRef>
+        </p:style>
+        <p:txBody>
+          <a:bodyPr rtlCol="0" anchor="ctr"/>
+          <a:lstStyle/>
+          <a:p>
+            <a:pPr algn="ctr"/>
+          </a:p>
+        </p:txBody>
+      </p:sp>
+      <p:sp>
+        <p:nvSpPr>
+          <p:cNvPr id="15" name="TextBox 14"/>
+          <p:cNvSpPr txBox="1"/>
+          <p:nvPr/>
+        </p:nvSpPr>
+        <p:spPr>
+          <a:xfrm>
+            <a:off x="5166360" y="1783080"/>
+            <a:ext cx="1874519" cy="274320"/>
+          </a:xfrm>
+          <a:prstGeom prst="rect">
+            <a:avLst/>
+          </a:prstGeom>
+          <a:noFill/>
+        </p:spPr>
+        <p:txBody>
+          <a:bodyPr wrap="square">
+            <a:spAutoFit/>
+          </a:bodyPr>
+          <a:lstStyle/>
+          <a:p>
+            <a:pPr algn="ctr">
+              <a:defRPr sz="1100" b="0">
+                <a:solidFill>
+                  <a:srgbClr val="6B6B6B"/>
+                </a:solidFill>
+                <a:latin typeface="Calibri"/>
+              </a:defRPr>
+            </a:pPr>
+            <a:r>
+              <a:t>Week 4</a:t>
+            </a:r>
+          </a:p>
+        </p:txBody>
+      </p:sp>
+      <p:sp>
+        <p:nvSpPr>
+          <p:cNvPr id="16" name="TextBox 15"/>
+          <p:cNvSpPr txBox="1"/>
+          <p:nvPr/>
+        </p:nvSpPr>
+        <p:spPr>
+          <a:xfrm>
+            <a:off x="5166360" y="2057400"/>
+            <a:ext cx="1874519" cy="365760"/>
+          </a:xfrm>
+          <a:prstGeom prst="rect">
+            <a:avLst/>
+          </a:prstGeom>
+          <a:noFill/>
+        </p:spPr>
+        <p:txBody>
+          <a:bodyPr wrap="square">
+            <a:spAutoFit/>
+          </a:bodyPr>
+          <a:lstStyle/>
+          <a:p>
+            <a:pPr algn="ctr">
+              <a:defRPr sz="1600" b="1">
+                <a:solidFill>
+                  <a:srgbClr val="D4A843"/>
+                </a:solidFill>
+                <a:latin typeface="Calibri"/>
+              </a:defRPr>
+            </a:pPr>
+            <a:r>
+              <a:t>SOFT LAUNCH</a:t>
+            </a:r>
+          </a:p>
+        </p:txBody>
+      </p:sp>
+      <p:sp>
+        <p:nvSpPr>
+          <p:cNvPr id="17" name="Rectangle 16"/>
+          <p:cNvSpPr/>
+          <p:nvPr/>
+        </p:nvSpPr>
+        <p:spPr>
+          <a:xfrm>
+            <a:off x="5303520" y="2468880"/>
+            <a:ext cx="1600200" cy="27432"/>
+          </a:xfrm>
+          <a:prstGeom prst="rect">
+            <a:avLst/>
+          </a:prstGeom>
+          <a:solidFill>
+            <a:srgbClr val="D4A843"/>
+          </a:solidFill>
+          <a:ln>
+            <a:noFill/>
+          </a:ln>
+        </p:spPr>
+        <p:style>
+          <a:lnRef idx="1">
+            <a:schemeClr val="accent1"/>
+          </a:lnRef>
+          <a:fillRef idx="3">
+            <a:schemeClr val="accent1"/>
+          </a:fillRef>
+          <a:effectRef idx="2">
+            <a:schemeClr val="accent1"/>
+          </a:effectRef>
+          <a:fontRef idx="minor">
+            <a:schemeClr val="lt1"/>
+          </a:fontRef>
+        </p:style>
+        <p:txBody>
+          <a:bodyPr rtlCol="0" anchor="ctr"/>
+          <a:lstStyle/>
+          <a:p>
+            <a:pPr algn="ctr"/>
+          </a:p>
+        </p:txBody>
+      </p:sp>
+      <p:sp>
+        <p:nvSpPr>
+          <p:cNvPr id="18" name="TextBox 17"/>
+          <p:cNvSpPr txBox="1"/>
+          <p:nvPr/>
+        </p:nvSpPr>
+        <p:spPr>
+          <a:xfrm>
+            <a:off x="5166360" y="2606040"/>
+            <a:ext cx="1874519" cy="3200400"/>
+          </a:xfrm>
+          <a:prstGeom prst="rect">
+            <a:avLst/>
+          </a:prstGeom>
+          <a:noFill/>
+        </p:spPr>
+        <p:txBody>
+          <a:bodyPr wrap="square">
+            <a:spAutoFit/>
+          </a:bodyPr>
+          <a:lstStyle/>
+          <a:p>
+            <a:pPr>
+              <a:spcAft>
+                <a:spcPts val="600"/>
+              </a:spcAft>
+              <a:defRPr sz="1000">
+                <a:solidFill>
+                  <a:srgbClr val="FDF8EC"/>
+                </a:solidFill>
+                <a:latin typeface="Calibri"/>
+              </a:defRPr>
+            </a:pPr>
+            <a:r>
+              <a:t>  Launch to email list</a:t>
+            </a:r>
+          </a:p>
+          <a:p>
+            <a:pPr>
+              <a:spcAft>
+                <a:spcPts val="600"/>
+              </a:spcAft>
+              <a:defRPr sz="1000">
+                <a:solidFill>
+                  <a:srgbClr val="FDF8EC"/>
+                </a:solidFill>
+                <a:latin typeface="Calibri"/>
+              </a:defRPr>
+            </a:pPr>
+            <a:r>
+              <a:t>  Staff promotes to regulars</a:t>
+            </a:r>
+          </a:p>
+          <a:p>
+            <a:pPr>
+              <a:spcAft>
+                <a:spcPts val="600"/>
+              </a:spcAft>
+              <a:defRPr sz="1000">
+                <a:solidFill>
+                  <a:srgbClr val="FDF8EC"/>
+                </a:solidFill>
+                <a:latin typeface="Calibri"/>
+              </a:defRPr>
+            </a:pPr>
+            <a:r>
+              <a:t>  First members earn points</a:t>
+            </a:r>
+          </a:p>
+          <a:p>
+            <a:pPr>
+              <a:spcAft>
+                <a:spcPts val="600"/>
+              </a:spcAft>
+              <a:defRPr sz="1000">
+                <a:solidFill>
+                  <a:srgbClr val="FDF8EC"/>
+                </a:solidFill>
+                <a:latin typeface="Calibri"/>
+              </a:defRPr>
+            </a:pPr>
+            <a:r>
+              <a:t>  Gather initial feedback</a:t>
+            </a:r>
+          </a:p>
+        </p:txBody>
+      </p:sp>
+      <p:sp>
+        <p:nvSpPr>
+          <p:cNvPr id="19" name="Rounded Rectangle 18"/>
+          <p:cNvSpPr/>
+          <p:nvPr/>
+        </p:nvSpPr>
+        <p:spPr>
+          <a:xfrm>
+            <a:off x="7360919" y="1645920"/>
+            <a:ext cx="2148840" cy="4389120"/>
+          </a:xfrm>
+          <a:prstGeom prst="roundRect">
+            <a:avLst/>
+          </a:prstGeom>
+          <a:solidFill>
+            <a:srgbClr val="111111"/>
+          </a:solidFill>
+          <a:ln w="12700">
+            <a:solidFill>
+              <a:srgbClr val="2A2A2A"/>
+            </a:solidFill>
+          </a:ln>
+        </p:spPr>
+        <p:style>
+          <a:lnRef idx="1">
+            <a:schemeClr val="accent1"/>
+          </a:lnRef>
+          <a:fillRef idx="3">
+            <a:schemeClr val="accent1"/>
+          </a:fillRef>
+          <a:effectRef idx="2">
+            <a:schemeClr val="accent1"/>
+          </a:effectRef>
+          <a:fontRef idx="minor">
+            <a:schemeClr val="lt1"/>
+          </a:fontRef>
+        </p:style>
+        <p:txBody>
+          <a:bodyPr rtlCol="0" anchor="ctr"/>
+          <a:lstStyle/>
+          <a:p>
+            <a:pPr algn="ctr"/>
+          </a:p>
+        </p:txBody>
+      </p:sp>
+      <p:sp>
+        <p:nvSpPr>
+          <p:cNvPr id="20" name="TextBox 19"/>
+          <p:cNvSpPr txBox="1"/>
+          <p:nvPr/>
+        </p:nvSpPr>
+        <p:spPr>
+          <a:xfrm>
+            <a:off x="7498079" y="1783080"/>
+            <a:ext cx="1874519" cy="274320"/>
+          </a:xfrm>
+          <a:prstGeom prst="rect">
+            <a:avLst/>
+          </a:prstGeom>
+          <a:noFill/>
+        </p:spPr>
+        <p:txBody>
+          <a:bodyPr wrap="square">
+            <a:spAutoFit/>
+          </a:bodyPr>
+          <a:lstStyle/>
+          <a:p>
+            <a:pPr algn="ctr">
+              <a:defRPr sz="1100" b="0">
+                <a:solidFill>
+                  <a:srgbClr val="6B6B6B"/>
+                </a:solidFill>
+                <a:latin typeface="Calibri"/>
+              </a:defRPr>
+            </a:pPr>
+            <a:r>
+              <a:t>Month 2</a:t>
+            </a:r>
+          </a:p>
+        </p:txBody>
+      </p:sp>
+      <p:sp>
+        <p:nvSpPr>
+          <p:cNvPr id="21" name="TextBox 20"/>
+          <p:cNvSpPr txBox="1"/>
+          <p:nvPr/>
+        </p:nvSpPr>
+        <p:spPr>
+          <a:xfrm>
+            <a:off x="7498079" y="2057400"/>
+            <a:ext cx="1874519" cy="365760"/>
+          </a:xfrm>
+          <a:prstGeom prst="rect">
+            <a:avLst/>
+          </a:prstGeom>
+          <a:noFill/>
+        </p:spPr>
+        <p:txBody>
+          <a:bodyPr wrap="square">
+            <a:spAutoFit/>
+          </a:bodyPr>
+          <a:lstStyle/>
+          <a:p>
+            <a:pPr algn="ctr">
+              <a:defRPr sz="1600" b="1">
+                <a:solidFill>
+                  <a:srgbClr val="D4A843"/>
+                </a:solidFill>
+                <a:latin typeface="Calibri"/>
+              </a:defRPr>
+            </a:pPr>
+            <a:r>
+              <a:t>FULL LAUNCH</a:t>
+            </a:r>
+          </a:p>
+        </p:txBody>
+      </p:sp>
+      <p:sp>
+        <p:nvSpPr>
+          <p:cNvPr id="22" name="Rectangle 21"/>
+          <p:cNvSpPr/>
+          <p:nvPr/>
+        </p:nvSpPr>
+        <p:spPr>
+          <a:xfrm>
+            <a:off x="7635240" y="2468880"/>
+            <a:ext cx="1600200" cy="27432"/>
+          </a:xfrm>
+          <a:prstGeom prst="rect">
+            <a:avLst/>
+          </a:prstGeom>
+          <a:solidFill>
+            <a:srgbClr val="D4A843"/>
+          </a:solidFill>
+          <a:ln>
+            <a:noFill/>
+          </a:ln>
+        </p:spPr>
+        <p:style>
+          <a:lnRef idx="1">
+            <a:schemeClr val="accent1"/>
+          </a:lnRef>
+          <a:fillRef idx="3">
+            <a:schemeClr val="accent1"/>
+          </a:fillRef>
+          <a:effectRef idx="2">
+            <a:schemeClr val="accent1"/>
+          </a:effectRef>
+          <a:fontRef idx="minor">
+            <a:schemeClr val="lt1"/>
+          </a:fontRef>
+        </p:style>
+        <p:txBody>
+          <a:bodyPr rtlCol="0" anchor="ctr"/>
+          <a:lstStyle/>
+          <a:p>
+            <a:pPr algn="ctr"/>
+          </a:p>
+        </p:txBody>
+      </p:sp>
+      <p:sp>
+        <p:nvSpPr>
+          <p:cNvPr id="23" name="TextBox 22"/>
+          <p:cNvSpPr txBox="1"/>
+          <p:nvPr/>
+        </p:nvSpPr>
+        <p:spPr>
+          <a:xfrm>
+            <a:off x="7498079" y="2606040"/>
+            <a:ext cx="1874519" cy="3200400"/>
+          </a:xfrm>
+          <a:prstGeom prst="rect">
+            <a:avLst/>
+          </a:prstGeom>
+          <a:noFill/>
+        </p:spPr>
+        <p:txBody>
+          <a:bodyPr wrap="square">
+            <a:spAutoFit/>
+          </a:bodyPr>
+          <a:lstStyle/>
+          <a:p>
+            <a:pPr>
+              <a:spcAft>
+                <a:spcPts val="600"/>
+              </a:spcAft>
+              <a:defRPr sz="1000">
+                <a:solidFill>
+                  <a:srgbClr val="FDF8EC"/>
+                </a:solidFill>
+                <a:latin typeface="Calibri"/>
+              </a:defRPr>
+            </a:pPr>
+            <a:r>
+              <a:t>  App Store + Google Play live</a:t>
+            </a:r>
+          </a:p>
+          <a:p>
+            <a:pPr>
+              <a:spcAft>
+                <a:spcPts val="600"/>
+              </a:spcAft>
+              <a:defRPr sz="1000">
+                <a:solidFill>
+                  <a:srgbClr val="FDF8EC"/>
+                </a:solidFill>
+                <a:latin typeface="Calibri"/>
+              </a:defRPr>
+            </a:pPr>
+            <a:r>
+              <a:t>  First member event</a:t>
+            </a:r>
+          </a:p>
+          <a:p>
+            <a:pPr>
+              <a:spcAft>
+                <a:spcPts val="600"/>
+              </a:spcAft>
+              <a:defRPr sz="1000">
+                <a:solidFill>
+                  <a:srgbClr val="FDF8EC"/>
+                </a:solidFill>
+                <a:latin typeface="Calibri"/>
+              </a:defRPr>
+            </a:pPr>
+            <a:r>
+              <a:t>  Push notification campaigns</a:t>
+            </a:r>
+          </a:p>
+          <a:p>
+            <a:pPr>
+              <a:spcAft>
+                <a:spcPts val="600"/>
+              </a:spcAft>
+              <a:defRPr sz="1000">
+                <a:solidFill>
+                  <a:srgbClr val="FDF8EC"/>
+                </a:solidFill>
+                <a:latin typeface="Calibri"/>
+              </a:defRPr>
+            </a:pPr>
+            <a:r>
+              <a:t>  Referral program activated</a:t>
+            </a:r>
+          </a:p>
+        </p:txBody>
+      </p:sp>
+      <p:sp>
+        <p:nvSpPr>
+          <p:cNvPr id="24" name="Rounded Rectangle 23"/>
+          <p:cNvSpPr/>
+          <p:nvPr/>
+        </p:nvSpPr>
+        <p:spPr>
+          <a:xfrm>
+            <a:off x="9692640" y="1645920"/>
+            <a:ext cx="2148840" cy="4389120"/>
+          </a:xfrm>
+          <a:prstGeom prst="roundRect">
+            <a:avLst/>
+          </a:prstGeom>
+          <a:solidFill>
+            <a:srgbClr val="111111"/>
+          </a:solidFill>
+          <a:ln w="12700">
+            <a:solidFill>
+              <a:srgbClr val="2A2A2A"/>
+            </a:solidFill>
+          </a:ln>
+        </p:spPr>
+        <p:style>
+          <a:lnRef idx="1">
+            <a:schemeClr val="accent1"/>
+          </a:lnRef>
+          <a:fillRef idx="3">
+            <a:schemeClr val="accent1"/>
+          </a:fillRef>
+          <a:effectRef idx="2">
+            <a:schemeClr val="accent1"/>
+          </a:effectRef>
+          <a:fontRef idx="minor">
+            <a:schemeClr val="lt1"/>
+          </a:fontRef>
+        </p:style>
+        <p:txBody>
+          <a:bodyPr rtlCol="0" anchor="ctr"/>
+          <a:lstStyle/>
+          <a:p>
+            <a:pPr algn="ctr"/>
+          </a:p>
+        </p:txBody>
+      </p:sp>
+      <p:sp>
+        <p:nvSpPr>
+          <p:cNvPr id="25" name="TextBox 24"/>
+          <p:cNvSpPr txBox="1"/>
+          <p:nvPr/>
+        </p:nvSpPr>
+        <p:spPr>
+          <a:xfrm>
+            <a:off x="9829800" y="1783080"/>
+            <a:ext cx="1874519" cy="274320"/>
+          </a:xfrm>
+          <a:prstGeom prst="rect">
+            <a:avLst/>
+          </a:prstGeom>
+          <a:noFill/>
+        </p:spPr>
+        <p:txBody>
+          <a:bodyPr wrap="square">
+            <a:spAutoFit/>
+          </a:bodyPr>
+          <a:lstStyle/>
+          <a:p>
+            <a:pPr algn="ctr">
+              <a:defRPr sz="1100" b="0">
+                <a:solidFill>
+                  <a:srgbClr val="6B6B6B"/>
+                </a:solidFill>
+                <a:latin typeface="Calibri"/>
+              </a:defRPr>
+            </a:pPr>
+            <a:r>
+              <a:t>Month 3+</a:t>
+            </a:r>
+          </a:p>
+        </p:txBody>
+      </p:sp>
+      <p:sp>
+        <p:nvSpPr>
+          <p:cNvPr id="26" name="TextBox 25"/>
+          <p:cNvSpPr txBox="1"/>
+          <p:nvPr/>
+        </p:nvSpPr>
+        <p:spPr>
+          <a:xfrm>
+            <a:off x="9829800" y="2057400"/>
+            <a:ext cx="1874519" cy="365760"/>
+          </a:xfrm>
+          <a:prstGeom prst="rect">
+            <a:avLst/>
+          </a:prstGeom>
+          <a:noFill/>
+        </p:spPr>
+        <p:txBody>
+          <a:bodyPr wrap="square">
+            <a:spAutoFit/>
+          </a:bodyPr>
+          <a:lstStyle/>
+          <a:p>
+            <a:pPr algn="ctr">
+              <a:defRPr sz="1600" b="1">
+                <a:solidFill>
+                  <a:srgbClr val="D4A843"/>
+                </a:solidFill>
+                <a:latin typeface="Calibri"/>
+              </a:defRPr>
+            </a:pPr>
+            <a:r>
+              <a:t>GROWTH</a:t>
+            </a:r>
+          </a:p>
+        </p:txBody>
+      </p:sp>
+      <p:sp>
+        <p:nvSpPr>
+          <p:cNvPr id="27" name="Rectangle 26"/>
+          <p:cNvSpPr/>
+          <p:nvPr/>
+        </p:nvSpPr>
+        <p:spPr>
+          <a:xfrm>
+            <a:off x="9966960" y="2468880"/>
+            <a:ext cx="1600200" cy="27432"/>
+          </a:xfrm>
+          <a:prstGeom prst="rect">
+            <a:avLst/>
+          </a:prstGeom>
+          <a:solidFill>
+            <a:srgbClr val="D4A843"/>
+          </a:solidFill>
+          <a:ln>
+            <a:noFill/>
+          </a:ln>
+        </p:spPr>
+        <p:style>
+          <a:lnRef idx="1">
+            <a:schemeClr val="accent1"/>
+          </a:lnRef>
+          <a:fillRef idx="3">
+            <a:schemeClr val="accent1"/>
+          </a:fillRef>
+          <a:effectRef idx="2">
+            <a:schemeClr val="accent1"/>
+          </a:effectRef>
+          <a:fontRef idx="minor">
+            <a:schemeClr val="lt1"/>
+          </a:fontRef>
+        </p:style>
+        <p:txBody>
+          <a:bodyPr rtlCol="0" anchor="ctr"/>
+          <a:lstStyle/>
+          <a:p>
+            <a:pPr algn="ctr"/>
+          </a:p>
+        </p:txBody>
+      </p:sp>
+      <p:sp>
+        <p:nvSpPr>
+          <p:cNvPr id="28" name="TextBox 27"/>
+          <p:cNvSpPr txBox="1"/>
+          <p:nvPr/>
+        </p:nvSpPr>
+        <p:spPr>
+          <a:xfrm>
+            <a:off x="9829800" y="2606040"/>
+            <a:ext cx="1874519" cy="3200400"/>
+          </a:xfrm>
+          <a:prstGeom prst="rect">
+            <a:avLst/>
+          </a:prstGeom>
+          <a:noFill/>
+        </p:spPr>
+        <p:txBody>
+          <a:bodyPr wrap="square">
+            <a:spAutoFit/>
+          </a:bodyPr>
+          <a:lstStyle/>
+          <a:p>
+            <a:pPr>
+              <a:spcAft>
+                <a:spcPts val="600"/>
+              </a:spcAft>
+              <a:defRPr sz="1000">
+                <a:solidFill>
+                  <a:srgbClr val="FDF8EC"/>
+                </a:solidFill>
+                <a:latin typeface="Calibri"/>
+              </a:defRPr>
+            </a:pPr>
+            <a:r>
+              <a:t>  Monthly events calendar</a:t>
+            </a:r>
+          </a:p>
+          <a:p>
+            <a:pPr>
+              <a:spcAft>
+                <a:spcPts val="600"/>
+              </a:spcAft>
+              <a:defRPr sz="1000">
+                <a:solidFill>
+                  <a:srgbClr val="FDF8EC"/>
+                </a:solidFill>
+                <a:latin typeface="Calibri"/>
+              </a:defRPr>
+            </a:pPr>
+            <a:r>
+              <a:t>  Gift card holiday push</a:t>
+            </a:r>
+          </a:p>
+          <a:p>
+            <a:pPr>
+              <a:spcAft>
+                <a:spcPts val="600"/>
+              </a:spcAft>
+              <a:defRPr sz="1000">
+                <a:solidFill>
+                  <a:srgbClr val="FDF8EC"/>
+                </a:solidFill>
+                <a:latin typeface="Calibri"/>
+              </a:defRPr>
+            </a:pPr>
+            <a:r>
+              <a:t>  At-Home marketing</a:t>
+            </a:r>
+          </a:p>
+          <a:p>
+            <a:pPr>
+              <a:spcAft>
+                <a:spcPts val="600"/>
+              </a:spcAft>
+              <a:defRPr sz="1000">
+                <a:solidFill>
+                  <a:srgbClr val="FDF8EC"/>
+                </a:solidFill>
+                <a:latin typeface="Calibri"/>
+              </a:defRPr>
+            </a:pPr>
+            <a:r>
+              <a:t>  Data-driven optimization</a:t>
+            </a:r>
+          </a:p>
+        </p:txBody>
+      </p:sp>
+    </p:spTree>
+  </p:cSld>
+  <p:clrMapOvr>
+    <a:masterClrMapping/>
+  </p:clrMapOvr>
+</p:sld>
+</file>
+
+<file path=ppt/slides/slide11.xml><?xml version="1.0" encoding="utf-8"?>
+<p:sld xmlns:a="http://schemas.openxmlformats.org/drawingml/2006/main" xmlns:p="http://schemas.openxmlformats.org/presentationml/2006/main" xmlns:r="http://schemas.openxmlformats.org/officeDocument/2006/relationships">
+  <p:cSld>
+    <p:bg>
+      <p:bgPr>
+        <a:solidFill>
+          <a:srgbClr val="0A0A0A"/>
+        </a:solidFill>
+        <a:effectLst/>
+      </p:bgPr>
+    </p:bg>
+    <p:spTree>
+      <p:nvGrpSpPr>
+        <p:cNvPr id="1" name=""/>
+        <p:cNvGrpSpPr/>
+        <p:nvPr/>
+      </p:nvGrpSpPr>
+      <p:grpSpPr/>
+      <p:sp>
+        <p:nvSpPr>
           <p:cNvPr id="2" name="Rectangle 1"/>
           <p:cNvSpPr/>
           <p:nvPr/>
@@ -7204,7 +8545,7 @@
               </a:defRPr>
             </a:pPr>
             <a:r>
-              <a:t>Membership Tiers</a:t>
+              <a:t>Infrastructure &amp; Net Profit</a:t>
             </a:r>
           </a:p>
         </p:txBody>
@@ -7254,167 +8595,194 @@
       </p:sp>
       <p:sp>
         <p:nvSpPr>
-          <p:cNvPr id="4" name="Rounded Rectangle 3"/>
+          <p:cNvPr id="4" name="TextBox 3"/>
+          <p:cNvSpPr txBox="1"/>
+          <p:nvPr/>
+        </p:nvSpPr>
+        <p:spPr>
+          <a:xfrm>
+            <a:off x="731520" y="1371600"/>
+            <a:ext cx="10058400" cy="457200"/>
+          </a:xfrm>
+          <a:prstGeom prst="rect">
+            <a:avLst/>
+          </a:prstGeom>
+          <a:noFill/>
+        </p:spPr>
+        <p:txBody>
+          <a:bodyPr wrap="square">
+            <a:spAutoFit/>
+          </a:bodyPr>
+          <a:lstStyle/>
+          <a:p>
+            <a:pPr algn="l">
+              <a:defRPr sz="1400" b="0">
+                <a:solidFill>
+                  <a:srgbClr val="6B6B6B"/>
+                </a:solidFill>
+                <a:latin typeface="Calibri"/>
+              </a:defRPr>
+            </a:pPr>
+            <a:r>
+              <a:t>Real infrastructure costs on Supabase Pro — lean and scalable:</a:t>
+            </a:r>
+          </a:p>
+        </p:txBody>
+      </p:sp>
+      <p:sp>
+        <p:nvSpPr>
+          <p:cNvPr id="5" name="TextBox 4"/>
+          <p:cNvSpPr txBox="1"/>
+          <p:nvPr/>
+        </p:nvSpPr>
+        <p:spPr>
+          <a:xfrm>
+            <a:off x="1097280" y="1920240"/>
+            <a:ext cx="3657600" cy="320040"/>
+          </a:xfrm>
+          <a:prstGeom prst="rect">
+            <a:avLst/>
+          </a:prstGeom>
+          <a:noFill/>
+        </p:spPr>
+        <p:txBody>
+          <a:bodyPr wrap="square">
+            <a:spAutoFit/>
+          </a:bodyPr>
+          <a:lstStyle/>
+          <a:p>
+            <a:pPr algn="l">
+              <a:defRPr sz="1100" b="1">
+                <a:solidFill>
+                  <a:srgbClr val="D4A843"/>
+                </a:solidFill>
+                <a:latin typeface="Calibri"/>
+              </a:defRPr>
+            </a:pPr>
+            <a:r>
+              <a:t>Cost Item</a:t>
+            </a:r>
+          </a:p>
+        </p:txBody>
+      </p:sp>
+      <p:sp>
+        <p:nvSpPr>
+          <p:cNvPr id="6" name="TextBox 5"/>
+          <p:cNvSpPr txBox="1"/>
+          <p:nvPr/>
+        </p:nvSpPr>
+        <p:spPr>
+          <a:xfrm>
+            <a:off x="4572000" y="1920240"/>
+            <a:ext cx="4114800" cy="320040"/>
+          </a:xfrm>
+          <a:prstGeom prst="rect">
+            <a:avLst/>
+          </a:prstGeom>
+          <a:noFill/>
+        </p:spPr>
+        <p:txBody>
+          <a:bodyPr wrap="square">
+            <a:spAutoFit/>
+          </a:bodyPr>
+          <a:lstStyle/>
+          <a:p>
+            <a:pPr algn="l">
+              <a:defRPr sz="1100" b="1">
+                <a:solidFill>
+                  <a:srgbClr val="D4A843"/>
+                </a:solidFill>
+                <a:latin typeface="Calibri"/>
+              </a:defRPr>
+            </a:pPr>
+            <a:r>
+              <a:t>Details</a:t>
+            </a:r>
+          </a:p>
+        </p:txBody>
+      </p:sp>
+      <p:sp>
+        <p:nvSpPr>
+          <p:cNvPr id="7" name="TextBox 6"/>
+          <p:cNvSpPr txBox="1"/>
+          <p:nvPr/>
+        </p:nvSpPr>
+        <p:spPr>
+          <a:xfrm>
+            <a:off x="8686800" y="1920240"/>
+            <a:ext cx="1371600" cy="320040"/>
+          </a:xfrm>
+          <a:prstGeom prst="rect">
+            <a:avLst/>
+          </a:prstGeom>
+          <a:noFill/>
+        </p:spPr>
+        <p:txBody>
+          <a:bodyPr wrap="square">
+            <a:spAutoFit/>
+          </a:bodyPr>
+          <a:lstStyle/>
+          <a:p>
+            <a:pPr algn="r">
+              <a:defRPr sz="1100" b="1">
+                <a:solidFill>
+                  <a:srgbClr val="D4A843"/>
+                </a:solidFill>
+                <a:latin typeface="Calibri"/>
+              </a:defRPr>
+            </a:pPr>
+            <a:r>
+              <a:t>Rate</a:t>
+            </a:r>
+          </a:p>
+        </p:txBody>
+      </p:sp>
+      <p:sp>
+        <p:nvSpPr>
+          <p:cNvPr id="8" name="TextBox 7"/>
+          <p:cNvSpPr txBox="1"/>
+          <p:nvPr/>
+        </p:nvSpPr>
+        <p:spPr>
+          <a:xfrm>
+            <a:off x="10058400" y="1920240"/>
+            <a:ext cx="1371600" cy="320040"/>
+          </a:xfrm>
+          <a:prstGeom prst="rect">
+            <a:avLst/>
+          </a:prstGeom>
+          <a:noFill/>
+        </p:spPr>
+        <p:txBody>
+          <a:bodyPr wrap="square">
+            <a:spAutoFit/>
+          </a:bodyPr>
+          <a:lstStyle/>
+          <a:p>
+            <a:pPr algn="r">
+              <a:defRPr sz="1100" b="1">
+                <a:solidFill>
+                  <a:srgbClr val="D4A843"/>
+                </a:solidFill>
+                <a:latin typeface="Calibri"/>
+              </a:defRPr>
+            </a:pPr>
+            <a:r>
+              <a:t>Annual</a:t>
+            </a:r>
+          </a:p>
+        </p:txBody>
+      </p:sp>
+      <p:sp>
+        <p:nvSpPr>
+          <p:cNvPr id="9" name="Rectangle 8"/>
           <p:cNvSpPr/>
           <p:nvPr/>
         </p:nvSpPr>
         <p:spPr>
           <a:xfrm>
-            <a:off x="731520" y="1645920"/>
-            <a:ext cx="3566160" cy="4572000"/>
-          </a:xfrm>
-          <a:prstGeom prst="roundRect">
-            <a:avLst/>
-          </a:prstGeom>
-          <a:solidFill>
-            <a:srgbClr val="111111"/>
-          </a:solidFill>
-          <a:ln w="12700">
-            <a:solidFill>
-              <a:srgbClr val="2A2A2A"/>
-            </a:solidFill>
-          </a:ln>
-        </p:spPr>
-        <p:style>
-          <a:lnRef idx="1">
-            <a:schemeClr val="accent1"/>
-          </a:lnRef>
-          <a:fillRef idx="3">
-            <a:schemeClr val="accent1"/>
-          </a:fillRef>
-          <a:effectRef idx="2">
-            <a:schemeClr val="accent1"/>
-          </a:effectRef>
-          <a:fontRef idx="minor">
-            <a:schemeClr val="lt1"/>
-          </a:fontRef>
-        </p:style>
-        <p:txBody>
-          <a:bodyPr rtlCol="0" anchor="ctr"/>
-          <a:lstStyle/>
-          <a:p>
-            <a:pPr algn="ctr"/>
-          </a:p>
-        </p:txBody>
-      </p:sp>
-      <p:sp>
-        <p:nvSpPr>
-          <p:cNvPr id="5" name="TextBox 4"/>
-          <p:cNvSpPr txBox="1"/>
-          <p:nvPr/>
-        </p:nvSpPr>
-        <p:spPr>
-          <a:xfrm>
-            <a:off x="1005840" y="1783080"/>
-            <a:ext cx="3017520" cy="457200"/>
-          </a:xfrm>
-          <a:prstGeom prst="rect">
-            <a:avLst/>
-          </a:prstGeom>
-          <a:noFill/>
-        </p:spPr>
-        <p:txBody>
-          <a:bodyPr wrap="square">
-            <a:spAutoFit/>
-          </a:bodyPr>
-          <a:lstStyle/>
-          <a:p>
-            <a:pPr algn="ctr">
-              <a:defRPr sz="2400" b="1">
-                <a:solidFill>
-                  <a:srgbClr val="6B6B6B"/>
-                </a:solidFill>
-                <a:latin typeface="Georgia"/>
-              </a:defRPr>
-            </a:pPr>
-            <a:r>
-              <a:t>Flûte</a:t>
-            </a:r>
-          </a:p>
-        </p:txBody>
-      </p:sp>
-      <p:sp>
-        <p:nvSpPr>
-          <p:cNvPr id="6" name="TextBox 5"/>
-          <p:cNvSpPr txBox="1"/>
-          <p:nvPr/>
-        </p:nvSpPr>
-        <p:spPr>
-          <a:xfrm>
-            <a:off x="1005840" y="2240280"/>
-            <a:ext cx="3017520" cy="365760"/>
-          </a:xfrm>
-          <a:prstGeom prst="rect">
-            <a:avLst/>
-          </a:prstGeom>
-          <a:noFill/>
-        </p:spPr>
-        <p:txBody>
-          <a:bodyPr wrap="square">
-            <a:spAutoFit/>
-          </a:bodyPr>
-          <a:lstStyle/>
-          <a:p>
-            <a:pPr algn="ctr">
-              <a:defRPr sz="1800" b="1">
-                <a:solidFill>
-                  <a:srgbClr val="FFFFFF"/>
-                </a:solidFill>
-                <a:latin typeface="Calibri"/>
-              </a:defRPr>
-            </a:pPr>
-            <a:r>
-              <a:t>Free</a:t>
-            </a:r>
-          </a:p>
-        </p:txBody>
-      </p:sp>
-      <p:sp>
-        <p:nvSpPr>
-          <p:cNvPr id="7" name="TextBox 6"/>
-          <p:cNvSpPr txBox="1"/>
-          <p:nvPr/>
-        </p:nvSpPr>
-        <p:spPr>
-          <a:xfrm>
-            <a:off x="1005840" y="2606040"/>
-            <a:ext cx="3017520" cy="274320"/>
-          </a:xfrm>
-          <a:prstGeom prst="rect">
-            <a:avLst/>
-          </a:prstGeom>
-          <a:noFill/>
-        </p:spPr>
-        <p:txBody>
-          <a:bodyPr wrap="square">
-            <a:spAutoFit/>
-          </a:bodyPr>
-          <a:lstStyle/>
-          <a:p>
-            <a:pPr algn="ctr">
-              <a:defRPr sz="1100" b="0">
-                <a:solidFill>
-                  <a:srgbClr val="6B6B6B"/>
-                </a:solidFill>
-                <a:latin typeface="Calibri"/>
-              </a:defRPr>
-            </a:pPr>
-            <a:r>
-              <a:t>Entry tier — every signup</a:t>
-            </a:r>
-          </a:p>
-        </p:txBody>
-      </p:sp>
-      <p:sp>
-        <p:nvSpPr>
-          <p:cNvPr id="8" name="Rectangle 7"/>
-          <p:cNvSpPr/>
-          <p:nvPr/>
-        </p:nvSpPr>
-        <p:spPr>
-          <a:xfrm>
-            <a:off x="1188720" y="2926080"/>
-            <a:ext cx="2651760" cy="27432"/>
+            <a:off x="1097280" y="2240280"/>
+            <a:ext cx="10058400" cy="27432"/>
           </a:xfrm>
           <a:prstGeom prst="rect">
             <a:avLst/>
@@ -7450,31 +8818,172 @@
       </p:sp>
       <p:sp>
         <p:nvSpPr>
-          <p:cNvPr id="9" name="TextBox 8"/>
-          <p:cNvSpPr txBox="1"/>
-          <p:nvPr/>
-        </p:nvSpPr>
-        <p:spPr>
-          <a:xfrm>
-            <a:off x="1005840" y="3108960"/>
-            <a:ext cx="3017520" cy="2926080"/>
-          </a:xfrm>
-          <a:prstGeom prst="rect">
-            <a:avLst/>
-          </a:prstGeom>
-          <a:noFill/>
-        </p:spPr>
-        <p:txBody>
-          <a:bodyPr wrap="square">
-            <a:spAutoFit/>
-          </a:bodyPr>
-          <a:lstStyle/>
-          <a:p>
-            <a:pPr>
-              <a:spcAft>
-                <a:spcPts val="600"/>
-              </a:spcAft>
-              <a:defRPr sz="1100">
+          <p:cNvPr id="10" name="TextBox 9"/>
+          <p:cNvSpPr txBox="1"/>
+          <p:nvPr/>
+        </p:nvSpPr>
+        <p:spPr>
+          <a:xfrm>
+            <a:off x="1097280" y="2331720"/>
+            <a:ext cx="3474720" cy="256032"/>
+          </a:xfrm>
+          <a:prstGeom prst="rect">
+            <a:avLst/>
+          </a:prstGeom>
+          <a:noFill/>
+        </p:spPr>
+        <p:txBody>
+          <a:bodyPr wrap="square">
+            <a:spAutoFit/>
+          </a:bodyPr>
+          <a:lstStyle/>
+          <a:p>
+            <a:pPr algn="l">
+              <a:defRPr sz="900" b="0">
+                <a:solidFill>
+                  <a:srgbClr val="FFFFFF"/>
+                </a:solidFill>
+                <a:latin typeface="Calibri"/>
+              </a:defRPr>
+            </a:pPr>
+            <a:r>
+              <a:t>Supabase Pro Plan (base)</a:t>
+            </a:r>
+          </a:p>
+        </p:txBody>
+      </p:sp>
+      <p:sp>
+        <p:nvSpPr>
+          <p:cNvPr id="11" name="TextBox 10"/>
+          <p:cNvSpPr txBox="1"/>
+          <p:nvPr/>
+        </p:nvSpPr>
+        <p:spPr>
+          <a:xfrm>
+            <a:off x="4572000" y="2331720"/>
+            <a:ext cx="4114800" cy="256032"/>
+          </a:xfrm>
+          <a:prstGeom prst="rect">
+            <a:avLst/>
+          </a:prstGeom>
+          <a:noFill/>
+        </p:spPr>
+        <p:txBody>
+          <a:bodyPr wrap="square">
+            <a:spAutoFit/>
+          </a:bodyPr>
+          <a:lstStyle/>
+          <a:p>
+            <a:pPr algn="l">
+              <a:defRPr sz="800" b="0">
+                <a:solidFill>
+                  <a:srgbClr val="6B6B6B"/>
+                </a:solidFill>
+                <a:latin typeface="Calibri"/>
+              </a:defRPr>
+            </a:pPr>
+            <a:r>
+              <a:t>Per project/month</a:t>
+            </a:r>
+          </a:p>
+        </p:txBody>
+      </p:sp>
+      <p:sp>
+        <p:nvSpPr>
+          <p:cNvPr id="12" name="TextBox 11"/>
+          <p:cNvSpPr txBox="1"/>
+          <p:nvPr/>
+        </p:nvSpPr>
+        <p:spPr>
+          <a:xfrm>
+            <a:off x="8686800" y="2331720"/>
+            <a:ext cx="1371600" cy="256032"/>
+          </a:xfrm>
+          <a:prstGeom prst="rect">
+            <a:avLst/>
+          </a:prstGeom>
+          <a:noFill/>
+        </p:spPr>
+        <p:txBody>
+          <a:bodyPr wrap="square">
+            <a:spAutoFit/>
+          </a:bodyPr>
+          <a:lstStyle/>
+          <a:p>
+            <a:pPr algn="r">
+              <a:defRPr sz="900" b="0">
+                <a:solidFill>
+                  <a:srgbClr val="6B6B6B"/>
+                </a:solidFill>
+                <a:latin typeface="Calibri"/>
+              </a:defRPr>
+            </a:pPr>
+            <a:r>
+              <a:t>$25/mo</a:t>
+            </a:r>
+          </a:p>
+        </p:txBody>
+      </p:sp>
+      <p:sp>
+        <p:nvSpPr>
+          <p:cNvPr id="13" name="TextBox 12"/>
+          <p:cNvSpPr txBox="1"/>
+          <p:nvPr/>
+        </p:nvSpPr>
+        <p:spPr>
+          <a:xfrm>
+            <a:off x="10058400" y="2331720"/>
+            <a:ext cx="1371600" cy="256032"/>
+          </a:xfrm>
+          <a:prstGeom prst="rect">
+            <a:avLst/>
+          </a:prstGeom>
+          <a:noFill/>
+        </p:spPr>
+        <p:txBody>
+          <a:bodyPr wrap="square">
+            <a:spAutoFit/>
+          </a:bodyPr>
+          <a:lstStyle/>
+          <a:p>
+            <a:pPr algn="r">
+              <a:defRPr sz="900" b="0">
+                <a:solidFill>
+                  <a:srgbClr val="FFFFFF"/>
+                </a:solidFill>
+                <a:latin typeface="Calibri"/>
+              </a:defRPr>
+            </a:pPr>
+            <a:r>
+              <a:t>$300</a:t>
+            </a:r>
+          </a:p>
+        </p:txBody>
+      </p:sp>
+      <p:sp>
+        <p:nvSpPr>
+          <p:cNvPr id="14" name="TextBox 13"/>
+          <p:cNvSpPr txBox="1"/>
+          <p:nvPr/>
+        </p:nvSpPr>
+        <p:spPr>
+          <a:xfrm>
+            <a:off x="1097280" y="2606039"/>
+            <a:ext cx="3474720" cy="256032"/>
+          </a:xfrm>
+          <a:prstGeom prst="rect">
+            <a:avLst/>
+          </a:prstGeom>
+          <a:noFill/>
+        </p:spPr>
+        <p:txBody>
+          <a:bodyPr wrap="square">
+            <a:spAutoFit/>
+          </a:bodyPr>
+          <a:lstStyle/>
+          <a:p>
+            <a:pPr algn="l">
+              <a:defRPr sz="900" b="0">
                 <a:solidFill>
                   <a:srgbClr val="FDF8EC"/>
                 </a:solidFill>
@@ -7482,15 +8991,107 @@
               </a:defRPr>
             </a:pPr>
             <a:r>
-              <a:t>  1x points on every visit</a:t>
-            </a:r>
-          </a:p>
-          <a:p>
-            <a:pPr>
-              <a:spcAft>
-                <a:spcPts val="600"/>
-              </a:spcAft>
-              <a:defRPr sz="1100">
+              <a:t>MAU (100K included free)</a:t>
+            </a:r>
+          </a:p>
+        </p:txBody>
+      </p:sp>
+      <p:sp>
+        <p:nvSpPr>
+          <p:cNvPr id="15" name="TextBox 14"/>
+          <p:cNvSpPr txBox="1"/>
+          <p:nvPr/>
+        </p:nvSpPr>
+        <p:spPr>
+          <a:xfrm>
+            <a:off x="4572000" y="2606039"/>
+            <a:ext cx="4114800" cy="256032"/>
+          </a:xfrm>
+          <a:prstGeom prst="rect">
+            <a:avLst/>
+          </a:prstGeom>
+          <a:noFill/>
+        </p:spPr>
+        <p:txBody>
+          <a:bodyPr wrap="square">
+            <a:spAutoFit/>
+          </a:bodyPr>
+          <a:lstStyle/>
+          <a:p>
+            <a:pPr algn="l">
+              <a:defRPr sz="800" b="0">
+                <a:solidFill>
+                  <a:srgbClr val="6B6B6B"/>
+                </a:solidFill>
+                <a:latin typeface="Calibri"/>
+              </a:defRPr>
+            </a:pPr>
+            <a:r>
+              <a:t>First 100K MAUs included in Pro</a:t>
+            </a:r>
+          </a:p>
+        </p:txBody>
+      </p:sp>
+      <p:sp>
+        <p:nvSpPr>
+          <p:cNvPr id="16" name="TextBox 15"/>
+          <p:cNvSpPr txBox="1"/>
+          <p:nvPr/>
+        </p:nvSpPr>
+        <p:spPr>
+          <a:xfrm>
+            <a:off x="8686800" y="2606039"/>
+            <a:ext cx="1371600" cy="256032"/>
+          </a:xfrm>
+          <a:prstGeom prst="rect">
+            <a:avLst/>
+          </a:prstGeom>
+          <a:noFill/>
+        </p:spPr>
+        <p:txBody>
+          <a:bodyPr wrap="square">
+            <a:spAutoFit/>
+          </a:bodyPr>
+          <a:lstStyle/>
+          <a:p>
+            <a:pPr algn="r">
+              <a:defRPr sz="900" b="0">
+                <a:solidFill>
+                  <a:srgbClr val="6B6B6B"/>
+                </a:solidFill>
+                <a:latin typeface="Calibri"/>
+              </a:defRPr>
+            </a:pPr>
+            <a:r>
+              <a:t>$0.00</a:t>
+            </a:r>
+          </a:p>
+        </p:txBody>
+      </p:sp>
+      <p:sp>
+        <p:nvSpPr>
+          <p:cNvPr id="17" name="TextBox 16"/>
+          <p:cNvSpPr txBox="1"/>
+          <p:nvPr/>
+        </p:nvSpPr>
+        <p:spPr>
+          <a:xfrm>
+            <a:off x="10058400" y="2606039"/>
+            <a:ext cx="1371600" cy="256032"/>
+          </a:xfrm>
+          <a:prstGeom prst="rect">
+            <a:avLst/>
+          </a:prstGeom>
+          <a:noFill/>
+        </p:spPr>
+        <p:txBody>
+          <a:bodyPr wrap="square">
+            <a:spAutoFit/>
+          </a:bodyPr>
+          <a:lstStyle/>
+          <a:p>
+            <a:pPr algn="r">
+              <a:defRPr sz="900" b="0">
                 <a:solidFill>
                   <a:srgbClr val="FDF8EC"/>
                 </a:solidFill>
@@ -7498,15 +9099,179 @@
               </a:defRPr>
             </a:pPr>
             <a:r>
-              <a:t>  Member-only event access</a:t>
-            </a:r>
-          </a:p>
-          <a:p>
-            <a:pPr>
-              <a:spcAft>
-                <a:spcPts val="600"/>
-              </a:spcAft>
-              <a:defRPr sz="1100">
+              <a:t>$0</a:t>
+            </a:r>
+          </a:p>
+        </p:txBody>
+      </p:sp>
+      <p:sp>
+        <p:nvSpPr>
+          <p:cNvPr id="18" name="TextBox 17"/>
+          <p:cNvSpPr txBox="1"/>
+          <p:nvPr/>
+        </p:nvSpPr>
+        <p:spPr>
+          <a:xfrm>
+            <a:off x="1097280" y="2880360"/>
+            <a:ext cx="3474720" cy="256032"/>
+          </a:xfrm>
+          <a:prstGeom prst="rect">
+            <a:avLst/>
+          </a:prstGeom>
+          <a:noFill/>
+        </p:spPr>
+        <p:txBody>
+          <a:bodyPr wrap="square">
+            <a:spAutoFit/>
+          </a:bodyPr>
+          <a:lstStyle/>
+          <a:p>
+            <a:pPr algn="l">
+              <a:defRPr sz="900" b="0">
+                <a:solidFill>
+                  <a:srgbClr val="FFFFFF"/>
+                </a:solidFill>
+                <a:latin typeface="Calibri"/>
+              </a:defRPr>
+            </a:pPr>
+            <a:r>
+              <a:t>MAU Overage</a:t>
+            </a:r>
+          </a:p>
+        </p:txBody>
+      </p:sp>
+      <p:sp>
+        <p:nvSpPr>
+          <p:cNvPr id="19" name="TextBox 18"/>
+          <p:cNvSpPr txBox="1"/>
+          <p:nvPr/>
+        </p:nvSpPr>
+        <p:spPr>
+          <a:xfrm>
+            <a:off x="4572000" y="2880360"/>
+            <a:ext cx="4114800" cy="256032"/>
+          </a:xfrm>
+          <a:prstGeom prst="rect">
+            <a:avLst/>
+          </a:prstGeom>
+          <a:noFill/>
+        </p:spPr>
+        <p:txBody>
+          <a:bodyPr wrap="square">
+            <a:spAutoFit/>
+          </a:bodyPr>
+          <a:lstStyle/>
+          <a:p>
+            <a:pPr algn="l">
+              <a:defRPr sz="800" b="0">
+                <a:solidFill>
+                  <a:srgbClr val="6B6B6B"/>
+                </a:solidFill>
+                <a:latin typeface="Calibri"/>
+              </a:defRPr>
+            </a:pPr>
+            <a:r>
+              <a:t>Est. 2,000 MAU Year 1 — well under 100K limit</a:t>
+            </a:r>
+          </a:p>
+        </p:txBody>
+      </p:sp>
+      <p:sp>
+        <p:nvSpPr>
+          <p:cNvPr id="20" name="TextBox 19"/>
+          <p:cNvSpPr txBox="1"/>
+          <p:nvPr/>
+        </p:nvSpPr>
+        <p:spPr>
+          <a:xfrm>
+            <a:off x="8686800" y="2880360"/>
+            <a:ext cx="1371600" cy="256032"/>
+          </a:xfrm>
+          <a:prstGeom prst="rect">
+            <a:avLst/>
+          </a:prstGeom>
+          <a:noFill/>
+        </p:spPr>
+        <p:txBody>
+          <a:bodyPr wrap="square">
+            <a:spAutoFit/>
+          </a:bodyPr>
+          <a:lstStyle/>
+          <a:p>
+            <a:pPr algn="r">
+              <a:defRPr sz="900" b="0">
+                <a:solidFill>
+                  <a:srgbClr val="6B6B6B"/>
+                </a:solidFill>
+                <a:latin typeface="Calibri"/>
+              </a:defRPr>
+            </a:pPr>
+            <a:r>
+              <a:t>$0.00</a:t>
+            </a:r>
+          </a:p>
+        </p:txBody>
+      </p:sp>
+      <p:sp>
+        <p:nvSpPr>
+          <p:cNvPr id="21" name="TextBox 20"/>
+          <p:cNvSpPr txBox="1"/>
+          <p:nvPr/>
+        </p:nvSpPr>
+        <p:spPr>
+          <a:xfrm>
+            <a:off x="10058400" y="2880360"/>
+            <a:ext cx="1371600" cy="256032"/>
+          </a:xfrm>
+          <a:prstGeom prst="rect">
+            <a:avLst/>
+          </a:prstGeom>
+          <a:noFill/>
+        </p:spPr>
+        <p:txBody>
+          <a:bodyPr wrap="square">
+            <a:spAutoFit/>
+          </a:bodyPr>
+          <a:lstStyle/>
+          <a:p>
+            <a:pPr algn="r">
+              <a:defRPr sz="900" b="0">
+                <a:solidFill>
+                  <a:srgbClr val="FFFFFF"/>
+                </a:solidFill>
+                <a:latin typeface="Calibri"/>
+              </a:defRPr>
+            </a:pPr>
+            <a:r>
+              <a:t>$0</a:t>
+            </a:r>
+          </a:p>
+        </p:txBody>
+      </p:sp>
+      <p:sp>
+        <p:nvSpPr>
+          <p:cNvPr id="22" name="TextBox 21"/>
+          <p:cNvSpPr txBox="1"/>
+          <p:nvPr/>
+        </p:nvSpPr>
+        <p:spPr>
+          <a:xfrm>
+            <a:off x="1097280" y="3154679"/>
+            <a:ext cx="3474720" cy="256032"/>
+          </a:xfrm>
+          <a:prstGeom prst="rect">
+            <a:avLst/>
+          </a:prstGeom>
+          <a:noFill/>
+        </p:spPr>
+        <p:txBody>
+          <a:bodyPr wrap="square">
+            <a:spAutoFit/>
+          </a:bodyPr>
+          <a:lstStyle/>
+          <a:p>
+            <a:pPr algn="l">
+              <a:defRPr sz="900" b="0">
                 <a:solidFill>
                   <a:srgbClr val="FDF8EC"/>
                 </a:solidFill>
@@ -7514,15 +9279,107 @@
               </a:defRPr>
             </a:pPr>
             <a:r>
-              <a:t>  Birthday champagne toast</a:t>
-            </a:r>
-          </a:p>
-          <a:p>
-            <a:pPr>
-              <a:spcAft>
-                <a:spcPts val="600"/>
-              </a:spcAft>
-              <a:defRPr sz="1100">
+              <a:t>Database Disk (8 GB included)</a:t>
+            </a:r>
+          </a:p>
+        </p:txBody>
+      </p:sp>
+      <p:sp>
+        <p:nvSpPr>
+          <p:cNvPr id="23" name="TextBox 22"/>
+          <p:cNvSpPr txBox="1"/>
+          <p:nvPr/>
+        </p:nvSpPr>
+        <p:spPr>
+          <a:xfrm>
+            <a:off x="4572000" y="3154679"/>
+            <a:ext cx="4114800" cy="256032"/>
+          </a:xfrm>
+          <a:prstGeom prst="rect">
+            <a:avLst/>
+          </a:prstGeom>
+          <a:noFill/>
+        </p:spPr>
+        <p:txBody>
+          <a:bodyPr wrap="square">
+            <a:spAutoFit/>
+          </a:bodyPr>
+          <a:lstStyle/>
+          <a:p>
+            <a:pPr algn="l">
+              <a:defRPr sz="800" b="0">
+                <a:solidFill>
+                  <a:srgbClr val="6B6B6B"/>
+                </a:solidFill>
+                <a:latin typeface="Calibri"/>
+              </a:defRPr>
+            </a:pPr>
+            <a:r>
+              <a:t>8 GB included, est. ~2 GB used Year 1</a:t>
+            </a:r>
+          </a:p>
+        </p:txBody>
+      </p:sp>
+      <p:sp>
+        <p:nvSpPr>
+          <p:cNvPr id="24" name="TextBox 23"/>
+          <p:cNvSpPr txBox="1"/>
+          <p:nvPr/>
+        </p:nvSpPr>
+        <p:spPr>
+          <a:xfrm>
+            <a:off x="8686800" y="3154679"/>
+            <a:ext cx="1371600" cy="256032"/>
+          </a:xfrm>
+          <a:prstGeom prst="rect">
+            <a:avLst/>
+          </a:prstGeom>
+          <a:noFill/>
+        </p:spPr>
+        <p:txBody>
+          <a:bodyPr wrap="square">
+            <a:spAutoFit/>
+          </a:bodyPr>
+          <a:lstStyle/>
+          <a:p>
+            <a:pPr algn="r">
+              <a:defRPr sz="900" b="0">
+                <a:solidFill>
+                  <a:srgbClr val="6B6B6B"/>
+                </a:solidFill>
+                <a:latin typeface="Calibri"/>
+              </a:defRPr>
+            </a:pPr>
+            <a:r>
+              <a:t>$0.00</a:t>
+            </a:r>
+          </a:p>
+        </p:txBody>
+      </p:sp>
+      <p:sp>
+        <p:nvSpPr>
+          <p:cNvPr id="25" name="TextBox 24"/>
+          <p:cNvSpPr txBox="1"/>
+          <p:nvPr/>
+        </p:nvSpPr>
+        <p:spPr>
+          <a:xfrm>
+            <a:off x="10058400" y="3154679"/>
+            <a:ext cx="1371600" cy="256032"/>
+          </a:xfrm>
+          <a:prstGeom prst="rect">
+            <a:avLst/>
+          </a:prstGeom>
+          <a:noFill/>
+        </p:spPr>
+        <p:txBody>
+          <a:bodyPr wrap="square">
+            <a:spAutoFit/>
+          </a:bodyPr>
+          <a:lstStyle/>
+          <a:p>
+            <a:pPr algn="r">
+              <a:defRPr sz="900" b="0">
                 <a:solidFill>
                   <a:srgbClr val="FDF8EC"/>
                 </a:solidFill>
@@ -7530,15 +9387,179 @@
               </a:defRPr>
             </a:pPr>
             <a:r>
-              <a:t>  Early access to new arrivals</a:t>
-            </a:r>
-          </a:p>
-          <a:p>
-            <a:pPr>
-              <a:spcAft>
-                <a:spcPts val="600"/>
-              </a:spcAft>
-              <a:defRPr sz="1100">
+              <a:t>$0</a:t>
+            </a:r>
+          </a:p>
+        </p:txBody>
+      </p:sp>
+      <p:sp>
+        <p:nvSpPr>
+          <p:cNvPr id="26" name="TextBox 25"/>
+          <p:cNvSpPr txBox="1"/>
+          <p:nvPr/>
+        </p:nvSpPr>
+        <p:spPr>
+          <a:xfrm>
+            <a:off x="1097280" y="3429000"/>
+            <a:ext cx="3474720" cy="256032"/>
+          </a:xfrm>
+          <a:prstGeom prst="rect">
+            <a:avLst/>
+          </a:prstGeom>
+          <a:noFill/>
+        </p:spPr>
+        <p:txBody>
+          <a:bodyPr wrap="square">
+            <a:spAutoFit/>
+          </a:bodyPr>
+          <a:lstStyle/>
+          <a:p>
+            <a:pPr algn="l">
+              <a:defRPr sz="900" b="0">
+                <a:solidFill>
+                  <a:srgbClr val="FFFFFF"/>
+                </a:solidFill>
+                <a:latin typeface="Calibri"/>
+              </a:defRPr>
+            </a:pPr>
+            <a:r>
+              <a:t>Egress (250 GB included)</a:t>
+            </a:r>
+          </a:p>
+        </p:txBody>
+      </p:sp>
+      <p:sp>
+        <p:nvSpPr>
+          <p:cNvPr id="27" name="TextBox 26"/>
+          <p:cNvSpPr txBox="1"/>
+          <p:nvPr/>
+        </p:nvSpPr>
+        <p:spPr>
+          <a:xfrm>
+            <a:off x="4572000" y="3429000"/>
+            <a:ext cx="4114800" cy="256032"/>
+          </a:xfrm>
+          <a:prstGeom prst="rect">
+            <a:avLst/>
+          </a:prstGeom>
+          <a:noFill/>
+        </p:spPr>
+        <p:txBody>
+          <a:bodyPr wrap="square">
+            <a:spAutoFit/>
+          </a:bodyPr>
+          <a:lstStyle/>
+          <a:p>
+            <a:pPr algn="l">
+              <a:defRPr sz="800" b="0">
+                <a:solidFill>
+                  <a:srgbClr val="6B6B6B"/>
+                </a:solidFill>
+                <a:latin typeface="Calibri"/>
+              </a:defRPr>
+            </a:pPr>
+            <a:r>
+              <a:t>250 GB included, est. ~50 GB used Year 1</a:t>
+            </a:r>
+          </a:p>
+        </p:txBody>
+      </p:sp>
+      <p:sp>
+        <p:nvSpPr>
+          <p:cNvPr id="28" name="TextBox 27"/>
+          <p:cNvSpPr txBox="1"/>
+          <p:nvPr/>
+        </p:nvSpPr>
+        <p:spPr>
+          <a:xfrm>
+            <a:off x="8686800" y="3429000"/>
+            <a:ext cx="1371600" cy="256032"/>
+          </a:xfrm>
+          <a:prstGeom prst="rect">
+            <a:avLst/>
+          </a:prstGeom>
+          <a:noFill/>
+        </p:spPr>
+        <p:txBody>
+          <a:bodyPr wrap="square">
+            <a:spAutoFit/>
+          </a:bodyPr>
+          <a:lstStyle/>
+          <a:p>
+            <a:pPr algn="r">
+              <a:defRPr sz="900" b="0">
+                <a:solidFill>
+                  <a:srgbClr val="6B6B6B"/>
+                </a:solidFill>
+                <a:latin typeface="Calibri"/>
+              </a:defRPr>
+            </a:pPr>
+            <a:r>
+              <a:t>$0.00</a:t>
+            </a:r>
+          </a:p>
+        </p:txBody>
+      </p:sp>
+      <p:sp>
+        <p:nvSpPr>
+          <p:cNvPr id="29" name="TextBox 28"/>
+          <p:cNvSpPr txBox="1"/>
+          <p:nvPr/>
+        </p:nvSpPr>
+        <p:spPr>
+          <a:xfrm>
+            <a:off x="10058400" y="3429000"/>
+            <a:ext cx="1371600" cy="256032"/>
+          </a:xfrm>
+          <a:prstGeom prst="rect">
+            <a:avLst/>
+          </a:prstGeom>
+          <a:noFill/>
+        </p:spPr>
+        <p:txBody>
+          <a:bodyPr wrap="square">
+            <a:spAutoFit/>
+          </a:bodyPr>
+          <a:lstStyle/>
+          <a:p>
+            <a:pPr algn="r">
+              <a:defRPr sz="900" b="0">
+                <a:solidFill>
+                  <a:srgbClr val="FFFFFF"/>
+                </a:solidFill>
+                <a:latin typeface="Calibri"/>
+              </a:defRPr>
+            </a:pPr>
+            <a:r>
+              <a:t>$0</a:t>
+            </a:r>
+          </a:p>
+        </p:txBody>
+      </p:sp>
+      <p:sp>
+        <p:nvSpPr>
+          <p:cNvPr id="30" name="TextBox 29"/>
+          <p:cNvSpPr txBox="1"/>
+          <p:nvPr/>
+        </p:nvSpPr>
+        <p:spPr>
+          <a:xfrm>
+            <a:off x="1097280" y="3703320"/>
+            <a:ext cx="3474720" cy="256032"/>
+          </a:xfrm>
+          <a:prstGeom prst="rect">
+            <a:avLst/>
+          </a:prstGeom>
+          <a:noFill/>
+        </p:spPr>
+        <p:txBody>
+          <a:bodyPr wrap="square">
+            <a:spAutoFit/>
+          </a:bodyPr>
+          <a:lstStyle/>
+          <a:p>
+            <a:pPr algn="l">
+              <a:defRPr sz="900" b="0">
                 <a:solidFill>
                   <a:srgbClr val="FDF8EC"/>
                 </a:solidFill>
@@ -7546,15 +9567,107 @@
               </a:defRPr>
             </a:pPr>
             <a:r>
-              <a:t>  Digital membership card</a:t>
-            </a:r>
-          </a:p>
-          <a:p>
-            <a:pPr>
-              <a:spcAft>
-                <a:spcPts val="600"/>
-              </a:spcAft>
-              <a:defRPr sz="1100">
+              <a:t>File Storage (100 GB included)</a:t>
+            </a:r>
+          </a:p>
+        </p:txBody>
+      </p:sp>
+      <p:sp>
+        <p:nvSpPr>
+          <p:cNvPr id="31" name="TextBox 30"/>
+          <p:cNvSpPr txBox="1"/>
+          <p:nvPr/>
+        </p:nvSpPr>
+        <p:spPr>
+          <a:xfrm>
+            <a:off x="4572000" y="3703320"/>
+            <a:ext cx="4114800" cy="256032"/>
+          </a:xfrm>
+          <a:prstGeom prst="rect">
+            <a:avLst/>
+          </a:prstGeom>
+          <a:noFill/>
+        </p:spPr>
+        <p:txBody>
+          <a:bodyPr wrap="square">
+            <a:spAutoFit/>
+          </a:bodyPr>
+          <a:lstStyle/>
+          <a:p>
+            <a:pPr algn="l">
+              <a:defRPr sz="800" b="0">
+                <a:solidFill>
+                  <a:srgbClr val="6B6B6B"/>
+                </a:solidFill>
+                <a:latin typeface="Calibri"/>
+              </a:defRPr>
+            </a:pPr>
+            <a:r>
+              <a:t>Wine images + assets, est. ~5 GB</a:t>
+            </a:r>
+          </a:p>
+        </p:txBody>
+      </p:sp>
+      <p:sp>
+        <p:nvSpPr>
+          <p:cNvPr id="32" name="TextBox 31"/>
+          <p:cNvSpPr txBox="1"/>
+          <p:nvPr/>
+        </p:nvSpPr>
+        <p:spPr>
+          <a:xfrm>
+            <a:off x="8686800" y="3703320"/>
+            <a:ext cx="1371600" cy="256032"/>
+          </a:xfrm>
+          <a:prstGeom prst="rect">
+            <a:avLst/>
+          </a:prstGeom>
+          <a:noFill/>
+        </p:spPr>
+        <p:txBody>
+          <a:bodyPr wrap="square">
+            <a:spAutoFit/>
+          </a:bodyPr>
+          <a:lstStyle/>
+          <a:p>
+            <a:pPr algn="r">
+              <a:defRPr sz="900" b="0">
+                <a:solidFill>
+                  <a:srgbClr val="6B6B6B"/>
+                </a:solidFill>
+                <a:latin typeface="Calibri"/>
+              </a:defRPr>
+            </a:pPr>
+            <a:r>
+              <a:t>$0.00</a:t>
+            </a:r>
+          </a:p>
+        </p:txBody>
+      </p:sp>
+      <p:sp>
+        <p:nvSpPr>
+          <p:cNvPr id="33" name="TextBox 32"/>
+          <p:cNvSpPr txBox="1"/>
+          <p:nvPr/>
+        </p:nvSpPr>
+        <p:spPr>
+          <a:xfrm>
+            <a:off x="10058400" y="3703320"/>
+            <a:ext cx="1371600" cy="256032"/>
+          </a:xfrm>
+          <a:prstGeom prst="rect">
+            <a:avLst/>
+          </a:prstGeom>
+          <a:noFill/>
+        </p:spPr>
+        <p:txBody>
+          <a:bodyPr wrap="square">
+            <a:spAutoFit/>
+          </a:bodyPr>
+          <a:lstStyle/>
+          <a:p>
+            <a:pPr algn="r">
+              <a:defRPr sz="900" b="0">
                 <a:solidFill>
                   <a:srgbClr val="FDF8EC"/>
                 </a:solidFill>
@@ -7562,174 +9675,1029 @@
               </a:defRPr>
             </a:pPr>
             <a:r>
-              <a:t>  Push notification deals</a:t>
-            </a:r>
-          </a:p>
-        </p:txBody>
-      </p:sp>
-      <p:sp>
-        <p:nvSpPr>
-          <p:cNvPr id="10" name="Rounded Rectangle 9"/>
+              <a:t>$0</a:t>
+            </a:r>
+          </a:p>
+        </p:txBody>
+      </p:sp>
+      <p:sp>
+        <p:nvSpPr>
+          <p:cNvPr id="34" name="TextBox 33"/>
+          <p:cNvSpPr txBox="1"/>
+          <p:nvPr/>
+        </p:nvSpPr>
+        <p:spPr>
+          <a:xfrm>
+            <a:off x="1097280" y="3977639"/>
+            <a:ext cx="3474720" cy="256032"/>
+          </a:xfrm>
+          <a:prstGeom prst="rect">
+            <a:avLst/>
+          </a:prstGeom>
+          <a:noFill/>
+        </p:spPr>
+        <p:txBody>
+          <a:bodyPr wrap="square">
+            <a:spAutoFit/>
+          </a:bodyPr>
+          <a:lstStyle/>
+          <a:p>
+            <a:pPr algn="l">
+              <a:defRPr sz="900" b="0">
+                <a:solidFill>
+                  <a:srgbClr val="FFFFFF"/>
+                </a:solidFill>
+                <a:latin typeface="Calibri"/>
+              </a:defRPr>
+            </a:pPr>
+            <a:r>
+              <a:t>Daily Backups</a:t>
+            </a:r>
+          </a:p>
+        </p:txBody>
+      </p:sp>
+      <p:sp>
+        <p:nvSpPr>
+          <p:cNvPr id="35" name="TextBox 34"/>
+          <p:cNvSpPr txBox="1"/>
+          <p:nvPr/>
+        </p:nvSpPr>
+        <p:spPr>
+          <a:xfrm>
+            <a:off x="4572000" y="3977639"/>
+            <a:ext cx="4114800" cy="256032"/>
+          </a:xfrm>
+          <a:prstGeom prst="rect">
+            <a:avLst/>
+          </a:prstGeom>
+          <a:noFill/>
+        </p:spPr>
+        <p:txBody>
+          <a:bodyPr wrap="square">
+            <a:spAutoFit/>
+          </a:bodyPr>
+          <a:lstStyle/>
+          <a:p>
+            <a:pPr algn="l">
+              <a:defRPr sz="800" b="0">
+                <a:solidFill>
+                  <a:srgbClr val="6B6B6B"/>
+                </a:solidFill>
+                <a:latin typeface="Calibri"/>
+              </a:defRPr>
+            </a:pPr>
+            <a:r>
+              <a:t>Included — stored for 7 days</a:t>
+            </a:r>
+          </a:p>
+        </p:txBody>
+      </p:sp>
+      <p:sp>
+        <p:nvSpPr>
+          <p:cNvPr id="36" name="TextBox 35"/>
+          <p:cNvSpPr txBox="1"/>
+          <p:nvPr/>
+        </p:nvSpPr>
+        <p:spPr>
+          <a:xfrm>
+            <a:off x="8686800" y="3977639"/>
+            <a:ext cx="1371600" cy="256032"/>
+          </a:xfrm>
+          <a:prstGeom prst="rect">
+            <a:avLst/>
+          </a:prstGeom>
+          <a:noFill/>
+        </p:spPr>
+        <p:txBody>
+          <a:bodyPr wrap="square">
+            <a:spAutoFit/>
+          </a:bodyPr>
+          <a:lstStyle/>
+          <a:p>
+            <a:pPr algn="r">
+              <a:defRPr sz="900" b="0">
+                <a:solidFill>
+                  <a:srgbClr val="6B6B6B"/>
+                </a:solidFill>
+                <a:latin typeface="Calibri"/>
+              </a:defRPr>
+            </a:pPr>
+            <a:r>
+              <a:t>$0.00</a:t>
+            </a:r>
+          </a:p>
+        </p:txBody>
+      </p:sp>
+      <p:sp>
+        <p:nvSpPr>
+          <p:cNvPr id="37" name="TextBox 36"/>
+          <p:cNvSpPr txBox="1"/>
+          <p:nvPr/>
+        </p:nvSpPr>
+        <p:spPr>
+          <a:xfrm>
+            <a:off x="10058400" y="3977639"/>
+            <a:ext cx="1371600" cy="256032"/>
+          </a:xfrm>
+          <a:prstGeom prst="rect">
+            <a:avLst/>
+          </a:prstGeom>
+          <a:noFill/>
+        </p:spPr>
+        <p:txBody>
+          <a:bodyPr wrap="square">
+            <a:spAutoFit/>
+          </a:bodyPr>
+          <a:lstStyle/>
+          <a:p>
+            <a:pPr algn="r">
+              <a:defRPr sz="900" b="0">
+                <a:solidFill>
+                  <a:srgbClr val="FFFFFF"/>
+                </a:solidFill>
+                <a:latin typeface="Calibri"/>
+              </a:defRPr>
+            </a:pPr>
+            <a:r>
+              <a:t>$0</a:t>
+            </a:r>
+          </a:p>
+        </p:txBody>
+      </p:sp>
+      <p:sp>
+        <p:nvSpPr>
+          <p:cNvPr id="38" name="TextBox 37"/>
+          <p:cNvSpPr txBox="1"/>
+          <p:nvPr/>
+        </p:nvSpPr>
+        <p:spPr>
+          <a:xfrm>
+            <a:off x="1097280" y="4251960"/>
+            <a:ext cx="3474720" cy="256032"/>
+          </a:xfrm>
+          <a:prstGeom prst="rect">
+            <a:avLst/>
+          </a:prstGeom>
+          <a:noFill/>
+        </p:spPr>
+        <p:txBody>
+          <a:bodyPr wrap="square">
+            <a:spAutoFit/>
+          </a:bodyPr>
+          <a:lstStyle/>
+          <a:p>
+            <a:pPr algn="l">
+              <a:defRPr sz="900" b="0">
+                <a:solidFill>
+                  <a:srgbClr val="FDF8EC"/>
+                </a:solidFill>
+                <a:latin typeface="Calibri"/>
+              </a:defRPr>
+            </a:pPr>
+            <a:r>
+              <a:t>Email Support</a:t>
+            </a:r>
+          </a:p>
+        </p:txBody>
+      </p:sp>
+      <p:sp>
+        <p:nvSpPr>
+          <p:cNvPr id="39" name="TextBox 38"/>
+          <p:cNvSpPr txBox="1"/>
+          <p:nvPr/>
+        </p:nvSpPr>
+        <p:spPr>
+          <a:xfrm>
+            <a:off x="4572000" y="4251960"/>
+            <a:ext cx="4114800" cy="256032"/>
+          </a:xfrm>
+          <a:prstGeom prst="rect">
+            <a:avLst/>
+          </a:prstGeom>
+          <a:noFill/>
+        </p:spPr>
+        <p:txBody>
+          <a:bodyPr wrap="square">
+            <a:spAutoFit/>
+          </a:bodyPr>
+          <a:lstStyle/>
+          <a:p>
+            <a:pPr algn="l">
+              <a:defRPr sz="800" b="0">
+                <a:solidFill>
+                  <a:srgbClr val="6B6B6B"/>
+                </a:solidFill>
+                <a:latin typeface="Calibri"/>
+              </a:defRPr>
+            </a:pPr>
+            <a:r>
+              <a:t>Included with Pro</a:t>
+            </a:r>
+          </a:p>
+        </p:txBody>
+      </p:sp>
+      <p:sp>
+        <p:nvSpPr>
+          <p:cNvPr id="40" name="TextBox 39"/>
+          <p:cNvSpPr txBox="1"/>
+          <p:nvPr/>
+        </p:nvSpPr>
+        <p:spPr>
+          <a:xfrm>
+            <a:off x="8686800" y="4251960"/>
+            <a:ext cx="1371600" cy="256032"/>
+          </a:xfrm>
+          <a:prstGeom prst="rect">
+            <a:avLst/>
+          </a:prstGeom>
+          <a:noFill/>
+        </p:spPr>
+        <p:txBody>
+          <a:bodyPr wrap="square">
+            <a:spAutoFit/>
+          </a:bodyPr>
+          <a:lstStyle/>
+          <a:p>
+            <a:pPr algn="r">
+              <a:defRPr sz="900" b="0">
+                <a:solidFill>
+                  <a:srgbClr val="6B6B6B"/>
+                </a:solidFill>
+                <a:latin typeface="Calibri"/>
+              </a:defRPr>
+            </a:pPr>
+            <a:r>
+              <a:t>$0.00</a:t>
+            </a:r>
+          </a:p>
+        </p:txBody>
+      </p:sp>
+      <p:sp>
+        <p:nvSpPr>
+          <p:cNvPr id="41" name="TextBox 40"/>
+          <p:cNvSpPr txBox="1"/>
+          <p:nvPr/>
+        </p:nvSpPr>
+        <p:spPr>
+          <a:xfrm>
+            <a:off x="10058400" y="4251960"/>
+            <a:ext cx="1371600" cy="256032"/>
+          </a:xfrm>
+          <a:prstGeom prst="rect">
+            <a:avLst/>
+          </a:prstGeom>
+          <a:noFill/>
+        </p:spPr>
+        <p:txBody>
+          <a:bodyPr wrap="square">
+            <a:spAutoFit/>
+          </a:bodyPr>
+          <a:lstStyle/>
+          <a:p>
+            <a:pPr algn="r">
+              <a:defRPr sz="900" b="0">
+                <a:solidFill>
+                  <a:srgbClr val="FDF8EC"/>
+                </a:solidFill>
+                <a:latin typeface="Calibri"/>
+              </a:defRPr>
+            </a:pPr>
+            <a:r>
+              <a:t>$0</a:t>
+            </a:r>
+          </a:p>
+        </p:txBody>
+      </p:sp>
+      <p:sp>
+        <p:nvSpPr>
+          <p:cNvPr id="42" name="TextBox 41"/>
+          <p:cNvSpPr txBox="1"/>
+          <p:nvPr/>
+        </p:nvSpPr>
+        <p:spPr>
+          <a:xfrm>
+            <a:off x="1097280" y="4526279"/>
+            <a:ext cx="3474720" cy="256032"/>
+          </a:xfrm>
+          <a:prstGeom prst="rect">
+            <a:avLst/>
+          </a:prstGeom>
+          <a:noFill/>
+        </p:spPr>
+        <p:txBody>
+          <a:bodyPr wrap="square">
+            <a:spAutoFit/>
+          </a:bodyPr>
+          <a:lstStyle/>
+          <a:p>
+            <a:pPr algn="l">
+              <a:defRPr sz="900" b="0">
+                <a:solidFill>
+                  <a:srgbClr val="FFFFFF"/>
+                </a:solidFill>
+                <a:latin typeface="Calibri"/>
+              </a:defRPr>
+            </a:pPr>
+            <a:r>
+              <a:t>Vercel Hosting (web)</a:t>
+            </a:r>
+          </a:p>
+        </p:txBody>
+      </p:sp>
+      <p:sp>
+        <p:nvSpPr>
+          <p:cNvPr id="43" name="TextBox 42"/>
+          <p:cNvSpPr txBox="1"/>
+          <p:nvPr/>
+        </p:nvSpPr>
+        <p:spPr>
+          <a:xfrm>
+            <a:off x="4572000" y="4526279"/>
+            <a:ext cx="4114800" cy="256032"/>
+          </a:xfrm>
+          <a:prstGeom prst="rect">
+            <a:avLst/>
+          </a:prstGeom>
+          <a:noFill/>
+        </p:spPr>
+        <p:txBody>
+          <a:bodyPr wrap="square">
+            <a:spAutoFit/>
+          </a:bodyPr>
+          <a:lstStyle/>
+          <a:p>
+            <a:pPr algn="l">
+              <a:defRPr sz="800" b="0">
+                <a:solidFill>
+                  <a:srgbClr val="6B6B6B"/>
+                </a:solidFill>
+                <a:latin typeface="Calibri"/>
+              </a:defRPr>
+            </a:pPr>
+            <a:r>
+              <a:t>Hobby/Pro plan for web app</a:t>
+            </a:r>
+          </a:p>
+        </p:txBody>
+      </p:sp>
+      <p:sp>
+        <p:nvSpPr>
+          <p:cNvPr id="44" name="TextBox 43"/>
+          <p:cNvSpPr txBox="1"/>
+          <p:nvPr/>
+        </p:nvSpPr>
+        <p:spPr>
+          <a:xfrm>
+            <a:off x="8686800" y="4526279"/>
+            <a:ext cx="1371600" cy="256032"/>
+          </a:xfrm>
+          <a:prstGeom prst="rect">
+            <a:avLst/>
+          </a:prstGeom>
+          <a:noFill/>
+        </p:spPr>
+        <p:txBody>
+          <a:bodyPr wrap="square">
+            <a:spAutoFit/>
+          </a:bodyPr>
+          <a:lstStyle/>
+          <a:p>
+            <a:pPr algn="r">
+              <a:defRPr sz="900" b="0">
+                <a:solidFill>
+                  <a:srgbClr val="6B6B6B"/>
+                </a:solidFill>
+                <a:latin typeface="Calibri"/>
+              </a:defRPr>
+            </a:pPr>
+            <a:r>
+              <a:t>$20/mo</a:t>
+            </a:r>
+          </a:p>
+        </p:txBody>
+      </p:sp>
+      <p:sp>
+        <p:nvSpPr>
+          <p:cNvPr id="45" name="TextBox 44"/>
+          <p:cNvSpPr txBox="1"/>
+          <p:nvPr/>
+        </p:nvSpPr>
+        <p:spPr>
+          <a:xfrm>
+            <a:off x="10058400" y="4526279"/>
+            <a:ext cx="1371600" cy="256032"/>
+          </a:xfrm>
+          <a:prstGeom prst="rect">
+            <a:avLst/>
+          </a:prstGeom>
+          <a:noFill/>
+        </p:spPr>
+        <p:txBody>
+          <a:bodyPr wrap="square">
+            <a:spAutoFit/>
+          </a:bodyPr>
+          <a:lstStyle/>
+          <a:p>
+            <a:pPr algn="r">
+              <a:defRPr sz="900" b="0">
+                <a:solidFill>
+                  <a:srgbClr val="FFFFFF"/>
+                </a:solidFill>
+                <a:latin typeface="Calibri"/>
+              </a:defRPr>
+            </a:pPr>
+            <a:r>
+              <a:t>$240</a:t>
+            </a:r>
+          </a:p>
+        </p:txBody>
+      </p:sp>
+      <p:sp>
+        <p:nvSpPr>
+          <p:cNvPr id="46" name="TextBox 45"/>
+          <p:cNvSpPr txBox="1"/>
+          <p:nvPr/>
+        </p:nvSpPr>
+        <p:spPr>
+          <a:xfrm>
+            <a:off x="1097280" y="4800600"/>
+            <a:ext cx="3474720" cy="256032"/>
+          </a:xfrm>
+          <a:prstGeom prst="rect">
+            <a:avLst/>
+          </a:prstGeom>
+          <a:noFill/>
+        </p:spPr>
+        <p:txBody>
+          <a:bodyPr wrap="square">
+            <a:spAutoFit/>
+          </a:bodyPr>
+          <a:lstStyle/>
+          <a:p>
+            <a:pPr algn="l">
+              <a:defRPr sz="900" b="0">
+                <a:solidFill>
+                  <a:srgbClr val="FDF8EC"/>
+                </a:solidFill>
+                <a:latin typeface="Calibri"/>
+              </a:defRPr>
+            </a:pPr>
+            <a:r>
+              <a:t>Apple Developer Account</a:t>
+            </a:r>
+          </a:p>
+        </p:txBody>
+      </p:sp>
+      <p:sp>
+        <p:nvSpPr>
+          <p:cNvPr id="47" name="TextBox 46"/>
+          <p:cNvSpPr txBox="1"/>
+          <p:nvPr/>
+        </p:nvSpPr>
+        <p:spPr>
+          <a:xfrm>
+            <a:off x="4572000" y="4800600"/>
+            <a:ext cx="4114800" cy="256032"/>
+          </a:xfrm>
+          <a:prstGeom prst="rect">
+            <a:avLst/>
+          </a:prstGeom>
+          <a:noFill/>
+        </p:spPr>
+        <p:txBody>
+          <a:bodyPr wrap="square">
+            <a:spAutoFit/>
+          </a:bodyPr>
+          <a:lstStyle/>
+          <a:p>
+            <a:pPr algn="l">
+              <a:defRPr sz="800" b="0">
+                <a:solidFill>
+                  <a:srgbClr val="6B6B6B"/>
+                </a:solidFill>
+                <a:latin typeface="Calibri"/>
+              </a:defRPr>
+            </a:pPr>
+            <a:r>
+              <a:t>iOS App Store distribution</a:t>
+            </a:r>
+          </a:p>
+        </p:txBody>
+      </p:sp>
+      <p:sp>
+        <p:nvSpPr>
+          <p:cNvPr id="48" name="TextBox 47"/>
+          <p:cNvSpPr txBox="1"/>
+          <p:nvPr/>
+        </p:nvSpPr>
+        <p:spPr>
+          <a:xfrm>
+            <a:off x="8686800" y="4800600"/>
+            <a:ext cx="1371600" cy="256032"/>
+          </a:xfrm>
+          <a:prstGeom prst="rect">
+            <a:avLst/>
+          </a:prstGeom>
+          <a:noFill/>
+        </p:spPr>
+        <p:txBody>
+          <a:bodyPr wrap="square">
+            <a:spAutoFit/>
+          </a:bodyPr>
+          <a:lstStyle/>
+          <a:p>
+            <a:pPr algn="r">
+              <a:defRPr sz="900" b="0">
+                <a:solidFill>
+                  <a:srgbClr val="6B6B6B"/>
+                </a:solidFill>
+                <a:latin typeface="Calibri"/>
+              </a:defRPr>
+            </a:pPr>
+            <a:r>
+              <a:t>$99/yr</a:t>
+            </a:r>
+          </a:p>
+        </p:txBody>
+      </p:sp>
+      <p:sp>
+        <p:nvSpPr>
+          <p:cNvPr id="49" name="TextBox 48"/>
+          <p:cNvSpPr txBox="1"/>
+          <p:nvPr/>
+        </p:nvSpPr>
+        <p:spPr>
+          <a:xfrm>
+            <a:off x="10058400" y="4800600"/>
+            <a:ext cx="1371600" cy="256032"/>
+          </a:xfrm>
+          <a:prstGeom prst="rect">
+            <a:avLst/>
+          </a:prstGeom>
+          <a:noFill/>
+        </p:spPr>
+        <p:txBody>
+          <a:bodyPr wrap="square">
+            <a:spAutoFit/>
+          </a:bodyPr>
+          <a:lstStyle/>
+          <a:p>
+            <a:pPr algn="r">
+              <a:defRPr sz="900" b="0">
+                <a:solidFill>
+                  <a:srgbClr val="FDF8EC"/>
+                </a:solidFill>
+                <a:latin typeface="Calibri"/>
+              </a:defRPr>
+            </a:pPr>
+            <a:r>
+              <a:t>$99</a:t>
+            </a:r>
+          </a:p>
+        </p:txBody>
+      </p:sp>
+      <p:sp>
+        <p:nvSpPr>
+          <p:cNvPr id="50" name="TextBox 49"/>
+          <p:cNvSpPr txBox="1"/>
+          <p:nvPr/>
+        </p:nvSpPr>
+        <p:spPr>
+          <a:xfrm>
+            <a:off x="1097280" y="5074920"/>
+            <a:ext cx="3474720" cy="256032"/>
+          </a:xfrm>
+          <a:prstGeom prst="rect">
+            <a:avLst/>
+          </a:prstGeom>
+          <a:noFill/>
+        </p:spPr>
+        <p:txBody>
+          <a:bodyPr wrap="square">
+            <a:spAutoFit/>
+          </a:bodyPr>
+          <a:lstStyle/>
+          <a:p>
+            <a:pPr algn="l">
+              <a:defRPr sz="900" b="0">
+                <a:solidFill>
+                  <a:srgbClr val="FFFFFF"/>
+                </a:solidFill>
+                <a:latin typeface="Calibri"/>
+              </a:defRPr>
+            </a:pPr>
+            <a:r>
+              <a:t>Google Play Developer</a:t>
+            </a:r>
+          </a:p>
+        </p:txBody>
+      </p:sp>
+      <p:sp>
+        <p:nvSpPr>
+          <p:cNvPr id="51" name="TextBox 50"/>
+          <p:cNvSpPr txBox="1"/>
+          <p:nvPr/>
+        </p:nvSpPr>
+        <p:spPr>
+          <a:xfrm>
+            <a:off x="4572000" y="5074920"/>
+            <a:ext cx="4114800" cy="256032"/>
+          </a:xfrm>
+          <a:prstGeom prst="rect">
+            <a:avLst/>
+          </a:prstGeom>
+          <a:noFill/>
+        </p:spPr>
+        <p:txBody>
+          <a:bodyPr wrap="square">
+            <a:spAutoFit/>
+          </a:bodyPr>
+          <a:lstStyle/>
+          <a:p>
+            <a:pPr algn="l">
+              <a:defRPr sz="800" b="0">
+                <a:solidFill>
+                  <a:srgbClr val="6B6B6B"/>
+                </a:solidFill>
+                <a:latin typeface="Calibri"/>
+              </a:defRPr>
+            </a:pPr>
+            <a:r>
+              <a:t>Android distribution (one-time)</a:t>
+            </a:r>
+          </a:p>
+        </p:txBody>
+      </p:sp>
+      <p:sp>
+        <p:nvSpPr>
+          <p:cNvPr id="52" name="TextBox 51"/>
+          <p:cNvSpPr txBox="1"/>
+          <p:nvPr/>
+        </p:nvSpPr>
+        <p:spPr>
+          <a:xfrm>
+            <a:off x="8686800" y="5074920"/>
+            <a:ext cx="1371600" cy="256032"/>
+          </a:xfrm>
+          <a:prstGeom prst="rect">
+            <a:avLst/>
+          </a:prstGeom>
+          <a:noFill/>
+        </p:spPr>
+        <p:txBody>
+          <a:bodyPr wrap="square">
+            <a:spAutoFit/>
+          </a:bodyPr>
+          <a:lstStyle/>
+          <a:p>
+            <a:pPr algn="r">
+              <a:defRPr sz="900" b="0">
+                <a:solidFill>
+                  <a:srgbClr val="6B6B6B"/>
+                </a:solidFill>
+                <a:latin typeface="Calibri"/>
+              </a:defRPr>
+            </a:pPr>
+            <a:r>
+              <a:t>$25</a:t>
+            </a:r>
+          </a:p>
+        </p:txBody>
+      </p:sp>
+      <p:sp>
+        <p:nvSpPr>
+          <p:cNvPr id="53" name="TextBox 52"/>
+          <p:cNvSpPr txBox="1"/>
+          <p:nvPr/>
+        </p:nvSpPr>
+        <p:spPr>
+          <a:xfrm>
+            <a:off x="10058400" y="5074920"/>
+            <a:ext cx="1371600" cy="256032"/>
+          </a:xfrm>
+          <a:prstGeom prst="rect">
+            <a:avLst/>
+          </a:prstGeom>
+          <a:noFill/>
+        </p:spPr>
+        <p:txBody>
+          <a:bodyPr wrap="square">
+            <a:spAutoFit/>
+          </a:bodyPr>
+          <a:lstStyle/>
+          <a:p>
+            <a:pPr algn="r">
+              <a:defRPr sz="900" b="0">
+                <a:solidFill>
+                  <a:srgbClr val="FFFFFF"/>
+                </a:solidFill>
+                <a:latin typeface="Calibri"/>
+              </a:defRPr>
+            </a:pPr>
+            <a:r>
+              <a:t>$25</a:t>
+            </a:r>
+          </a:p>
+        </p:txBody>
+      </p:sp>
+      <p:sp>
+        <p:nvSpPr>
+          <p:cNvPr id="54" name="TextBox 53"/>
+          <p:cNvSpPr txBox="1"/>
+          <p:nvPr/>
+        </p:nvSpPr>
+        <p:spPr>
+          <a:xfrm>
+            <a:off x="1097280" y="5349240"/>
+            <a:ext cx="3474720" cy="256032"/>
+          </a:xfrm>
+          <a:prstGeom prst="rect">
+            <a:avLst/>
+          </a:prstGeom>
+          <a:noFill/>
+        </p:spPr>
+        <p:txBody>
+          <a:bodyPr wrap="square">
+            <a:spAutoFit/>
+          </a:bodyPr>
+          <a:lstStyle/>
+          <a:p>
+            <a:pPr algn="l">
+              <a:defRPr sz="900" b="0">
+                <a:solidFill>
+                  <a:srgbClr val="FDF8EC"/>
+                </a:solidFill>
+                <a:latin typeface="Calibri"/>
+              </a:defRPr>
+            </a:pPr>
+            <a:r>
+              <a:t>Stripe Payment Processing</a:t>
+            </a:r>
+          </a:p>
+        </p:txBody>
+      </p:sp>
+      <p:sp>
+        <p:nvSpPr>
+          <p:cNvPr id="55" name="TextBox 54"/>
+          <p:cNvSpPr txBox="1"/>
+          <p:nvPr/>
+        </p:nvSpPr>
+        <p:spPr>
+          <a:xfrm>
+            <a:off x="4572000" y="5349240"/>
+            <a:ext cx="4114800" cy="256032"/>
+          </a:xfrm>
+          <a:prstGeom prst="rect">
+            <a:avLst/>
+          </a:prstGeom>
+          <a:noFill/>
+        </p:spPr>
+        <p:txBody>
+          <a:bodyPr wrap="square">
+            <a:spAutoFit/>
+          </a:bodyPr>
+          <a:lstStyle/>
+          <a:p>
+            <a:pPr algn="l">
+              <a:defRPr sz="800" b="0">
+                <a:solidFill>
+                  <a:srgbClr val="6B6B6B"/>
+                </a:solidFill>
+                <a:latin typeface="Calibri"/>
+              </a:defRPr>
+            </a:pPr>
+            <a:r>
+              <a:t>2.9% + $0.30 per transaction (on ~$200K)</a:t>
+            </a:r>
+          </a:p>
+        </p:txBody>
+      </p:sp>
+      <p:sp>
+        <p:nvSpPr>
+          <p:cNvPr id="56" name="TextBox 55"/>
+          <p:cNvSpPr txBox="1"/>
+          <p:nvPr/>
+        </p:nvSpPr>
+        <p:spPr>
+          <a:xfrm>
+            <a:off x="8686800" y="5349240"/>
+            <a:ext cx="1371600" cy="256032"/>
+          </a:xfrm>
+          <a:prstGeom prst="rect">
+            <a:avLst/>
+          </a:prstGeom>
+          <a:noFill/>
+        </p:spPr>
+        <p:txBody>
+          <a:bodyPr wrap="square">
+            <a:spAutoFit/>
+          </a:bodyPr>
+          <a:lstStyle/>
+          <a:p>
+            <a:pPr algn="r">
+              <a:defRPr sz="900" b="0">
+                <a:solidFill>
+                  <a:srgbClr val="6B6B6B"/>
+                </a:solidFill>
+                <a:latin typeface="Calibri"/>
+              </a:defRPr>
+            </a:pPr>
+            <a:r>
+              <a:t>~2.9%</a:t>
+            </a:r>
+          </a:p>
+        </p:txBody>
+      </p:sp>
+      <p:sp>
+        <p:nvSpPr>
+          <p:cNvPr id="57" name="TextBox 56"/>
+          <p:cNvSpPr txBox="1"/>
+          <p:nvPr/>
+        </p:nvSpPr>
+        <p:spPr>
+          <a:xfrm>
+            <a:off x="10058400" y="5349240"/>
+            <a:ext cx="1371600" cy="256032"/>
+          </a:xfrm>
+          <a:prstGeom prst="rect">
+            <a:avLst/>
+          </a:prstGeom>
+          <a:noFill/>
+        </p:spPr>
+        <p:txBody>
+          <a:bodyPr wrap="square">
+            <a:spAutoFit/>
+          </a:bodyPr>
+          <a:lstStyle/>
+          <a:p>
+            <a:pPr algn="r">
+              <a:defRPr sz="900" b="0">
+                <a:solidFill>
+                  <a:srgbClr val="FDF8EC"/>
+                </a:solidFill>
+                <a:latin typeface="Calibri"/>
+              </a:defRPr>
+            </a:pPr>
+            <a:r>
+              <a:t>~$6,200</a:t>
+            </a:r>
+          </a:p>
+        </p:txBody>
+      </p:sp>
+      <p:sp>
+        <p:nvSpPr>
+          <p:cNvPr id="58" name="TextBox 57"/>
+          <p:cNvSpPr txBox="1"/>
+          <p:nvPr/>
+        </p:nvSpPr>
+        <p:spPr>
+          <a:xfrm>
+            <a:off x="1097280" y="5623559"/>
+            <a:ext cx="3474720" cy="256032"/>
+          </a:xfrm>
+          <a:prstGeom prst="rect">
+            <a:avLst/>
+          </a:prstGeom>
+          <a:noFill/>
+        </p:spPr>
+        <p:txBody>
+          <a:bodyPr wrap="square">
+            <a:spAutoFit/>
+          </a:bodyPr>
+          <a:lstStyle/>
+          <a:p>
+            <a:pPr algn="l">
+              <a:defRPr sz="900" b="0">
+                <a:solidFill>
+                  <a:srgbClr val="FFFFFF"/>
+                </a:solidFill>
+                <a:latin typeface="Calibri"/>
+              </a:defRPr>
+            </a:pPr>
+            <a:r>
+              <a:t>Domain + SSL</a:t>
+            </a:r>
+          </a:p>
+        </p:txBody>
+      </p:sp>
+      <p:sp>
+        <p:nvSpPr>
+          <p:cNvPr id="59" name="TextBox 58"/>
+          <p:cNvSpPr txBox="1"/>
+          <p:nvPr/>
+        </p:nvSpPr>
+        <p:spPr>
+          <a:xfrm>
+            <a:off x="4572000" y="5623559"/>
+            <a:ext cx="4114800" cy="256032"/>
+          </a:xfrm>
+          <a:prstGeom prst="rect">
+            <a:avLst/>
+          </a:prstGeom>
+          <a:noFill/>
+        </p:spPr>
+        <p:txBody>
+          <a:bodyPr wrap="square">
+            <a:spAutoFit/>
+          </a:bodyPr>
+          <a:lstStyle/>
+          <a:p>
+            <a:pPr algn="l">
+              <a:defRPr sz="800" b="0">
+                <a:solidFill>
+                  <a:srgbClr val="6B6B6B"/>
+                </a:solidFill>
+                <a:latin typeface="Calibri"/>
+              </a:defRPr>
+            </a:pPr>
+            <a:r>
+              <a:t>champagnebar.com — already owned</a:t>
+            </a:r>
+          </a:p>
+        </p:txBody>
+      </p:sp>
+      <p:sp>
+        <p:nvSpPr>
+          <p:cNvPr id="60" name="TextBox 59"/>
+          <p:cNvSpPr txBox="1"/>
+          <p:nvPr/>
+        </p:nvSpPr>
+        <p:spPr>
+          <a:xfrm>
+            <a:off x="8686800" y="5623559"/>
+            <a:ext cx="1371600" cy="256032"/>
+          </a:xfrm>
+          <a:prstGeom prst="rect">
+            <a:avLst/>
+          </a:prstGeom>
+          <a:noFill/>
+        </p:spPr>
+        <p:txBody>
+          <a:bodyPr wrap="square">
+            <a:spAutoFit/>
+          </a:bodyPr>
+          <a:lstStyle/>
+          <a:p>
+            <a:pPr algn="r">
+              <a:defRPr sz="900" b="0">
+                <a:solidFill>
+                  <a:srgbClr val="6B6B6B"/>
+                </a:solidFill>
+                <a:latin typeface="Calibri"/>
+              </a:defRPr>
+            </a:pPr>
+            <a:r>
+              <a:t>$0.00</a:t>
+            </a:r>
+          </a:p>
+        </p:txBody>
+      </p:sp>
+      <p:sp>
+        <p:nvSpPr>
+          <p:cNvPr id="61" name="TextBox 60"/>
+          <p:cNvSpPr txBox="1"/>
+          <p:nvPr/>
+        </p:nvSpPr>
+        <p:spPr>
+          <a:xfrm>
+            <a:off x="10058400" y="5623559"/>
+            <a:ext cx="1371600" cy="256032"/>
+          </a:xfrm>
+          <a:prstGeom prst="rect">
+            <a:avLst/>
+          </a:prstGeom>
+          <a:noFill/>
+        </p:spPr>
+        <p:txBody>
+          <a:bodyPr wrap="square">
+            <a:spAutoFit/>
+          </a:bodyPr>
+          <a:lstStyle/>
+          <a:p>
+            <a:pPr algn="r">
+              <a:defRPr sz="900" b="0">
+                <a:solidFill>
+                  <a:srgbClr val="FFFFFF"/>
+                </a:solidFill>
+                <a:latin typeface="Calibri"/>
+              </a:defRPr>
+            </a:pPr>
+            <a:r>
+              <a:t>$0</a:t>
+            </a:r>
+          </a:p>
+        </p:txBody>
+      </p:sp>
+      <p:sp>
+        <p:nvSpPr>
+          <p:cNvPr id="62" name="Rectangle 61"/>
           <p:cNvSpPr/>
           <p:nvPr/>
         </p:nvSpPr>
         <p:spPr>
           <a:xfrm>
-            <a:off x="4572000" y="1645920"/>
-            <a:ext cx="3566160" cy="4572000"/>
-          </a:xfrm>
-          <a:prstGeom prst="roundRect">
-            <a:avLst/>
-          </a:prstGeom>
-          <a:solidFill>
-            <a:srgbClr val="111111"/>
-          </a:solidFill>
-          <a:ln w="12700">
-            <a:solidFill>
-              <a:srgbClr val="2A2A2A"/>
-            </a:solidFill>
-          </a:ln>
-        </p:spPr>
-        <p:style>
-          <a:lnRef idx="1">
-            <a:schemeClr val="accent1"/>
-          </a:lnRef>
-          <a:fillRef idx="3">
-            <a:schemeClr val="accent1"/>
-          </a:fillRef>
-          <a:effectRef idx="2">
-            <a:schemeClr val="accent1"/>
-          </a:effectRef>
-          <a:fontRef idx="minor">
-            <a:schemeClr val="lt1"/>
-          </a:fontRef>
-        </p:style>
-        <p:txBody>
-          <a:bodyPr rtlCol="0" anchor="ctr"/>
-          <a:lstStyle/>
-          <a:p>
-            <a:pPr algn="ctr"/>
-          </a:p>
-        </p:txBody>
-      </p:sp>
-      <p:sp>
-        <p:nvSpPr>
-          <p:cNvPr id="11" name="TextBox 10"/>
-          <p:cNvSpPr txBox="1"/>
-          <p:nvPr/>
-        </p:nvSpPr>
-        <p:spPr>
-          <a:xfrm>
-            <a:off x="4846320" y="1783080"/>
-            <a:ext cx="3017520" cy="457200"/>
-          </a:xfrm>
-          <a:prstGeom prst="rect">
-            <a:avLst/>
-          </a:prstGeom>
-          <a:noFill/>
-        </p:spPr>
-        <p:txBody>
-          <a:bodyPr wrap="square">
-            <a:spAutoFit/>
-          </a:bodyPr>
-          <a:lstStyle/>
-          <a:p>
-            <a:pPr algn="ctr">
-              <a:defRPr sz="2400" b="1">
-                <a:solidFill>
-                  <a:srgbClr val="D4A843"/>
-                </a:solidFill>
-                <a:latin typeface="Georgia"/>
-              </a:defRPr>
-            </a:pPr>
-            <a:r>
-              <a:t>Magnum</a:t>
-            </a:r>
-          </a:p>
-        </p:txBody>
-      </p:sp>
-      <p:sp>
-        <p:nvSpPr>
-          <p:cNvPr id="12" name="TextBox 11"/>
-          <p:cNvSpPr txBox="1"/>
-          <p:nvPr/>
-        </p:nvSpPr>
-        <p:spPr>
-          <a:xfrm>
-            <a:off x="4846320" y="2240280"/>
-            <a:ext cx="3017520" cy="365760"/>
-          </a:xfrm>
-          <a:prstGeom prst="rect">
-            <a:avLst/>
-          </a:prstGeom>
-          <a:noFill/>
-        </p:spPr>
-        <p:txBody>
-          <a:bodyPr wrap="square">
-            <a:spAutoFit/>
-          </a:bodyPr>
-          <a:lstStyle/>
-          <a:p>
-            <a:pPr algn="ctr">
-              <a:defRPr sz="1800" b="1">
-                <a:solidFill>
-                  <a:srgbClr val="FFFFFF"/>
-                </a:solidFill>
-                <a:latin typeface="Calibri"/>
-              </a:defRPr>
-            </a:pPr>
-            <a:r>
-              <a:t>$29.99/month</a:t>
-            </a:r>
-          </a:p>
-        </p:txBody>
-      </p:sp>
-      <p:sp>
-        <p:nvSpPr>
-          <p:cNvPr id="13" name="TextBox 12"/>
-          <p:cNvSpPr txBox="1"/>
-          <p:nvPr/>
-        </p:nvSpPr>
-        <p:spPr>
-          <a:xfrm>
-            <a:off x="4846320" y="2606040"/>
-            <a:ext cx="3017520" cy="274320"/>
-          </a:xfrm>
-          <a:prstGeom prst="rect">
-            <a:avLst/>
-          </a:prstGeom>
-          <a:noFill/>
-        </p:spPr>
-        <p:txBody>
-          <a:bodyPr wrap="square">
-            <a:spAutoFit/>
-          </a:bodyPr>
-          <a:lstStyle/>
-          <a:p>
-            <a:pPr algn="ctr">
-              <a:defRPr sz="1100" b="0">
-                <a:solidFill>
-                  <a:srgbClr val="6B6B6B"/>
-                </a:solidFill>
-                <a:latin typeface="Calibri"/>
-              </a:defRPr>
-            </a:pPr>
-            <a:r>
-              <a:t>For champagne enthusiasts</a:t>
-            </a:r>
-          </a:p>
-        </p:txBody>
-      </p:sp>
-      <p:sp>
-        <p:nvSpPr>
-          <p:cNvPr id="14" name="Rectangle 13"/>
-          <p:cNvSpPr/>
-          <p:nvPr/>
-        </p:nvSpPr>
-        <p:spPr>
-          <a:xfrm>
-            <a:off x="5029200" y="2926080"/>
-            <a:ext cx="2651760" cy="27432"/>
+            <a:off x="1097280" y="5897880"/>
+            <a:ext cx="10058400" cy="27432"/>
           </a:xfrm>
           <a:prstGeom prst="rect">
             <a:avLst/>
@@ -7765,286 +10733,158 @@
       </p:sp>
       <p:sp>
         <p:nvSpPr>
-          <p:cNvPr id="15" name="TextBox 14"/>
-          <p:cNvSpPr txBox="1"/>
-          <p:nvPr/>
-        </p:nvSpPr>
-        <p:spPr>
-          <a:xfrm>
-            <a:off x="4846320" y="3108960"/>
-            <a:ext cx="3017520" cy="2926080"/>
-          </a:xfrm>
-          <a:prstGeom prst="rect">
-            <a:avLst/>
-          </a:prstGeom>
-          <a:noFill/>
-        </p:spPr>
-        <p:txBody>
-          <a:bodyPr wrap="square">
-            <a:spAutoFit/>
-          </a:bodyPr>
-          <a:lstStyle/>
-          <a:p>
-            <a:pPr>
-              <a:spcAft>
-                <a:spcPts val="600"/>
-              </a:spcAft>
-              <a:defRPr sz="1100">
-                <a:solidFill>
-                  <a:srgbClr val="FDF8EC"/>
-                </a:solidFill>
-                <a:latin typeface="Calibri"/>
-              </a:defRPr>
-            </a:pPr>
-            <a:r>
-              <a:t>  1.5x points multiplier</a:t>
-            </a:r>
-          </a:p>
-          <a:p>
-            <a:pPr>
-              <a:spcAft>
-                <a:spcPts val="600"/>
-              </a:spcAft>
-              <a:defRPr sz="1100">
-                <a:solidFill>
-                  <a:srgbClr val="FDF8EC"/>
-                </a:solidFill>
-                <a:latin typeface="Calibri"/>
-              </a:defRPr>
-            </a:pPr>
-            <a:r>
-              <a:t>  All Flûte benefits</a:t>
-            </a:r>
-          </a:p>
-          <a:p>
-            <a:pPr>
-              <a:spcAft>
-                <a:spcPts val="600"/>
-              </a:spcAft>
-              <a:defRPr sz="1100">
-                <a:solidFill>
-                  <a:srgbClr val="FDF8EC"/>
-                </a:solidFill>
-                <a:latin typeface="Calibri"/>
-              </a:defRPr>
-            </a:pPr>
-            <a:r>
-              <a:t>  Complimentary monthly glass</a:t>
-            </a:r>
-          </a:p>
-          <a:p>
-            <a:pPr>
-              <a:spcAft>
-                <a:spcPts val="600"/>
-              </a:spcAft>
-              <a:defRPr sz="1100">
-                <a:solidFill>
-                  <a:srgbClr val="FDF8EC"/>
-                </a:solidFill>
-                <a:latin typeface="Calibri"/>
-              </a:defRPr>
-            </a:pPr>
-            <a:r>
-              <a:t>  Priority event seating</a:t>
-            </a:r>
-          </a:p>
-          <a:p>
-            <a:pPr>
-              <a:spcAft>
-                <a:spcPts val="600"/>
-              </a:spcAft>
-              <a:defRPr sz="1100">
-                <a:solidFill>
-                  <a:srgbClr val="FDF8EC"/>
-                </a:solidFill>
-                <a:latin typeface="Calibri"/>
-              </a:defRPr>
-            </a:pPr>
-            <a:r>
-              <a:t>  Exclusive Magnum tastings</a:t>
-            </a:r>
-          </a:p>
-          <a:p>
-            <a:pPr>
-              <a:spcAft>
-                <a:spcPts val="600"/>
-              </a:spcAft>
-              <a:defRPr sz="1100">
-                <a:solidFill>
-                  <a:srgbClr val="FDF8EC"/>
-                </a:solidFill>
-                <a:latin typeface="Calibri"/>
-              </a:defRPr>
-            </a:pPr>
-            <a:r>
-              <a:t>  10% off At-Home bookings</a:t>
-            </a:r>
-          </a:p>
-        </p:txBody>
-      </p:sp>
-      <p:sp>
-        <p:nvSpPr>
-          <p:cNvPr id="16" name="Rounded Rectangle 15"/>
+          <p:cNvPr id="63" name="TextBox 62"/>
+          <p:cNvSpPr txBox="1"/>
+          <p:nvPr/>
+        </p:nvSpPr>
+        <p:spPr>
+          <a:xfrm>
+            <a:off x="1097280" y="5989320"/>
+            <a:ext cx="3657600" cy="320040"/>
+          </a:xfrm>
+          <a:prstGeom prst="rect">
+            <a:avLst/>
+          </a:prstGeom>
+          <a:noFill/>
+        </p:spPr>
+        <p:txBody>
+          <a:bodyPr wrap="square">
+            <a:spAutoFit/>
+          </a:bodyPr>
+          <a:lstStyle/>
+          <a:p>
+            <a:pPr algn="l">
+              <a:defRPr sz="1100" b="1">
+                <a:solidFill>
+                  <a:srgbClr val="FFFFFF"/>
+                </a:solidFill>
+                <a:latin typeface="Calibri"/>
+              </a:defRPr>
+            </a:pPr>
+            <a:r>
+              <a:t>TOTAL INFRASTRUCTURE COST</a:t>
+            </a:r>
+          </a:p>
+        </p:txBody>
+      </p:sp>
+      <p:sp>
+        <p:nvSpPr>
+          <p:cNvPr id="64" name="TextBox 63"/>
+          <p:cNvSpPr txBox="1"/>
+          <p:nvPr/>
+        </p:nvSpPr>
+        <p:spPr>
+          <a:xfrm>
+            <a:off x="10058400" y="5989320"/>
+            <a:ext cx="1371600" cy="320040"/>
+          </a:xfrm>
+          <a:prstGeom prst="rect">
+            <a:avLst/>
+          </a:prstGeom>
+          <a:noFill/>
+        </p:spPr>
+        <p:txBody>
+          <a:bodyPr wrap="square">
+            <a:spAutoFit/>
+          </a:bodyPr>
+          <a:lstStyle/>
+          <a:p>
+            <a:pPr algn="r">
+              <a:defRPr sz="1300" b="1">
+                <a:solidFill>
+                  <a:srgbClr val="FF6666"/>
+                </a:solidFill>
+                <a:latin typeface="Calibri"/>
+              </a:defRPr>
+            </a:pPr>
+            <a:r>
+              <a:t>~$6,864</a:t>
+            </a:r>
+          </a:p>
+        </p:txBody>
+      </p:sp>
+      <p:sp>
+        <p:nvSpPr>
+          <p:cNvPr id="65" name="TextBox 64"/>
+          <p:cNvSpPr txBox="1"/>
+          <p:nvPr/>
+        </p:nvSpPr>
+        <p:spPr>
+          <a:xfrm>
+            <a:off x="1097280" y="6355080"/>
+            <a:ext cx="3657600" cy="320040"/>
+          </a:xfrm>
+          <a:prstGeom prst="rect">
+            <a:avLst/>
+          </a:prstGeom>
+          <a:noFill/>
+        </p:spPr>
+        <p:txBody>
+          <a:bodyPr wrap="square">
+            <a:spAutoFit/>
+          </a:bodyPr>
+          <a:lstStyle/>
+          <a:p>
+            <a:pPr algn="l">
+              <a:defRPr sz="1100" b="1">
+                <a:solidFill>
+                  <a:srgbClr val="FFFFFF"/>
+                </a:solidFill>
+                <a:latin typeface="Calibri"/>
+              </a:defRPr>
+            </a:pPr>
+            <a:r>
+              <a:t>YEAR 1 GROSS REVENUE</a:t>
+            </a:r>
+          </a:p>
+        </p:txBody>
+      </p:sp>
+      <p:sp>
+        <p:nvSpPr>
+          <p:cNvPr id="66" name="TextBox 65"/>
+          <p:cNvSpPr txBox="1"/>
+          <p:nvPr/>
+        </p:nvSpPr>
+        <p:spPr>
+          <a:xfrm>
+            <a:off x="10058400" y="6355080"/>
+            <a:ext cx="1371600" cy="320040"/>
+          </a:xfrm>
+          <a:prstGeom prst="rect">
+            <a:avLst/>
+          </a:prstGeom>
+          <a:noFill/>
+        </p:spPr>
+        <p:txBody>
+          <a:bodyPr wrap="square">
+            <a:spAutoFit/>
+          </a:bodyPr>
+          <a:lstStyle/>
+          <a:p>
+            <a:pPr algn="r">
+              <a:defRPr sz="1300" b="1">
+                <a:solidFill>
+                  <a:srgbClr val="D4A843"/>
+                </a:solidFill>
+                <a:latin typeface="Calibri"/>
+              </a:defRPr>
+            </a:pPr>
+            <a:r>
+              <a:t>$277,185</a:t>
+            </a:r>
+          </a:p>
+        </p:txBody>
+      </p:sp>
+      <p:sp>
+        <p:nvSpPr>
+          <p:cNvPr id="67" name="Rectangle 66"/>
           <p:cNvSpPr/>
           <p:nvPr/>
         </p:nvSpPr>
         <p:spPr>
           <a:xfrm>
-            <a:off x="8412480" y="1645920"/>
-            <a:ext cx="3566160" cy="4572000"/>
-          </a:xfrm>
-          <a:prstGeom prst="roundRect">
-            <a:avLst/>
-          </a:prstGeom>
-          <a:solidFill>
-            <a:srgbClr val="111111"/>
-          </a:solidFill>
-          <a:ln w="12700">
-            <a:solidFill>
-              <a:srgbClr val="2A2A2A"/>
-            </a:solidFill>
-          </a:ln>
-        </p:spPr>
-        <p:style>
-          <a:lnRef idx="1">
-            <a:schemeClr val="accent1"/>
-          </a:lnRef>
-          <a:fillRef idx="3">
-            <a:schemeClr val="accent1"/>
-          </a:fillRef>
-          <a:effectRef idx="2">
-            <a:schemeClr val="accent1"/>
-          </a:effectRef>
-          <a:fontRef idx="minor">
-            <a:schemeClr val="lt1"/>
-          </a:fontRef>
-        </p:style>
-        <p:txBody>
-          <a:bodyPr rtlCol="0" anchor="ctr"/>
-          <a:lstStyle/>
-          <a:p>
-            <a:pPr algn="ctr"/>
-          </a:p>
-        </p:txBody>
-      </p:sp>
-      <p:sp>
-        <p:nvSpPr>
-          <p:cNvPr id="17" name="TextBox 16"/>
-          <p:cNvSpPr txBox="1"/>
-          <p:nvPr/>
-        </p:nvSpPr>
-        <p:spPr>
-          <a:xfrm>
-            <a:off x="8686800" y="1783080"/>
-            <a:ext cx="3017520" cy="457200"/>
-          </a:xfrm>
-          <a:prstGeom prst="rect">
-            <a:avLst/>
-          </a:prstGeom>
-          <a:noFill/>
-        </p:spPr>
-        <p:txBody>
-          <a:bodyPr wrap="square">
-            <a:spAutoFit/>
-          </a:bodyPr>
-          <a:lstStyle/>
-          <a:p>
-            <a:pPr algn="ctr">
-              <a:defRPr sz="2400" b="1">
-                <a:solidFill>
-                  <a:srgbClr val="EC4899"/>
-                </a:solidFill>
-                <a:latin typeface="Georgia"/>
-              </a:defRPr>
-            </a:pPr>
-            <a:r>
-              <a:t>Jeroboam</a:t>
-            </a:r>
-          </a:p>
-        </p:txBody>
-      </p:sp>
-      <p:sp>
-        <p:nvSpPr>
-          <p:cNvPr id="18" name="TextBox 17"/>
-          <p:cNvSpPr txBox="1"/>
-          <p:nvPr/>
-        </p:nvSpPr>
-        <p:spPr>
-          <a:xfrm>
-            <a:off x="8686800" y="2240280"/>
-            <a:ext cx="3017520" cy="365760"/>
-          </a:xfrm>
-          <a:prstGeom prst="rect">
-            <a:avLst/>
-          </a:prstGeom>
-          <a:noFill/>
-        </p:spPr>
-        <p:txBody>
-          <a:bodyPr wrap="square">
-            <a:spAutoFit/>
-          </a:bodyPr>
-          <a:lstStyle/>
-          <a:p>
-            <a:pPr algn="ctr">
-              <a:defRPr sz="1800" b="1">
-                <a:solidFill>
-                  <a:srgbClr val="FFFFFF"/>
-                </a:solidFill>
-                <a:latin typeface="Calibri"/>
-              </a:defRPr>
-            </a:pPr>
-            <a:r>
-              <a:t>$79.99/month</a:t>
-            </a:r>
-          </a:p>
-        </p:txBody>
-      </p:sp>
-      <p:sp>
-        <p:nvSpPr>
-          <p:cNvPr id="19" name="TextBox 18"/>
-          <p:cNvSpPr txBox="1"/>
-          <p:nvPr/>
-        </p:nvSpPr>
-        <p:spPr>
-          <a:xfrm>
-            <a:off x="8686800" y="2606040"/>
-            <a:ext cx="3017520" cy="274320"/>
-          </a:xfrm>
-          <a:prstGeom prst="rect">
-            <a:avLst/>
-          </a:prstGeom>
-          <a:noFill/>
-        </p:spPr>
-        <p:txBody>
-          <a:bodyPr wrap="square">
-            <a:spAutoFit/>
-          </a:bodyPr>
-          <a:lstStyle/>
-          <a:p>
-            <a:pPr algn="ctr">
-              <a:defRPr sz="1100" b="0">
-                <a:solidFill>
-                  <a:srgbClr val="6B6B6B"/>
-                </a:solidFill>
-                <a:latin typeface="Calibri"/>
-              </a:defRPr>
-            </a:pPr>
-            <a:r>
-              <a:t>The inner circle</a:t>
-            </a:r>
-          </a:p>
-        </p:txBody>
-      </p:sp>
-      <p:sp>
-        <p:nvSpPr>
-          <p:cNvPr id="20" name="Rectangle 19"/>
-          <p:cNvSpPr/>
-          <p:nvPr/>
-        </p:nvSpPr>
-        <p:spPr>
-          <a:xfrm>
-            <a:off x="8869680" y="2926080"/>
-            <a:ext cx="2651760" cy="27432"/>
+            <a:off x="1097280" y="6720840"/>
+            <a:ext cx="10058400" cy="27432"/>
           </a:xfrm>
           <a:prstGeom prst="rect">
             <a:avLst/>
@@ -8080,135 +10920,72 @@
       </p:sp>
       <p:sp>
         <p:nvSpPr>
-          <p:cNvPr id="21" name="TextBox 20"/>
-          <p:cNvSpPr txBox="1"/>
-          <p:nvPr/>
-        </p:nvSpPr>
-        <p:spPr>
-          <a:xfrm>
-            <a:off x="8686800" y="3108960"/>
-            <a:ext cx="3017520" cy="2926080"/>
-          </a:xfrm>
-          <a:prstGeom prst="rect">
-            <a:avLst/>
-          </a:prstGeom>
-          <a:noFill/>
-        </p:spPr>
-        <p:txBody>
-          <a:bodyPr wrap="square">
-            <a:spAutoFit/>
-          </a:bodyPr>
-          <a:lstStyle/>
-          <a:p>
-            <a:pPr>
-              <a:spcAft>
-                <a:spcPts val="600"/>
-              </a:spcAft>
-              <a:defRPr sz="1100">
-                <a:solidFill>
-                  <a:srgbClr val="FDF8EC"/>
-                </a:solidFill>
-                <a:latin typeface="Calibri"/>
-              </a:defRPr>
-            </a:pPr>
-            <a:r>
-              <a:t>  2x points multiplier</a:t>
-            </a:r>
-          </a:p>
-          <a:p>
-            <a:pPr>
-              <a:spcAft>
-                <a:spcPts val="600"/>
-              </a:spcAft>
-              <a:defRPr sz="1100">
-                <a:solidFill>
-                  <a:srgbClr val="FDF8EC"/>
-                </a:solidFill>
-                <a:latin typeface="Calibri"/>
-              </a:defRPr>
-            </a:pPr>
-            <a:r>
-              <a:t>  All Magnum benefits</a:t>
-            </a:r>
-          </a:p>
-          <a:p>
-            <a:pPr>
-              <a:spcAft>
-                <a:spcPts val="600"/>
-              </a:spcAft>
-              <a:defRPr sz="1100">
-                <a:solidFill>
-                  <a:srgbClr val="FDF8EC"/>
-                </a:solidFill>
-                <a:latin typeface="Calibri"/>
-              </a:defRPr>
-            </a:pPr>
-            <a:r>
-              <a:t>  Complimentary monthly bottle</a:t>
-            </a:r>
-          </a:p>
-          <a:p>
-            <a:pPr>
-              <a:spcAft>
-                <a:spcPts val="600"/>
-              </a:spcAft>
-              <a:defRPr sz="1100">
-                <a:solidFill>
-                  <a:srgbClr val="FDF8EC"/>
-                </a:solidFill>
-                <a:latin typeface="Calibri"/>
-              </a:defRPr>
-            </a:pPr>
-            <a:r>
-              <a:t>  Private lounge access</a:t>
-            </a:r>
-          </a:p>
-          <a:p>
-            <a:pPr>
-              <a:spcAft>
-                <a:spcPts val="600"/>
-              </a:spcAft>
-              <a:defRPr sz="1100">
-                <a:solidFill>
-                  <a:srgbClr val="FDF8EC"/>
-                </a:solidFill>
-                <a:latin typeface="Calibri"/>
-              </a:defRPr>
-            </a:pPr>
-            <a:r>
-              <a:t>  Personal sommelier service</a:t>
-            </a:r>
-          </a:p>
-          <a:p>
-            <a:pPr>
-              <a:spcAft>
-                <a:spcPts val="600"/>
-              </a:spcAft>
-              <a:defRPr sz="1100">
-                <a:solidFill>
-                  <a:srgbClr val="FDF8EC"/>
-                </a:solidFill>
-                <a:latin typeface="Calibri"/>
-              </a:defRPr>
-            </a:pPr>
-            <a:r>
-              <a:t>  VIP event access</a:t>
-            </a:r>
-          </a:p>
-          <a:p>
-            <a:pPr>
-              <a:spcAft>
-                <a:spcPts val="600"/>
-              </a:spcAft>
-              <a:defRPr sz="1100">
-                <a:solidFill>
-                  <a:srgbClr val="FDF8EC"/>
-                </a:solidFill>
-                <a:latin typeface="Calibri"/>
-              </a:defRPr>
-            </a:pPr>
-            <a:r>
-              <a:t>  25% off At-Home</a:t>
+          <p:cNvPr id="68" name="TextBox 67"/>
+          <p:cNvSpPr txBox="1"/>
+          <p:nvPr/>
+        </p:nvSpPr>
+        <p:spPr>
+          <a:xfrm>
+            <a:off x="1097280" y="6766559"/>
+            <a:ext cx="4572000" cy="365760"/>
+          </a:xfrm>
+          <a:prstGeom prst="rect">
+            <a:avLst/>
+          </a:prstGeom>
+          <a:noFill/>
+        </p:spPr>
+        <p:txBody>
+          <a:bodyPr wrap="square">
+            <a:spAutoFit/>
+          </a:bodyPr>
+          <a:lstStyle/>
+          <a:p>
+            <a:pPr algn="l">
+              <a:defRPr sz="1300" b="1">
+                <a:solidFill>
+                  <a:srgbClr val="FFFFFF"/>
+                </a:solidFill>
+                <a:latin typeface="Calibri"/>
+              </a:defRPr>
+            </a:pPr>
+            <a:r>
+              <a:t>NET PROFIT (97.5% margin)</a:t>
+            </a:r>
+          </a:p>
+        </p:txBody>
+      </p:sp>
+      <p:sp>
+        <p:nvSpPr>
+          <p:cNvPr id="69" name="TextBox 68"/>
+          <p:cNvSpPr txBox="1"/>
+          <p:nvPr/>
+        </p:nvSpPr>
+        <p:spPr>
+          <a:xfrm>
+            <a:off x="9144000" y="6766559"/>
+            <a:ext cx="2286000" cy="365760"/>
+          </a:xfrm>
+          <a:prstGeom prst="rect">
+            <a:avLst/>
+          </a:prstGeom>
+          <a:noFill/>
+        </p:spPr>
+        <p:txBody>
+          <a:bodyPr wrap="square">
+            <a:spAutoFit/>
+          </a:bodyPr>
+          <a:lstStyle/>
+          <a:p>
+            <a:pPr algn="r">
+              <a:defRPr sz="2200" b="1">
+                <a:solidFill>
+                  <a:srgbClr val="22C55E"/>
+                </a:solidFill>
+                <a:latin typeface="Calibri"/>
+              </a:defRPr>
+            </a:pPr>
+            <a:r>
+              <a:t>$270,321</a:t>
             </a:r>
           </a:p>
         </p:txBody>
@@ -8270,7 +11047,7 @@
               </a:defRPr>
             </a:pPr>
             <a:r>
-              <a:t>The App Experience</a:t>
+              <a:t>Membership Tiers</a:t>
             </a:r>
           </a:p>
         </p:txBody>
@@ -8326,14 +11103,14 @@
         </p:nvSpPr>
         <p:spPr>
           <a:xfrm>
-            <a:off x="365760" y="1645920"/>
-            <a:ext cx="1783080" cy="3474720"/>
+            <a:off x="731520" y="1645920"/>
+            <a:ext cx="3566160" cy="4572000"/>
           </a:xfrm>
           <a:prstGeom prst="roundRect">
             <a:avLst/>
           </a:prstGeom>
           <a:solidFill>
-            <a:srgbClr val="181818"/>
+            <a:srgbClr val="111111"/>
           </a:solidFill>
           <a:ln w="12700">
             <a:solidFill>
@@ -8371,8 +11148,8 @@
         </p:nvSpPr>
         <p:spPr>
           <a:xfrm>
-            <a:off x="457200" y="1828800"/>
-            <a:ext cx="1600200" cy="365760"/>
+            <a:off x="1005840" y="1783080"/>
+            <a:ext cx="3017520" cy="457200"/>
           </a:xfrm>
           <a:prstGeom prst="rect">
             <a:avLst/>
@@ -8386,15 +11163,15 @@
           <a:lstStyle/>
           <a:p>
             <a:pPr algn="ctr">
-              <a:defRPr sz="1300" b="1">
-                <a:solidFill>
-                  <a:srgbClr val="D4A843"/>
-                </a:solidFill>
-                <a:latin typeface="Calibri"/>
-              </a:defRPr>
-            </a:pPr>
-            <a:r>
-              <a:t>Login</a:t>
+              <a:defRPr sz="2400" b="1">
+                <a:solidFill>
+                  <a:srgbClr val="6B6B6B"/>
+                </a:solidFill>
+                <a:latin typeface="Georgia"/>
+              </a:defRPr>
+            </a:pPr>
+            <a:r>
+              <a:t>Flûte</a:t>
             </a:r>
           </a:p>
         </p:txBody>
@@ -8407,8 +11184,8 @@
         </p:nvSpPr>
         <p:spPr>
           <a:xfrm>
-            <a:off x="457200" y="2286000"/>
-            <a:ext cx="1600200" cy="2560320"/>
+            <a:off x="1005840" y="2240280"/>
+            <a:ext cx="3017520" cy="365760"/>
           </a:xfrm>
           <a:prstGeom prst="rect">
             <a:avLst/>
@@ -8422,7 +11199,125 @@
           <a:lstStyle/>
           <a:p>
             <a:pPr algn="ctr">
-              <a:defRPr sz="900" b="0">
+              <a:defRPr sz="1800" b="1">
+                <a:solidFill>
+                  <a:srgbClr val="FFFFFF"/>
+                </a:solidFill>
+                <a:latin typeface="Calibri"/>
+              </a:defRPr>
+            </a:pPr>
+            <a:r>
+              <a:t>Free</a:t>
+            </a:r>
+          </a:p>
+        </p:txBody>
+      </p:sp>
+      <p:sp>
+        <p:nvSpPr>
+          <p:cNvPr id="7" name="TextBox 6"/>
+          <p:cNvSpPr txBox="1"/>
+          <p:nvPr/>
+        </p:nvSpPr>
+        <p:spPr>
+          <a:xfrm>
+            <a:off x="1005840" y="2606040"/>
+            <a:ext cx="3017520" cy="274320"/>
+          </a:xfrm>
+          <a:prstGeom prst="rect">
+            <a:avLst/>
+          </a:prstGeom>
+          <a:noFill/>
+        </p:spPr>
+        <p:txBody>
+          <a:bodyPr wrap="square">
+            <a:spAutoFit/>
+          </a:bodyPr>
+          <a:lstStyle/>
+          <a:p>
+            <a:pPr algn="ctr">
+              <a:defRPr sz="1100" b="0">
+                <a:solidFill>
+                  <a:srgbClr val="6B6B6B"/>
+                </a:solidFill>
+                <a:latin typeface="Calibri"/>
+              </a:defRPr>
+            </a:pPr>
+            <a:r>
+              <a:t>Entry tier — every signup</a:t>
+            </a:r>
+          </a:p>
+        </p:txBody>
+      </p:sp>
+      <p:sp>
+        <p:nvSpPr>
+          <p:cNvPr id="8" name="Rectangle 7"/>
+          <p:cNvSpPr/>
+          <p:nvPr/>
+        </p:nvSpPr>
+        <p:spPr>
+          <a:xfrm>
+            <a:off x="1188720" y="2926080"/>
+            <a:ext cx="2651760" cy="27432"/>
+          </a:xfrm>
+          <a:prstGeom prst="rect">
+            <a:avLst/>
+          </a:prstGeom>
+          <a:solidFill>
+            <a:srgbClr val="D4A843"/>
+          </a:solidFill>
+          <a:ln>
+            <a:noFill/>
+          </a:ln>
+        </p:spPr>
+        <p:style>
+          <a:lnRef idx="1">
+            <a:schemeClr val="accent1"/>
+          </a:lnRef>
+          <a:fillRef idx="3">
+            <a:schemeClr val="accent1"/>
+          </a:fillRef>
+          <a:effectRef idx="2">
+            <a:schemeClr val="accent1"/>
+          </a:effectRef>
+          <a:fontRef idx="minor">
+            <a:schemeClr val="lt1"/>
+          </a:fontRef>
+        </p:style>
+        <p:txBody>
+          <a:bodyPr rtlCol="0" anchor="ctr"/>
+          <a:lstStyle/>
+          <a:p>
+            <a:pPr algn="ctr"/>
+          </a:p>
+        </p:txBody>
+      </p:sp>
+      <p:sp>
+        <p:nvSpPr>
+          <p:cNvPr id="9" name="TextBox 8"/>
+          <p:cNvSpPr txBox="1"/>
+          <p:nvPr/>
+        </p:nvSpPr>
+        <p:spPr>
+          <a:xfrm>
+            <a:off x="1005840" y="3108960"/>
+            <a:ext cx="3017520" cy="2926080"/>
+          </a:xfrm>
+          <a:prstGeom prst="rect">
+            <a:avLst/>
+          </a:prstGeom>
+          <a:noFill/>
+        </p:spPr>
+        <p:txBody>
+          <a:bodyPr wrap="square">
+            <a:spAutoFit/>
+          </a:bodyPr>
+          <a:lstStyle/>
+          <a:p>
+            <a:pPr>
+              <a:spcAft>
+                <a:spcPts val="600"/>
+              </a:spcAft>
+              <a:defRPr sz="1100">
                 <a:solidFill>
                   <a:srgbClr val="FDF8EC"/>
                 </a:solidFill>
@@ -8430,39 +11325,107 @@
               </a:defRPr>
             </a:pPr>
             <a:r>
-              <a:t>Elegant Bocage branding with</a:t>
-            </a:r>
-            <a:br/>
-            <a:r>
-              <a:t>animated logo, password</a:t>
-            </a:r>
-            <a:br/>
-            <a:r>
-              <a:t>strength meter, and</a:t>
-            </a:r>
-            <a:br/>
-            <a:r>
-              <a:t>smooth transitions</a:t>
-            </a:r>
-          </a:p>
-        </p:txBody>
-      </p:sp>
-      <p:sp>
-        <p:nvSpPr>
-          <p:cNvPr id="7" name="Rounded Rectangle 6"/>
+              <a:t>  1x points on every visit</a:t>
+            </a:r>
+          </a:p>
+          <a:p>
+            <a:pPr>
+              <a:spcAft>
+                <a:spcPts val="600"/>
+              </a:spcAft>
+              <a:defRPr sz="1100">
+                <a:solidFill>
+                  <a:srgbClr val="FDF8EC"/>
+                </a:solidFill>
+                <a:latin typeface="Calibri"/>
+              </a:defRPr>
+            </a:pPr>
+            <a:r>
+              <a:t>  Member-only event access</a:t>
+            </a:r>
+          </a:p>
+          <a:p>
+            <a:pPr>
+              <a:spcAft>
+                <a:spcPts val="600"/>
+              </a:spcAft>
+              <a:defRPr sz="1100">
+                <a:solidFill>
+                  <a:srgbClr val="FDF8EC"/>
+                </a:solidFill>
+                <a:latin typeface="Calibri"/>
+              </a:defRPr>
+            </a:pPr>
+            <a:r>
+              <a:t>  Birthday champagne toast</a:t>
+            </a:r>
+          </a:p>
+          <a:p>
+            <a:pPr>
+              <a:spcAft>
+                <a:spcPts val="600"/>
+              </a:spcAft>
+              <a:defRPr sz="1100">
+                <a:solidFill>
+                  <a:srgbClr val="FDF8EC"/>
+                </a:solidFill>
+                <a:latin typeface="Calibri"/>
+              </a:defRPr>
+            </a:pPr>
+            <a:r>
+              <a:t>  Early access to new arrivals</a:t>
+            </a:r>
+          </a:p>
+          <a:p>
+            <a:pPr>
+              <a:spcAft>
+                <a:spcPts val="600"/>
+              </a:spcAft>
+              <a:defRPr sz="1100">
+                <a:solidFill>
+                  <a:srgbClr val="FDF8EC"/>
+                </a:solidFill>
+                <a:latin typeface="Calibri"/>
+              </a:defRPr>
+            </a:pPr>
+            <a:r>
+              <a:t>  Digital membership card</a:t>
+            </a:r>
+          </a:p>
+          <a:p>
+            <a:pPr>
+              <a:spcAft>
+                <a:spcPts val="600"/>
+              </a:spcAft>
+              <a:defRPr sz="1100">
+                <a:solidFill>
+                  <a:srgbClr val="FDF8EC"/>
+                </a:solidFill>
+                <a:latin typeface="Calibri"/>
+              </a:defRPr>
+            </a:pPr>
+            <a:r>
+              <a:t>  Push notification deals</a:t>
+            </a:r>
+          </a:p>
+        </p:txBody>
+      </p:sp>
+      <p:sp>
+        <p:nvSpPr>
+          <p:cNvPr id="10" name="Rounded Rectangle 9"/>
           <p:cNvSpPr/>
           <p:nvPr/>
         </p:nvSpPr>
         <p:spPr>
           <a:xfrm>
-            <a:off x="2331720" y="1645920"/>
-            <a:ext cx="1783080" cy="3474720"/>
+            <a:off x="4572000" y="1645920"/>
+            <a:ext cx="3566160" cy="4572000"/>
           </a:xfrm>
           <a:prstGeom prst="roundRect">
             <a:avLst/>
           </a:prstGeom>
           <a:solidFill>
-            <a:srgbClr val="181818"/>
+            <a:srgbClr val="111111"/>
           </a:solidFill>
           <a:ln w="12700">
             <a:solidFill>
@@ -8494,14 +11457,14 @@
       </p:sp>
       <p:sp>
         <p:nvSpPr>
-          <p:cNvPr id="8" name="TextBox 7"/>
-          <p:cNvSpPr txBox="1"/>
-          <p:nvPr/>
-        </p:nvSpPr>
-        <p:spPr>
-          <a:xfrm>
-            <a:off x="2423160" y="1828800"/>
-            <a:ext cx="1600200" cy="365760"/>
+          <p:cNvPr id="11" name="TextBox 10"/>
+          <p:cNvSpPr txBox="1"/>
+          <p:nvPr/>
+        </p:nvSpPr>
+        <p:spPr>
+          <a:xfrm>
+            <a:off x="4846320" y="1783080"/>
+            <a:ext cx="3017520" cy="457200"/>
           </a:xfrm>
           <a:prstGeom prst="rect">
             <a:avLst/>
@@ -8515,29 +11478,29 @@
           <a:lstStyle/>
           <a:p>
             <a:pPr algn="ctr">
-              <a:defRPr sz="1300" b="1">
+              <a:defRPr sz="2400" b="1">
                 <a:solidFill>
                   <a:srgbClr val="D4A843"/>
                 </a:solidFill>
-                <a:latin typeface="Calibri"/>
-              </a:defRPr>
-            </a:pPr>
-            <a:r>
-              <a:t>Wine Menu</a:t>
-            </a:r>
-          </a:p>
-        </p:txBody>
-      </p:sp>
-      <p:sp>
-        <p:nvSpPr>
-          <p:cNvPr id="9" name="TextBox 8"/>
-          <p:cNvSpPr txBox="1"/>
-          <p:nvPr/>
-        </p:nvSpPr>
-        <p:spPr>
-          <a:xfrm>
-            <a:off x="2423160" y="2286000"/>
-            <a:ext cx="1600200" cy="2560320"/>
+                <a:latin typeface="Georgia"/>
+              </a:defRPr>
+            </a:pPr>
+            <a:r>
+              <a:t>Magnum</a:t>
+            </a:r>
+          </a:p>
+        </p:txBody>
+      </p:sp>
+      <p:sp>
+        <p:nvSpPr>
+          <p:cNvPr id="12" name="TextBox 11"/>
+          <p:cNvSpPr txBox="1"/>
+          <p:nvPr/>
+        </p:nvSpPr>
+        <p:spPr>
+          <a:xfrm>
+            <a:off x="4846320" y="2240280"/>
+            <a:ext cx="3017520" cy="365760"/>
           </a:xfrm>
           <a:prstGeom prst="rect">
             <a:avLst/>
@@ -8551,7 +11514,125 @@
           <a:lstStyle/>
           <a:p>
             <a:pPr algn="ctr">
-              <a:defRPr sz="900" b="0">
+              <a:defRPr sz="1800" b="1">
+                <a:solidFill>
+                  <a:srgbClr val="FFFFFF"/>
+                </a:solidFill>
+                <a:latin typeface="Calibri"/>
+              </a:defRPr>
+            </a:pPr>
+            <a:r>
+              <a:t>$29.99/month</a:t>
+            </a:r>
+          </a:p>
+        </p:txBody>
+      </p:sp>
+      <p:sp>
+        <p:nvSpPr>
+          <p:cNvPr id="13" name="TextBox 12"/>
+          <p:cNvSpPr txBox="1"/>
+          <p:nvPr/>
+        </p:nvSpPr>
+        <p:spPr>
+          <a:xfrm>
+            <a:off x="4846320" y="2606040"/>
+            <a:ext cx="3017520" cy="274320"/>
+          </a:xfrm>
+          <a:prstGeom prst="rect">
+            <a:avLst/>
+          </a:prstGeom>
+          <a:noFill/>
+        </p:spPr>
+        <p:txBody>
+          <a:bodyPr wrap="square">
+            <a:spAutoFit/>
+          </a:bodyPr>
+          <a:lstStyle/>
+          <a:p>
+            <a:pPr algn="ctr">
+              <a:defRPr sz="1100" b="0">
+                <a:solidFill>
+                  <a:srgbClr val="6B6B6B"/>
+                </a:solidFill>
+                <a:latin typeface="Calibri"/>
+              </a:defRPr>
+            </a:pPr>
+            <a:r>
+              <a:t>For champagne enthusiasts</a:t>
+            </a:r>
+          </a:p>
+        </p:txBody>
+      </p:sp>
+      <p:sp>
+        <p:nvSpPr>
+          <p:cNvPr id="14" name="Rectangle 13"/>
+          <p:cNvSpPr/>
+          <p:nvPr/>
+        </p:nvSpPr>
+        <p:spPr>
+          <a:xfrm>
+            <a:off x="5029200" y="2926080"/>
+            <a:ext cx="2651760" cy="27432"/>
+          </a:xfrm>
+          <a:prstGeom prst="rect">
+            <a:avLst/>
+          </a:prstGeom>
+          <a:solidFill>
+            <a:srgbClr val="D4A843"/>
+          </a:solidFill>
+          <a:ln>
+            <a:noFill/>
+          </a:ln>
+        </p:spPr>
+        <p:style>
+          <a:lnRef idx="1">
+            <a:schemeClr val="accent1"/>
+          </a:lnRef>
+          <a:fillRef idx="3">
+            <a:schemeClr val="accent1"/>
+          </a:fillRef>
+          <a:effectRef idx="2">
+            <a:schemeClr val="accent1"/>
+          </a:effectRef>
+          <a:fontRef idx="minor">
+            <a:schemeClr val="lt1"/>
+          </a:fontRef>
+        </p:style>
+        <p:txBody>
+          <a:bodyPr rtlCol="0" anchor="ctr"/>
+          <a:lstStyle/>
+          <a:p>
+            <a:pPr algn="ctr"/>
+          </a:p>
+        </p:txBody>
+      </p:sp>
+      <p:sp>
+        <p:nvSpPr>
+          <p:cNvPr id="15" name="TextBox 14"/>
+          <p:cNvSpPr txBox="1"/>
+          <p:nvPr/>
+        </p:nvSpPr>
+        <p:spPr>
+          <a:xfrm>
+            <a:off x="4846320" y="3108960"/>
+            <a:ext cx="3017520" cy="2926080"/>
+          </a:xfrm>
+          <a:prstGeom prst="rect">
+            <a:avLst/>
+          </a:prstGeom>
+          <a:noFill/>
+        </p:spPr>
+        <p:txBody>
+          <a:bodyPr wrap="square">
+            <a:spAutoFit/>
+          </a:bodyPr>
+          <a:lstStyle/>
+          <a:p>
+            <a:pPr>
+              <a:spcAft>
+                <a:spcPts val="600"/>
+              </a:spcAft>
+              <a:defRPr sz="1100">
                 <a:solidFill>
                   <a:srgbClr val="FDF8EC"/>
                 </a:solidFill>
@@ -8559,39 +11640,107 @@
               </a:defRPr>
             </a:pPr>
             <a:r>
-              <a:t>Your full menu with search,</a:t>
-            </a:r>
-            <a:br/>
-            <a:r>
-              <a:t>filters, grid/list view,</a:t>
-            </a:r>
-            <a:br/>
-            <a:r>
-              <a:t>and tap-for-details.</a:t>
-            </a:r>
-            <a:br/>
-            <a:r>
-              <a:t>Always current.</a:t>
-            </a:r>
-          </a:p>
-        </p:txBody>
-      </p:sp>
-      <p:sp>
-        <p:nvSpPr>
-          <p:cNvPr id="10" name="Rounded Rectangle 9"/>
+              <a:t>  1.5x points multiplier</a:t>
+            </a:r>
+          </a:p>
+          <a:p>
+            <a:pPr>
+              <a:spcAft>
+                <a:spcPts val="600"/>
+              </a:spcAft>
+              <a:defRPr sz="1100">
+                <a:solidFill>
+                  <a:srgbClr val="FDF8EC"/>
+                </a:solidFill>
+                <a:latin typeface="Calibri"/>
+              </a:defRPr>
+            </a:pPr>
+            <a:r>
+              <a:t>  All Flûte benefits</a:t>
+            </a:r>
+          </a:p>
+          <a:p>
+            <a:pPr>
+              <a:spcAft>
+                <a:spcPts val="600"/>
+              </a:spcAft>
+              <a:defRPr sz="1100">
+                <a:solidFill>
+                  <a:srgbClr val="FDF8EC"/>
+                </a:solidFill>
+                <a:latin typeface="Calibri"/>
+              </a:defRPr>
+            </a:pPr>
+            <a:r>
+              <a:t>  Complimentary monthly glass</a:t>
+            </a:r>
+          </a:p>
+          <a:p>
+            <a:pPr>
+              <a:spcAft>
+                <a:spcPts val="600"/>
+              </a:spcAft>
+              <a:defRPr sz="1100">
+                <a:solidFill>
+                  <a:srgbClr val="FDF8EC"/>
+                </a:solidFill>
+                <a:latin typeface="Calibri"/>
+              </a:defRPr>
+            </a:pPr>
+            <a:r>
+              <a:t>  Priority event seating</a:t>
+            </a:r>
+          </a:p>
+          <a:p>
+            <a:pPr>
+              <a:spcAft>
+                <a:spcPts val="600"/>
+              </a:spcAft>
+              <a:defRPr sz="1100">
+                <a:solidFill>
+                  <a:srgbClr val="FDF8EC"/>
+                </a:solidFill>
+                <a:latin typeface="Calibri"/>
+              </a:defRPr>
+            </a:pPr>
+            <a:r>
+              <a:t>  Exclusive Magnum tastings</a:t>
+            </a:r>
+          </a:p>
+          <a:p>
+            <a:pPr>
+              <a:spcAft>
+                <a:spcPts val="600"/>
+              </a:spcAft>
+              <a:defRPr sz="1100">
+                <a:solidFill>
+                  <a:srgbClr val="FDF8EC"/>
+                </a:solidFill>
+                <a:latin typeface="Calibri"/>
+              </a:defRPr>
+            </a:pPr>
+            <a:r>
+              <a:t>  10% off At-Home bookings</a:t>
+            </a:r>
+          </a:p>
+        </p:txBody>
+      </p:sp>
+      <p:sp>
+        <p:nvSpPr>
+          <p:cNvPr id="16" name="Rounded Rectangle 15"/>
           <p:cNvSpPr/>
           <p:nvPr/>
         </p:nvSpPr>
         <p:spPr>
           <a:xfrm>
-            <a:off x="4297680" y="1645920"/>
-            <a:ext cx="1783080" cy="3474720"/>
+            <a:off x="8412480" y="1645920"/>
+            <a:ext cx="3566160" cy="4572000"/>
           </a:xfrm>
           <a:prstGeom prst="roundRect">
             <a:avLst/>
           </a:prstGeom>
           <a:solidFill>
-            <a:srgbClr val="181818"/>
+            <a:srgbClr val="111111"/>
           </a:solidFill>
           <a:ln w="12700">
             <a:solidFill>
@@ -8623,14 +11772,14 @@
       </p:sp>
       <p:sp>
         <p:nvSpPr>
-          <p:cNvPr id="11" name="TextBox 10"/>
-          <p:cNvSpPr txBox="1"/>
-          <p:nvPr/>
-        </p:nvSpPr>
-        <p:spPr>
-          <a:xfrm>
-            <a:off x="4389120" y="1828800"/>
-            <a:ext cx="1600200" cy="365760"/>
+          <p:cNvPr id="17" name="TextBox 16"/>
+          <p:cNvSpPr txBox="1"/>
+          <p:nvPr/>
+        </p:nvSpPr>
+        <p:spPr>
+          <a:xfrm>
+            <a:off x="8686800" y="1783080"/>
+            <a:ext cx="3017520" cy="457200"/>
           </a:xfrm>
           <a:prstGeom prst="rect">
             <a:avLst/>
@@ -8644,29 +11793,29 @@
           <a:lstStyle/>
           <a:p>
             <a:pPr algn="ctr">
-              <a:defRPr sz="1300" b="1">
-                <a:solidFill>
-                  <a:srgbClr val="D4A843"/>
-                </a:solidFill>
-                <a:latin typeface="Calibri"/>
-              </a:defRPr>
-            </a:pPr>
-            <a:r>
-              <a:t>Membership</a:t>
-            </a:r>
-          </a:p>
-        </p:txBody>
-      </p:sp>
-      <p:sp>
-        <p:nvSpPr>
-          <p:cNvPr id="12" name="TextBox 11"/>
-          <p:cNvSpPr txBox="1"/>
-          <p:nvPr/>
-        </p:nvSpPr>
-        <p:spPr>
-          <a:xfrm>
-            <a:off x="4389120" y="2286000"/>
-            <a:ext cx="1600200" cy="2560320"/>
+              <a:defRPr sz="2400" b="1">
+                <a:solidFill>
+                  <a:srgbClr val="EC4899"/>
+                </a:solidFill>
+                <a:latin typeface="Georgia"/>
+              </a:defRPr>
+            </a:pPr>
+            <a:r>
+              <a:t>Jeroboam</a:t>
+            </a:r>
+          </a:p>
+        </p:txBody>
+      </p:sp>
+      <p:sp>
+        <p:nvSpPr>
+          <p:cNvPr id="18" name="TextBox 17"/>
+          <p:cNvSpPr txBox="1"/>
+          <p:nvPr/>
+        </p:nvSpPr>
+        <p:spPr>
+          <a:xfrm>
+            <a:off x="8686800" y="2240280"/>
+            <a:ext cx="3017520" cy="365760"/>
           </a:xfrm>
           <a:prstGeom prst="rect">
             <a:avLst/>
@@ -8680,52 +11829,74 @@
           <a:lstStyle/>
           <a:p>
             <a:pPr algn="ctr">
-              <a:defRPr sz="900" b="0">
-                <a:solidFill>
-                  <a:srgbClr val="FDF8EC"/>
-                </a:solidFill>
-                <a:latin typeface="Calibri"/>
-              </a:defRPr>
-            </a:pPr>
-            <a:r>
-              <a:t>Digital membership card,</a:t>
-            </a:r>
-            <a:br/>
-            <a:r>
-              <a:t>points progress, tier</a:t>
-            </a:r>
-            <a:br/>
-            <a:r>
-              <a:t>benefits, and transaction</a:t>
-            </a:r>
-            <a:br/>
-            <a:r>
-              <a:t>history at a glance.</a:t>
-            </a:r>
-          </a:p>
-        </p:txBody>
-      </p:sp>
-      <p:sp>
-        <p:nvSpPr>
-          <p:cNvPr id="13" name="Rounded Rectangle 12"/>
+              <a:defRPr sz="1800" b="1">
+                <a:solidFill>
+                  <a:srgbClr val="FFFFFF"/>
+                </a:solidFill>
+                <a:latin typeface="Calibri"/>
+              </a:defRPr>
+            </a:pPr>
+            <a:r>
+              <a:t>$79.99/month</a:t>
+            </a:r>
+          </a:p>
+        </p:txBody>
+      </p:sp>
+      <p:sp>
+        <p:nvSpPr>
+          <p:cNvPr id="19" name="TextBox 18"/>
+          <p:cNvSpPr txBox="1"/>
+          <p:nvPr/>
+        </p:nvSpPr>
+        <p:spPr>
+          <a:xfrm>
+            <a:off x="8686800" y="2606040"/>
+            <a:ext cx="3017520" cy="274320"/>
+          </a:xfrm>
+          <a:prstGeom prst="rect">
+            <a:avLst/>
+          </a:prstGeom>
+          <a:noFill/>
+        </p:spPr>
+        <p:txBody>
+          <a:bodyPr wrap="square">
+            <a:spAutoFit/>
+          </a:bodyPr>
+          <a:lstStyle/>
+          <a:p>
+            <a:pPr algn="ctr">
+              <a:defRPr sz="1100" b="0">
+                <a:solidFill>
+                  <a:srgbClr val="6B6B6B"/>
+                </a:solidFill>
+                <a:latin typeface="Calibri"/>
+              </a:defRPr>
+            </a:pPr>
+            <a:r>
+              <a:t>The inner circle</a:t>
+            </a:r>
+          </a:p>
+        </p:txBody>
+      </p:sp>
+      <p:sp>
+        <p:nvSpPr>
+          <p:cNvPr id="20" name="Rectangle 19"/>
           <p:cNvSpPr/>
           <p:nvPr/>
         </p:nvSpPr>
         <p:spPr>
           <a:xfrm>
-            <a:off x="6263640" y="1645920"/>
-            <a:ext cx="1783080" cy="3474720"/>
-          </a:xfrm>
-          <a:prstGeom prst="roundRect">
+            <a:off x="8869680" y="2926080"/>
+            <a:ext cx="2651760" cy="27432"/>
+          </a:xfrm>
+          <a:prstGeom prst="rect">
             <a:avLst/>
           </a:prstGeom>
           <a:solidFill>
-            <a:srgbClr val="181818"/>
+            <a:srgbClr val="D4A843"/>
           </a:solidFill>
-          <a:ln w="12700">
-            <a:solidFill>
-              <a:srgbClr val="2A2A2A"/>
-            </a:solidFill>
+          <a:ln>
+            <a:noFill/>
           </a:ln>
         </p:spPr>
         <p:style>
@@ -8752,64 +11923,31 @@
       </p:sp>
       <p:sp>
         <p:nvSpPr>
-          <p:cNvPr id="14" name="TextBox 13"/>
-          <p:cNvSpPr txBox="1"/>
-          <p:nvPr/>
-        </p:nvSpPr>
-        <p:spPr>
-          <a:xfrm>
-            <a:off x="6355079" y="1828800"/>
-            <a:ext cx="1600200" cy="365760"/>
-          </a:xfrm>
-          <a:prstGeom prst="rect">
-            <a:avLst/>
-          </a:prstGeom>
-          <a:noFill/>
-        </p:spPr>
-        <p:txBody>
-          <a:bodyPr wrap="square">
-            <a:spAutoFit/>
-          </a:bodyPr>
-          <a:lstStyle/>
-          <a:p>
-            <a:pPr algn="ctr">
-              <a:defRPr sz="1300" b="1">
-                <a:solidFill>
-                  <a:srgbClr val="D4A843"/>
-                </a:solidFill>
-                <a:latin typeface="Calibri"/>
-              </a:defRPr>
-            </a:pPr>
-            <a:r>
-              <a:t>Events</a:t>
-            </a:r>
-          </a:p>
-        </p:txBody>
-      </p:sp>
-      <p:sp>
-        <p:nvSpPr>
-          <p:cNvPr id="15" name="TextBox 14"/>
-          <p:cNvSpPr txBox="1"/>
-          <p:nvPr/>
-        </p:nvSpPr>
-        <p:spPr>
-          <a:xfrm>
-            <a:off x="6355079" y="2286000"/>
-            <a:ext cx="1600200" cy="2560320"/>
-          </a:xfrm>
-          <a:prstGeom prst="rect">
-            <a:avLst/>
-          </a:prstGeom>
-          <a:noFill/>
-        </p:spPr>
-        <p:txBody>
-          <a:bodyPr wrap="square">
-            <a:spAutoFit/>
-          </a:bodyPr>
-          <a:lstStyle/>
-          <a:p>
-            <a:pPr algn="ctr">
-              <a:defRPr sz="900" b="0">
+          <p:cNvPr id="21" name="TextBox 20"/>
+          <p:cNvSpPr txBox="1"/>
+          <p:nvPr/>
+        </p:nvSpPr>
+        <p:spPr>
+          <a:xfrm>
+            <a:off x="8686800" y="3108960"/>
+            <a:ext cx="3017520" cy="2926080"/>
+          </a:xfrm>
+          <a:prstGeom prst="rect">
+            <a:avLst/>
+          </a:prstGeom>
+          <a:noFill/>
+        </p:spPr>
+        <p:txBody>
+          <a:bodyPr wrap="square">
+            <a:spAutoFit/>
+          </a:bodyPr>
+          <a:lstStyle/>
+          <a:p>
+            <a:pPr>
+              <a:spcAft>
+                <a:spcPts val="600"/>
+              </a:spcAft>
+              <a:defRPr sz="1100">
                 <a:solidFill>
                   <a:srgbClr val="FDF8EC"/>
                 </a:solidFill>
@@ -8817,128 +11955,15 @@
               </a:defRPr>
             </a:pPr>
             <a:r>
-              <a:t>Upcoming events with</a:t>
-            </a:r>
-            <a:br/>
-            <a:r>
-              <a:t>countdown timers, seat</a:t>
-            </a:r>
-            <a:br/>
-            <a:r>
-              <a:t>tracking, tier-gating,</a:t>
-            </a:r>
-            <a:br/>
-            <a:r>
-              <a:t>and one-tap RSVP.</a:t>
-            </a:r>
-          </a:p>
-        </p:txBody>
-      </p:sp>
-      <p:sp>
-        <p:nvSpPr>
-          <p:cNvPr id="16" name="Rounded Rectangle 15"/>
-          <p:cNvSpPr/>
-          <p:nvPr/>
-        </p:nvSpPr>
-        <p:spPr>
-          <a:xfrm>
-            <a:off x="8229600" y="1645920"/>
-            <a:ext cx="1783080" cy="3474720"/>
-          </a:xfrm>
-          <a:prstGeom prst="roundRect">
-            <a:avLst/>
-          </a:prstGeom>
-          <a:solidFill>
-            <a:srgbClr val="181818"/>
-          </a:solidFill>
-          <a:ln w="12700">
-            <a:solidFill>
-              <a:srgbClr val="2A2A2A"/>
-            </a:solidFill>
-          </a:ln>
-        </p:spPr>
-        <p:style>
-          <a:lnRef idx="1">
-            <a:schemeClr val="accent1"/>
-          </a:lnRef>
-          <a:fillRef idx="3">
-            <a:schemeClr val="accent1"/>
-          </a:fillRef>
-          <a:effectRef idx="2">
-            <a:schemeClr val="accent1"/>
-          </a:effectRef>
-          <a:fontRef idx="minor">
-            <a:schemeClr val="lt1"/>
-          </a:fontRef>
-        </p:style>
-        <p:txBody>
-          <a:bodyPr rtlCol="0" anchor="ctr"/>
-          <a:lstStyle/>
-          <a:p>
-            <a:pPr algn="ctr"/>
-          </a:p>
-        </p:txBody>
-      </p:sp>
-      <p:sp>
-        <p:nvSpPr>
-          <p:cNvPr id="17" name="TextBox 16"/>
-          <p:cNvSpPr txBox="1"/>
-          <p:nvPr/>
-        </p:nvSpPr>
-        <p:spPr>
-          <a:xfrm>
-            <a:off x="8321040" y="1828800"/>
-            <a:ext cx="1600200" cy="365760"/>
-          </a:xfrm>
-          <a:prstGeom prst="rect">
-            <a:avLst/>
-          </a:prstGeom>
-          <a:noFill/>
-        </p:spPr>
-        <p:txBody>
-          <a:bodyPr wrap="square">
-            <a:spAutoFit/>
-          </a:bodyPr>
-          <a:lstStyle/>
-          <a:p>
-            <a:pPr algn="ctr">
-              <a:defRPr sz="1300" b="1">
-                <a:solidFill>
-                  <a:srgbClr val="D4A843"/>
-                </a:solidFill>
-                <a:latin typeface="Calibri"/>
-              </a:defRPr>
-            </a:pPr>
-            <a:r>
-              <a:t>At Home</a:t>
-            </a:r>
-          </a:p>
-        </p:txBody>
-      </p:sp>
-      <p:sp>
-        <p:nvSpPr>
-          <p:cNvPr id="18" name="TextBox 17"/>
-          <p:cNvSpPr txBox="1"/>
-          <p:nvPr/>
-        </p:nvSpPr>
-        <p:spPr>
-          <a:xfrm>
-            <a:off x="8321040" y="2286000"/>
-            <a:ext cx="1600200" cy="2560320"/>
-          </a:xfrm>
-          <a:prstGeom prst="rect">
-            <a:avLst/>
-          </a:prstGeom>
-          <a:noFill/>
-        </p:spPr>
-        <p:txBody>
-          <a:bodyPr wrap="square">
-            <a:spAutoFit/>
-          </a:bodyPr>
-          <a:lstStyle/>
-          <a:p>
-            <a:pPr algn="ctr">
-              <a:defRPr sz="900" b="0">
+              <a:t>  2x points multiplier</a:t>
+            </a:r>
+          </a:p>
+          <a:p>
+            <a:pPr>
+              <a:spcAft>
+                <a:spcPts val="600"/>
+              </a:spcAft>
+              <a:defRPr sz="1100">
                 <a:solidFill>
                   <a:srgbClr val="FDF8EC"/>
                 </a:solidFill>
@@ -8946,128 +11971,15 @@
               </a:defRPr>
             </a:pPr>
             <a:r>
-              <a:t>Three-tier private</a:t>
-            </a:r>
-            <a:br/>
-            <a:r>
-              <a:t>experience booking with</a:t>
-            </a:r>
-            <a:br/>
-            <a:r>
-              <a:t>testimonials, FAQ,</a:t>
-            </a:r>
-            <a:br/>
-            <a:r>
-              <a:t>and instant requests.</a:t>
-            </a:r>
-          </a:p>
-        </p:txBody>
-      </p:sp>
-      <p:sp>
-        <p:nvSpPr>
-          <p:cNvPr id="19" name="Rounded Rectangle 18"/>
-          <p:cNvSpPr/>
-          <p:nvPr/>
-        </p:nvSpPr>
-        <p:spPr>
-          <a:xfrm>
-            <a:off x="10195560" y="1645920"/>
-            <a:ext cx="1783080" cy="3474720"/>
-          </a:xfrm>
-          <a:prstGeom prst="roundRect">
-            <a:avLst/>
-          </a:prstGeom>
-          <a:solidFill>
-            <a:srgbClr val="181818"/>
-          </a:solidFill>
-          <a:ln w="12700">
-            <a:solidFill>
-              <a:srgbClr val="2A2A2A"/>
-            </a:solidFill>
-          </a:ln>
-        </p:spPr>
-        <p:style>
-          <a:lnRef idx="1">
-            <a:schemeClr val="accent1"/>
-          </a:lnRef>
-          <a:fillRef idx="3">
-            <a:schemeClr val="accent1"/>
-          </a:fillRef>
-          <a:effectRef idx="2">
-            <a:schemeClr val="accent1"/>
-          </a:effectRef>
-          <a:fontRef idx="minor">
-            <a:schemeClr val="lt1"/>
-          </a:fontRef>
-        </p:style>
-        <p:txBody>
-          <a:bodyPr rtlCol="0" anchor="ctr"/>
-          <a:lstStyle/>
-          <a:p>
-            <a:pPr algn="ctr"/>
-          </a:p>
-        </p:txBody>
-      </p:sp>
-      <p:sp>
-        <p:nvSpPr>
-          <p:cNvPr id="20" name="TextBox 19"/>
-          <p:cNvSpPr txBox="1"/>
-          <p:nvPr/>
-        </p:nvSpPr>
-        <p:spPr>
-          <a:xfrm>
-            <a:off x="10287000" y="1828800"/>
-            <a:ext cx="1600200" cy="365760"/>
-          </a:xfrm>
-          <a:prstGeom prst="rect">
-            <a:avLst/>
-          </a:prstGeom>
-          <a:noFill/>
-        </p:spPr>
-        <p:txBody>
-          <a:bodyPr wrap="square">
-            <a:spAutoFit/>
-          </a:bodyPr>
-          <a:lstStyle/>
-          <a:p>
-            <a:pPr algn="ctr">
-              <a:defRPr sz="1300" b="1">
-                <a:solidFill>
-                  <a:srgbClr val="D4A843"/>
-                </a:solidFill>
-                <a:latin typeface="Calibri"/>
-              </a:defRPr>
-            </a:pPr>
-            <a:r>
-              <a:t>Admin</a:t>
-            </a:r>
-          </a:p>
-        </p:txBody>
-      </p:sp>
-      <p:sp>
-        <p:nvSpPr>
-          <p:cNvPr id="21" name="TextBox 20"/>
-          <p:cNvSpPr txBox="1"/>
-          <p:nvPr/>
-        </p:nvSpPr>
-        <p:spPr>
-          <a:xfrm>
-            <a:off x="10287000" y="2286000"/>
-            <a:ext cx="1600200" cy="2560320"/>
-          </a:xfrm>
-          <a:prstGeom prst="rect">
-            <a:avLst/>
-          </a:prstGeom>
-          <a:noFill/>
-        </p:spPr>
-        <p:txBody>
-          <a:bodyPr wrap="square">
-            <a:spAutoFit/>
-          </a:bodyPr>
-          <a:lstStyle/>
-          <a:p>
-            <a:pPr algn="ctr">
-              <a:defRPr sz="900" b="0">
+              <a:t>  All Magnum benefits</a:t>
+            </a:r>
+          </a:p>
+          <a:p>
+            <a:pPr>
+              <a:spcAft>
+                <a:spcPts val="600"/>
+              </a:spcAft>
+              <a:defRPr sz="1100">
                 <a:solidFill>
                   <a:srgbClr val="FDF8EC"/>
                 </a:solidFill>
@@ -9075,55 +11987,71 @@
               </a:defRPr>
             </a:pPr>
             <a:r>
-              <a:t>Full inventory + event</a:t>
-            </a:r>
-            <a:br/>
-            <a:r>
-              <a:t>management. Stats</a:t>
-            </a:r>
-            <a:br/>
-            <a:r>
-              <a:t>dashboard, CRUD</a:t>
-            </a:r>
-            <a:br/>
-            <a:r>
-              <a:t>operations, photo uploads.</a:t>
-            </a:r>
-          </a:p>
-        </p:txBody>
-      </p:sp>
-      <p:sp>
-        <p:nvSpPr>
-          <p:cNvPr id="22" name="TextBox 21"/>
-          <p:cNvSpPr txBox="1"/>
-          <p:nvPr/>
-        </p:nvSpPr>
-        <p:spPr>
-          <a:xfrm>
-            <a:off x="731520" y="5486400"/>
-            <a:ext cx="10698480" cy="731520"/>
-          </a:xfrm>
-          <a:prstGeom prst="rect">
-            <a:avLst/>
-          </a:prstGeom>
-          <a:noFill/>
-        </p:spPr>
-        <p:txBody>
-          <a:bodyPr wrap="square">
-            <a:spAutoFit/>
-          </a:bodyPr>
-          <a:lstStyle/>
-          <a:p>
-            <a:pPr algn="ctr">
-              <a:defRPr sz="1400" b="0">
-                <a:solidFill>
-                  <a:srgbClr val="6B6B6B"/>
-                </a:solidFill>
-                <a:latin typeface="Calibri"/>
-              </a:defRPr>
-            </a:pPr>
-            <a:r>
-              <a:t>Available on iOS App Store  •  Google Play Store  •  Web (champagnebar.com)</a:t>
+              <a:t>  Complimentary monthly bottle</a:t>
+            </a:r>
+          </a:p>
+          <a:p>
+            <a:pPr>
+              <a:spcAft>
+                <a:spcPts val="600"/>
+              </a:spcAft>
+              <a:defRPr sz="1100">
+                <a:solidFill>
+                  <a:srgbClr val="FDF8EC"/>
+                </a:solidFill>
+                <a:latin typeface="Calibri"/>
+              </a:defRPr>
+            </a:pPr>
+            <a:r>
+              <a:t>  Private lounge access</a:t>
+            </a:r>
+          </a:p>
+          <a:p>
+            <a:pPr>
+              <a:spcAft>
+                <a:spcPts val="600"/>
+              </a:spcAft>
+              <a:defRPr sz="1100">
+                <a:solidFill>
+                  <a:srgbClr val="FDF8EC"/>
+                </a:solidFill>
+                <a:latin typeface="Calibri"/>
+              </a:defRPr>
+            </a:pPr>
+            <a:r>
+              <a:t>  Personal sommelier service</a:t>
+            </a:r>
+          </a:p>
+          <a:p>
+            <a:pPr>
+              <a:spcAft>
+                <a:spcPts val="600"/>
+              </a:spcAft>
+              <a:defRPr sz="1100">
+                <a:solidFill>
+                  <a:srgbClr val="FDF8EC"/>
+                </a:solidFill>
+                <a:latin typeface="Calibri"/>
+              </a:defRPr>
+            </a:pPr>
+            <a:r>
+              <a:t>  VIP event access</a:t>
+            </a:r>
+          </a:p>
+          <a:p>
+            <a:pPr>
+              <a:spcAft>
+                <a:spcPts val="600"/>
+              </a:spcAft>
+              <a:defRPr sz="1100">
+                <a:solidFill>
+                  <a:srgbClr val="FDF8EC"/>
+                </a:solidFill>
+                <a:latin typeface="Calibri"/>
+              </a:defRPr>
+            </a:pPr>
+            <a:r>
+              <a:t>  25% off At-Home</a:t>
             </a:r>
           </a:p>
         </p:txBody>
@@ -9185,7 +12113,7 @@
               </a:defRPr>
             </a:pPr>
             <a:r>
-              <a:t>Why This Wins</a:t>
+              <a:t>The App Experience</a:t>
             </a:r>
           </a:p>
         </p:txBody>
@@ -9241,14 +12169,14 @@
         </p:nvSpPr>
         <p:spPr>
           <a:xfrm>
-            <a:off x="731520" y="1645920"/>
-            <a:ext cx="5394960" cy="1371600"/>
+            <a:off x="365760" y="1645920"/>
+            <a:ext cx="1783080" cy="3474720"/>
           </a:xfrm>
           <a:prstGeom prst="roundRect">
             <a:avLst/>
           </a:prstGeom>
           <a:solidFill>
-            <a:srgbClr val="111111"/>
+            <a:srgbClr val="181818"/>
           </a:solidFill>
           <a:ln w="12700">
             <a:solidFill>
@@ -9286,22 +12214,22 @@
         </p:nvSpPr>
         <p:spPr>
           <a:xfrm>
-            <a:off x="1005840" y="1783080"/>
-            <a:ext cx="4846320" cy="365760"/>
-          </a:xfrm>
-          <a:prstGeom prst="rect">
-            <a:avLst/>
-          </a:prstGeom>
-          <a:noFill/>
-        </p:spPr>
-        <p:txBody>
-          <a:bodyPr wrap="square">
-            <a:spAutoFit/>
-          </a:bodyPr>
-          <a:lstStyle/>
-          <a:p>
-            <a:pPr algn="l">
-              <a:defRPr sz="1500" b="1">
+            <a:off x="457200" y="1828800"/>
+            <a:ext cx="1600200" cy="365760"/>
+          </a:xfrm>
+          <a:prstGeom prst="rect">
+            <a:avLst/>
+          </a:prstGeom>
+          <a:noFill/>
+        </p:spPr>
+        <p:txBody>
+          <a:bodyPr wrap="square">
+            <a:spAutoFit/>
+          </a:bodyPr>
+          <a:lstStyle/>
+          <a:p>
+            <a:pPr algn="ctr">
+              <a:defRPr sz="1300" b="1">
                 <a:solidFill>
                   <a:srgbClr val="D4A843"/>
                 </a:solidFill>
@@ -9309,7 +12237,7 @@
               </a:defRPr>
             </a:pPr>
             <a:r>
-              <a:t>Custom-Built for Bocage</a:t>
+              <a:t>Login</a:t>
             </a:r>
           </a:p>
         </p:txBody>
@@ -9322,22 +12250,22 @@
         </p:nvSpPr>
         <p:spPr>
           <a:xfrm>
-            <a:off x="1005840" y="2148840"/>
-            <a:ext cx="4846320" cy="777240"/>
-          </a:xfrm>
-          <a:prstGeom prst="rect">
-            <a:avLst/>
-          </a:prstGeom>
-          <a:noFill/>
-        </p:spPr>
-        <p:txBody>
-          <a:bodyPr wrap="square">
-            <a:spAutoFit/>
-          </a:bodyPr>
-          <a:lstStyle/>
-          <a:p>
-            <a:pPr algn="l">
-              <a:defRPr sz="1100" b="0">
+            <a:off x="457200" y="2286000"/>
+            <a:ext cx="1600200" cy="2560320"/>
+          </a:xfrm>
+          <a:prstGeom prst="rect">
+            <a:avLst/>
+          </a:prstGeom>
+          <a:noFill/>
+        </p:spPr>
+        <p:txBody>
+          <a:bodyPr wrap="square">
+            <a:spAutoFit/>
+          </a:bodyPr>
+          <a:lstStyle/>
+          <a:p>
+            <a:pPr algn="ctr">
+              <a:defRPr sz="900" b="0">
                 <a:solidFill>
                   <a:srgbClr val="FDF8EC"/>
                 </a:solidFill>
@@ -9345,7 +12273,19 @@
               </a:defRPr>
             </a:pPr>
             <a:r>
-              <a:t>Not a generic loyalty app. Every pixel reflects Bocage's luxury brand — dark noir backgrounds, champagne gold accents, and your actual menu items.</a:t>
+              <a:t>Elegant Bocage branding with</a:t>
+            </a:r>
+            <a:br/>
+            <a:r>
+              <a:t>animated logo, password</a:t>
+            </a:r>
+            <a:br/>
+            <a:r>
+              <a:t>strength meter, and</a:t>
+            </a:r>
+            <a:br/>
+            <a:r>
+              <a:t>smooth transitions</a:t>
             </a:r>
           </a:p>
         </p:txBody>
@@ -9358,14 +12298,14 @@
         </p:nvSpPr>
         <p:spPr>
           <a:xfrm>
-            <a:off x="6492240" y="1645920"/>
-            <a:ext cx="5394960" cy="1371600"/>
+            <a:off x="2331720" y="1645920"/>
+            <a:ext cx="1783080" cy="3474720"/>
           </a:xfrm>
           <a:prstGeom prst="roundRect">
             <a:avLst/>
           </a:prstGeom>
           <a:solidFill>
-            <a:srgbClr val="111111"/>
+            <a:srgbClr val="181818"/>
           </a:solidFill>
           <a:ln w="12700">
             <a:solidFill>
@@ -9403,22 +12343,22 @@
         </p:nvSpPr>
         <p:spPr>
           <a:xfrm>
-            <a:off x="6766559" y="1783080"/>
-            <a:ext cx="4846320" cy="365760"/>
-          </a:xfrm>
-          <a:prstGeom prst="rect">
-            <a:avLst/>
-          </a:prstGeom>
-          <a:noFill/>
-        </p:spPr>
-        <p:txBody>
-          <a:bodyPr wrap="square">
-            <a:spAutoFit/>
-          </a:bodyPr>
-          <a:lstStyle/>
-          <a:p>
-            <a:pPr algn="l">
-              <a:defRPr sz="1500" b="1">
+            <a:off x="2423160" y="1828800"/>
+            <a:ext cx="1600200" cy="365760"/>
+          </a:xfrm>
+          <a:prstGeom prst="rect">
+            <a:avLst/>
+          </a:prstGeom>
+          <a:noFill/>
+        </p:spPr>
+        <p:txBody>
+          <a:bodyPr wrap="square">
+            <a:spAutoFit/>
+          </a:bodyPr>
+          <a:lstStyle/>
+          <a:p>
+            <a:pPr algn="ctr">
+              <a:defRPr sz="1300" b="1">
                 <a:solidFill>
                   <a:srgbClr val="D4A843"/>
                 </a:solidFill>
@@ -9426,7 +12366,7 @@
               </a:defRPr>
             </a:pPr>
             <a:r>
-              <a:t>Three Revenue Engines</a:t>
+              <a:t>Wine Menu</a:t>
             </a:r>
           </a:p>
         </p:txBody>
@@ -9439,22 +12379,22 @@
         </p:nvSpPr>
         <p:spPr>
           <a:xfrm>
-            <a:off x="6766559" y="2148840"/>
-            <a:ext cx="4846320" cy="777240"/>
-          </a:xfrm>
-          <a:prstGeom prst="rect">
-            <a:avLst/>
-          </a:prstGeom>
-          <a:noFill/>
-        </p:spPr>
-        <p:txBody>
-          <a:bodyPr wrap="square">
-            <a:spAutoFit/>
-          </a:bodyPr>
-          <a:lstStyle/>
-          <a:p>
-            <a:pPr algn="l">
-              <a:defRPr sz="1100" b="0">
+            <a:off x="2423160" y="2286000"/>
+            <a:ext cx="1600200" cy="2560320"/>
+          </a:xfrm>
+          <a:prstGeom prst="rect">
+            <a:avLst/>
+          </a:prstGeom>
+          <a:noFill/>
+        </p:spPr>
+        <p:txBody>
+          <a:bodyPr wrap="square">
+            <a:spAutoFit/>
+          </a:bodyPr>
+          <a:lstStyle/>
+          <a:p>
+            <a:pPr algn="ctr">
+              <a:defRPr sz="900" b="0">
                 <a:solidFill>
                   <a:srgbClr val="FDF8EC"/>
                 </a:solidFill>
@@ -9462,7 +12402,19 @@
               </a:defRPr>
             </a:pPr>
             <a:r>
-              <a:t>Subscriptions provide predictable monthly income. Events generate high-margin ticket sales. At-Home creates a premium service line.</a:t>
+              <a:t>Your full menu with search,</a:t>
+            </a:r>
+            <a:br/>
+            <a:r>
+              <a:t>filters, grid/list view,</a:t>
+            </a:r>
+            <a:br/>
+            <a:r>
+              <a:t>and tap-for-details.</a:t>
+            </a:r>
+            <a:br/>
+            <a:r>
+              <a:t>Always current.</a:t>
             </a:r>
           </a:p>
         </p:txBody>
@@ -9475,14 +12427,14 @@
         </p:nvSpPr>
         <p:spPr>
           <a:xfrm>
-            <a:off x="731520" y="3291840"/>
-            <a:ext cx="5394960" cy="1371600"/>
+            <a:off x="4297680" y="1645920"/>
+            <a:ext cx="1783080" cy="3474720"/>
           </a:xfrm>
           <a:prstGeom prst="roundRect">
             <a:avLst/>
           </a:prstGeom>
           <a:solidFill>
-            <a:srgbClr val="111111"/>
+            <a:srgbClr val="181818"/>
           </a:solidFill>
           <a:ln w="12700">
             <a:solidFill>
@@ -9520,22 +12472,22 @@
         </p:nvSpPr>
         <p:spPr>
           <a:xfrm>
-            <a:off x="1005840" y="3429000"/>
-            <a:ext cx="4846320" cy="365760"/>
-          </a:xfrm>
-          <a:prstGeom prst="rect">
-            <a:avLst/>
-          </a:prstGeom>
-          <a:noFill/>
-        </p:spPr>
-        <p:txBody>
-          <a:bodyPr wrap="square">
-            <a:spAutoFit/>
-          </a:bodyPr>
-          <a:lstStyle/>
-          <a:p>
-            <a:pPr algn="l">
-              <a:defRPr sz="1500" b="1">
+            <a:off x="4389120" y="1828800"/>
+            <a:ext cx="1600200" cy="365760"/>
+          </a:xfrm>
+          <a:prstGeom prst="rect">
+            <a:avLst/>
+          </a:prstGeom>
+          <a:noFill/>
+        </p:spPr>
+        <p:txBody>
+          <a:bodyPr wrap="square">
+            <a:spAutoFit/>
+          </a:bodyPr>
+          <a:lstStyle/>
+          <a:p>
+            <a:pPr algn="ctr">
+              <a:defRPr sz="1300" b="1">
                 <a:solidFill>
                   <a:srgbClr val="D4A843"/>
                 </a:solidFill>
@@ -9543,7 +12495,7 @@
               </a:defRPr>
             </a:pPr>
             <a:r>
-              <a:t>Zero Marketing Cost</a:t>
+              <a:t>Membership</a:t>
             </a:r>
           </a:p>
         </p:txBody>
@@ -9556,22 +12508,22 @@
         </p:nvSpPr>
         <p:spPr>
           <a:xfrm>
-            <a:off x="1005840" y="3794760"/>
-            <a:ext cx="4846320" cy="777240"/>
-          </a:xfrm>
-          <a:prstGeom prst="rect">
-            <a:avLst/>
-          </a:prstGeom>
-          <a:noFill/>
-        </p:spPr>
-        <p:txBody>
-          <a:bodyPr wrap="square">
-            <a:spAutoFit/>
-          </a:bodyPr>
-          <a:lstStyle/>
-          <a:p>
-            <a:pPr algn="l">
-              <a:defRPr sz="1100" b="0">
+            <a:off x="4389120" y="2286000"/>
+            <a:ext cx="1600200" cy="2560320"/>
+          </a:xfrm>
+          <a:prstGeom prst="rect">
+            <a:avLst/>
+          </a:prstGeom>
+          <a:noFill/>
+        </p:spPr>
+        <p:txBody>
+          <a:bodyPr wrap="square">
+            <a:spAutoFit/>
+          </a:bodyPr>
+          <a:lstStyle/>
+          <a:p>
+            <a:pPr algn="ctr">
+              <a:defRPr sz="900" b="0">
                 <a:solidFill>
                   <a:srgbClr val="FDF8EC"/>
                 </a:solidFill>
@@ -9579,7 +12531,19 @@
               </a:defRPr>
             </a:pPr>
             <a:r>
-              <a:t>Push notifications replace paid ads. A single 'Happy Hour Starts Now' notification drives immediate visits — no Facebook spend required.</a:t>
+              <a:t>Digital membership card,</a:t>
+            </a:r>
+            <a:br/>
+            <a:r>
+              <a:t>points progress, tier</a:t>
+            </a:r>
+            <a:br/>
+            <a:r>
+              <a:t>benefits, and transaction</a:t>
+            </a:r>
+            <a:br/>
+            <a:r>
+              <a:t>history at a glance.</a:t>
             </a:r>
           </a:p>
         </p:txBody>
@@ -9592,14 +12556,14 @@
         </p:nvSpPr>
         <p:spPr>
           <a:xfrm>
-            <a:off x="6492240" y="3291840"/>
-            <a:ext cx="5394960" cy="1371600"/>
+            <a:off x="6263640" y="1645920"/>
+            <a:ext cx="1783080" cy="3474720"/>
           </a:xfrm>
           <a:prstGeom prst="roundRect">
             <a:avLst/>
           </a:prstGeom>
           <a:solidFill>
-            <a:srgbClr val="111111"/>
+            <a:srgbClr val="181818"/>
           </a:solidFill>
           <a:ln w="12700">
             <a:solidFill>
@@ -9637,22 +12601,22 @@
         </p:nvSpPr>
         <p:spPr>
           <a:xfrm>
-            <a:off x="6766559" y="3429000"/>
-            <a:ext cx="4846320" cy="365760"/>
-          </a:xfrm>
-          <a:prstGeom prst="rect">
-            <a:avLst/>
-          </a:prstGeom>
-          <a:noFill/>
-        </p:spPr>
-        <p:txBody>
-          <a:bodyPr wrap="square">
-            <a:spAutoFit/>
-          </a:bodyPr>
-          <a:lstStyle/>
-          <a:p>
-            <a:pPr algn="l">
-              <a:defRPr sz="1500" b="1">
+            <a:off x="6355079" y="1828800"/>
+            <a:ext cx="1600200" cy="365760"/>
+          </a:xfrm>
+          <a:prstGeom prst="rect">
+            <a:avLst/>
+          </a:prstGeom>
+          <a:noFill/>
+        </p:spPr>
+        <p:txBody>
+          <a:bodyPr wrap="square">
+            <a:spAutoFit/>
+          </a:bodyPr>
+          <a:lstStyle/>
+          <a:p>
+            <a:pPr algn="ctr">
+              <a:defRPr sz="1300" b="1">
                 <a:solidFill>
                   <a:srgbClr val="D4A843"/>
                 </a:solidFill>
@@ -9660,7 +12624,7 @@
               </a:defRPr>
             </a:pPr>
             <a:r>
-              <a:t>Data You Don't Have Today</a:t>
+              <a:t>Events</a:t>
             </a:r>
           </a:p>
         </p:txBody>
@@ -9673,22 +12637,22 @@
         </p:nvSpPr>
         <p:spPr>
           <a:xfrm>
-            <a:off x="6766559" y="3794760"/>
-            <a:ext cx="4846320" cy="777240"/>
-          </a:xfrm>
-          <a:prstGeom prst="rect">
-            <a:avLst/>
-          </a:prstGeom>
-          <a:noFill/>
-        </p:spPr>
-        <p:txBody>
-          <a:bodyPr wrap="square">
-            <a:spAutoFit/>
-          </a:bodyPr>
-          <a:lstStyle/>
-          <a:p>
-            <a:pPr algn="l">
-              <a:defRPr sz="1100" b="0">
+            <a:off x="6355079" y="2286000"/>
+            <a:ext cx="1600200" cy="2560320"/>
+          </a:xfrm>
+          <a:prstGeom prst="rect">
+            <a:avLst/>
+          </a:prstGeom>
+          <a:noFill/>
+        </p:spPr>
+        <p:txBody>
+          <a:bodyPr wrap="square">
+            <a:spAutoFit/>
+          </a:bodyPr>
+          <a:lstStyle/>
+          <a:p>
+            <a:pPr algn="ctr">
+              <a:defRPr sz="900" b="0">
                 <a:solidFill>
                   <a:srgbClr val="FDF8EC"/>
                 </a:solidFill>
@@ -9696,7 +12660,19 @@
               </a:defRPr>
             </a:pPr>
             <a:r>
-              <a:t>Know your top 10 spenders, most popular cocktails, peak visit times, and which events sell out fastest. Make smarter business decisions.</a:t>
+              <a:t>Upcoming events with</a:t>
+            </a:r>
+            <a:br/>
+            <a:r>
+              <a:t>countdown timers, seat</a:t>
+            </a:r>
+            <a:br/>
+            <a:r>
+              <a:t>tracking, tier-gating,</a:t>
+            </a:r>
+            <a:br/>
+            <a:r>
+              <a:t>and one-tap RSVP.</a:t>
             </a:r>
           </a:p>
         </p:txBody>
@@ -9709,14 +12685,14 @@
         </p:nvSpPr>
         <p:spPr>
           <a:xfrm>
-            <a:off x="731520" y="4937760"/>
-            <a:ext cx="5394960" cy="1371600"/>
+            <a:off x="8229600" y="1645920"/>
+            <a:ext cx="1783080" cy="3474720"/>
           </a:xfrm>
           <a:prstGeom prst="roundRect">
             <a:avLst/>
           </a:prstGeom>
           <a:solidFill>
-            <a:srgbClr val="111111"/>
+            <a:srgbClr val="181818"/>
           </a:solidFill>
           <a:ln w="12700">
             <a:solidFill>
@@ -9754,22 +12730,22 @@
         </p:nvSpPr>
         <p:spPr>
           <a:xfrm>
-            <a:off x="1005840" y="5074920"/>
-            <a:ext cx="4846320" cy="365760"/>
-          </a:xfrm>
-          <a:prstGeom prst="rect">
-            <a:avLst/>
-          </a:prstGeom>
-          <a:noFill/>
-        </p:spPr>
-        <p:txBody>
-          <a:bodyPr wrap="square">
-            <a:spAutoFit/>
-          </a:bodyPr>
-          <a:lstStyle/>
-          <a:p>
-            <a:pPr algn="l">
-              <a:defRPr sz="1500" b="1">
+            <a:off x="8321040" y="1828800"/>
+            <a:ext cx="1600200" cy="365760"/>
+          </a:xfrm>
+          <a:prstGeom prst="rect">
+            <a:avLst/>
+          </a:prstGeom>
+          <a:noFill/>
+        </p:spPr>
+        <p:txBody>
+          <a:bodyPr wrap="square">
+            <a:spAutoFit/>
+          </a:bodyPr>
+          <a:lstStyle/>
+          <a:p>
+            <a:pPr algn="ctr">
+              <a:defRPr sz="1300" b="1">
                 <a:solidFill>
                   <a:srgbClr val="D4A843"/>
                 </a:solidFill>
@@ -9777,7 +12753,7 @@
               </a:defRPr>
             </a:pPr>
             <a:r>
-              <a:t>Member Lock-In</a:t>
+              <a:t>At Home</a:t>
             </a:r>
           </a:p>
         </p:txBody>
@@ -9790,22 +12766,22 @@
         </p:nvSpPr>
         <p:spPr>
           <a:xfrm>
-            <a:off x="1005840" y="5440680"/>
-            <a:ext cx="4846320" cy="777240"/>
-          </a:xfrm>
-          <a:prstGeom prst="rect">
-            <a:avLst/>
-          </a:prstGeom>
-          <a:noFill/>
-        </p:spPr>
-        <p:txBody>
-          <a:bodyPr wrap="square">
-            <a:spAutoFit/>
-          </a:bodyPr>
-          <a:lstStyle/>
-          <a:p>
-            <a:pPr algn="l">
-              <a:defRPr sz="1100" b="0">
+            <a:off x="8321040" y="2286000"/>
+            <a:ext cx="1600200" cy="2560320"/>
+          </a:xfrm>
+          <a:prstGeom prst="rect">
+            <a:avLst/>
+          </a:prstGeom>
+          <a:noFill/>
+        </p:spPr>
+        <p:txBody>
+          <a:bodyPr wrap="square">
+            <a:spAutoFit/>
+          </a:bodyPr>
+          <a:lstStyle/>
+          <a:p>
+            <a:pPr algn="ctr">
+              <a:defRPr sz="900" b="0">
                 <a:solidFill>
                   <a:srgbClr val="FDF8EC"/>
                 </a:solidFill>
@@ -9813,7 +12789,19 @@
               </a:defRPr>
             </a:pPr>
             <a:r>
-              <a:t>Points + tiers create switching costs. A member with 400 points toward Magnum won't leave for a competitor. Retention becomes automatic.</a:t>
+              <a:t>Three-tier private</a:t>
+            </a:r>
+            <a:br/>
+            <a:r>
+              <a:t>experience booking with</a:t>
+            </a:r>
+            <a:br/>
+            <a:r>
+              <a:t>testimonials, FAQ,</a:t>
+            </a:r>
+            <a:br/>
+            <a:r>
+              <a:t>and instant requests.</a:t>
             </a:r>
           </a:p>
         </p:txBody>
@@ -9826,14 +12814,14 @@
         </p:nvSpPr>
         <p:spPr>
           <a:xfrm>
-            <a:off x="6492240" y="4937760"/>
-            <a:ext cx="5394960" cy="1371600"/>
+            <a:off x="10195560" y="1645920"/>
+            <a:ext cx="1783080" cy="3474720"/>
           </a:xfrm>
           <a:prstGeom prst="roundRect">
             <a:avLst/>
           </a:prstGeom>
           <a:solidFill>
-            <a:srgbClr val="111111"/>
+            <a:srgbClr val="181818"/>
           </a:solidFill>
           <a:ln w="12700">
             <a:solidFill>
@@ -9871,22 +12859,22 @@
         </p:nvSpPr>
         <p:spPr>
           <a:xfrm>
-            <a:off x="6766559" y="5074920"/>
-            <a:ext cx="4846320" cy="365760"/>
-          </a:xfrm>
-          <a:prstGeom prst="rect">
-            <a:avLst/>
-          </a:prstGeom>
-          <a:noFill/>
-        </p:spPr>
-        <p:txBody>
-          <a:bodyPr wrap="square">
-            <a:spAutoFit/>
-          </a:bodyPr>
-          <a:lstStyle/>
-          <a:p>
-            <a:pPr algn="l">
-              <a:defRPr sz="1500" b="1">
+            <a:off x="10287000" y="1828800"/>
+            <a:ext cx="1600200" cy="365760"/>
+          </a:xfrm>
+          <a:prstGeom prst="rect">
+            <a:avLst/>
+          </a:prstGeom>
+          <a:noFill/>
+        </p:spPr>
+        <p:txBody>
+          <a:bodyPr wrap="square">
+            <a:spAutoFit/>
+          </a:bodyPr>
+          <a:lstStyle/>
+          <a:p>
+            <a:pPr algn="ctr">
+              <a:defRPr sz="1300" b="1">
                 <a:solidFill>
                   <a:srgbClr val="D4A843"/>
                 </a:solidFill>
@@ -9894,7 +12882,7 @@
               </a:defRPr>
             </a:pPr>
             <a:r>
-              <a:t>Viral Growth Built-In</a:t>
+              <a:t>Admin</a:t>
             </a:r>
           </a:p>
         </p:txBody>
@@ -9907,22 +12895,22 @@
         </p:nvSpPr>
         <p:spPr>
           <a:xfrm>
-            <a:off x="6766559" y="5440680"/>
-            <a:ext cx="4846320" cy="777240"/>
-          </a:xfrm>
-          <a:prstGeom prst="rect">
-            <a:avLst/>
-          </a:prstGeom>
-          <a:noFill/>
-        </p:spPr>
-        <p:txBody>
-          <a:bodyPr wrap="square">
-            <a:spAutoFit/>
-          </a:bodyPr>
-          <a:lstStyle/>
-          <a:p>
-            <a:pPr algn="l">
-              <a:defRPr sz="1100" b="0">
+            <a:off x="10287000" y="2286000"/>
+            <a:ext cx="1600200" cy="2560320"/>
+          </a:xfrm>
+          <a:prstGeom prst="rect">
+            <a:avLst/>
+          </a:prstGeom>
+          <a:noFill/>
+        </p:spPr>
+        <p:txBody>
+          <a:bodyPr wrap="square">
+            <a:spAutoFit/>
+          </a:bodyPr>
+          <a:lstStyle/>
+          <a:p>
+            <a:pPr algn="ctr">
+              <a:defRPr sz="900" b="0">
                 <a:solidFill>
                   <a:srgbClr val="FDF8EC"/>
                 </a:solidFill>
@@ -9930,7 +12918,55 @@
               </a:defRPr>
             </a:pPr>
             <a:r>
-              <a:t>Referral program + shareable events + gift cards turn every member into a marketer. Organic growth compounds month over month.</a:t>
+              <a:t>Full inventory + event</a:t>
+            </a:r>
+            <a:br/>
+            <a:r>
+              <a:t>management. Stats</a:t>
+            </a:r>
+            <a:br/>
+            <a:r>
+              <a:t>dashboard, CRUD</a:t>
+            </a:r>
+            <a:br/>
+            <a:r>
+              <a:t>operations, photo uploads.</a:t>
+            </a:r>
+          </a:p>
+        </p:txBody>
+      </p:sp>
+      <p:sp>
+        <p:nvSpPr>
+          <p:cNvPr id="22" name="TextBox 21"/>
+          <p:cNvSpPr txBox="1"/>
+          <p:nvPr/>
+        </p:nvSpPr>
+        <p:spPr>
+          <a:xfrm>
+            <a:off x="731520" y="5486400"/>
+            <a:ext cx="10698480" cy="731520"/>
+          </a:xfrm>
+          <a:prstGeom prst="rect">
+            <a:avLst/>
+          </a:prstGeom>
+          <a:noFill/>
+        </p:spPr>
+        <p:txBody>
+          <a:bodyPr wrap="square">
+            <a:spAutoFit/>
+          </a:bodyPr>
+          <a:lstStyle/>
+          <a:p>
+            <a:pPr algn="ctr">
+              <a:defRPr sz="1400" b="0">
+                <a:solidFill>
+                  <a:srgbClr val="6B6B6B"/>
+                </a:solidFill>
+                <a:latin typeface="Calibri"/>
+              </a:defRPr>
+            </a:pPr>
+            <a:r>
+              <a:t>Available on iOS App Store  •  Google Play Store  •  Web (champagnebar.com)</a:t>
             </a:r>
           </a:p>
         </p:txBody>
@@ -9992,7 +13028,7 @@
               </a:defRPr>
             </a:pPr>
             <a:r>
-              <a:t>Launch Plan</a:t>
+              <a:t>Why This Wins</a:t>
             </a:r>
           </a:p>
         </p:txBody>
@@ -10048,8 +13084,8 @@
         </p:nvSpPr>
         <p:spPr>
           <a:xfrm>
-            <a:off x="365760" y="1645920"/>
-            <a:ext cx="2148840" cy="4389120"/>
+            <a:off x="731520" y="1645920"/>
+            <a:ext cx="5394960" cy="1371600"/>
           </a:xfrm>
           <a:prstGeom prst="roundRect">
             <a:avLst/>
@@ -10093,210 +13129,80 @@
         </p:nvSpPr>
         <p:spPr>
           <a:xfrm>
-            <a:off x="502920" y="1783080"/>
-            <a:ext cx="1874519" cy="274320"/>
-          </a:xfrm>
-          <a:prstGeom prst="rect">
-            <a:avLst/>
-          </a:prstGeom>
-          <a:noFill/>
-        </p:spPr>
-        <p:txBody>
-          <a:bodyPr wrap="square">
-            <a:spAutoFit/>
-          </a:bodyPr>
-          <a:lstStyle/>
-          <a:p>
-            <a:pPr algn="ctr">
+            <a:off x="1005840" y="1783080"/>
+            <a:ext cx="4846320" cy="365760"/>
+          </a:xfrm>
+          <a:prstGeom prst="rect">
+            <a:avLst/>
+          </a:prstGeom>
+          <a:noFill/>
+        </p:spPr>
+        <p:txBody>
+          <a:bodyPr wrap="square">
+            <a:spAutoFit/>
+          </a:bodyPr>
+          <a:lstStyle/>
+          <a:p>
+            <a:pPr algn="l">
+              <a:defRPr sz="1500" b="1">
+                <a:solidFill>
+                  <a:srgbClr val="D4A843"/>
+                </a:solidFill>
+                <a:latin typeface="Calibri"/>
+              </a:defRPr>
+            </a:pPr>
+            <a:r>
+              <a:t>Custom-Built for Bocage</a:t>
+            </a:r>
+          </a:p>
+        </p:txBody>
+      </p:sp>
+      <p:sp>
+        <p:nvSpPr>
+          <p:cNvPr id="6" name="TextBox 5"/>
+          <p:cNvSpPr txBox="1"/>
+          <p:nvPr/>
+        </p:nvSpPr>
+        <p:spPr>
+          <a:xfrm>
+            <a:off x="1005840" y="2148840"/>
+            <a:ext cx="4846320" cy="777240"/>
+          </a:xfrm>
+          <a:prstGeom prst="rect">
+            <a:avLst/>
+          </a:prstGeom>
+          <a:noFill/>
+        </p:spPr>
+        <p:txBody>
+          <a:bodyPr wrap="square">
+            <a:spAutoFit/>
+          </a:bodyPr>
+          <a:lstStyle/>
+          <a:p>
+            <a:pPr algn="l">
               <a:defRPr sz="1100" b="0">
                 <a:solidFill>
-                  <a:srgbClr val="6B6B6B"/>
-                </a:solidFill>
-                <a:latin typeface="Calibri"/>
-              </a:defRPr>
-            </a:pPr>
-            <a:r>
-              <a:t>Week 1–2</a:t>
-            </a:r>
-          </a:p>
-        </p:txBody>
-      </p:sp>
-      <p:sp>
-        <p:nvSpPr>
-          <p:cNvPr id="6" name="TextBox 5"/>
-          <p:cNvSpPr txBox="1"/>
-          <p:nvPr/>
-        </p:nvSpPr>
-        <p:spPr>
-          <a:xfrm>
-            <a:off x="502920" y="2057400"/>
-            <a:ext cx="1874519" cy="365760"/>
-          </a:xfrm>
-          <a:prstGeom prst="rect">
-            <a:avLst/>
-          </a:prstGeom>
-          <a:noFill/>
-        </p:spPr>
-        <p:txBody>
-          <a:bodyPr wrap="square">
-            <a:spAutoFit/>
-          </a:bodyPr>
-          <a:lstStyle/>
-          <a:p>
-            <a:pPr algn="ctr">
-              <a:defRPr sz="1600" b="1">
-                <a:solidFill>
-                  <a:srgbClr val="D4A843"/>
-                </a:solidFill>
-                <a:latin typeface="Calibri"/>
-              </a:defRPr>
-            </a:pPr>
-            <a:r>
-              <a:t>SETUP</a:t>
-            </a:r>
-          </a:p>
-        </p:txBody>
-      </p:sp>
-      <p:sp>
-        <p:nvSpPr>
-          <p:cNvPr id="7" name="Rectangle 6"/>
+                  <a:srgbClr val="FDF8EC"/>
+                </a:solidFill>
+                <a:latin typeface="Calibri"/>
+              </a:defRPr>
+            </a:pPr>
+            <a:r>
+              <a:t>Not a generic loyalty app. Every pixel reflects Bocage's luxury brand — dark noir backgrounds, champagne gold accents, and your actual menu items.</a:t>
+            </a:r>
+          </a:p>
+        </p:txBody>
+      </p:sp>
+      <p:sp>
+        <p:nvSpPr>
+          <p:cNvPr id="7" name="Rounded Rectangle 6"/>
           <p:cNvSpPr/>
           <p:nvPr/>
         </p:nvSpPr>
         <p:spPr>
           <a:xfrm>
-            <a:off x="640080" y="2468880"/>
-            <a:ext cx="1600200" cy="27432"/>
-          </a:xfrm>
-          <a:prstGeom prst="rect">
-            <a:avLst/>
-          </a:prstGeom>
-          <a:solidFill>
-            <a:srgbClr val="D4A843"/>
-          </a:solidFill>
-          <a:ln>
-            <a:noFill/>
-          </a:ln>
-        </p:spPr>
-        <p:style>
-          <a:lnRef idx="1">
-            <a:schemeClr val="accent1"/>
-          </a:lnRef>
-          <a:fillRef idx="3">
-            <a:schemeClr val="accent1"/>
-          </a:fillRef>
-          <a:effectRef idx="2">
-            <a:schemeClr val="accent1"/>
-          </a:effectRef>
-          <a:fontRef idx="minor">
-            <a:schemeClr val="lt1"/>
-          </a:fontRef>
-        </p:style>
-        <p:txBody>
-          <a:bodyPr rtlCol="0" anchor="ctr"/>
-          <a:lstStyle/>
-          <a:p>
-            <a:pPr algn="ctr"/>
-          </a:p>
-        </p:txBody>
-      </p:sp>
-      <p:sp>
-        <p:nvSpPr>
-          <p:cNvPr id="8" name="TextBox 7"/>
-          <p:cNvSpPr txBox="1"/>
-          <p:nvPr/>
-        </p:nvSpPr>
-        <p:spPr>
-          <a:xfrm>
-            <a:off x="502920" y="2606040"/>
-            <a:ext cx="1874519" cy="3200400"/>
-          </a:xfrm>
-          <a:prstGeom prst="rect">
-            <a:avLst/>
-          </a:prstGeom>
-          <a:noFill/>
-        </p:spPr>
-        <p:txBody>
-          <a:bodyPr wrap="square">
-            <a:spAutoFit/>
-          </a:bodyPr>
-          <a:lstStyle/>
-          <a:p>
-            <a:pPr>
-              <a:spcAft>
-                <a:spcPts val="600"/>
-              </a:spcAft>
-              <a:defRPr sz="1000">
-                <a:solidFill>
-                  <a:srgbClr val="FDF8EC"/>
-                </a:solidFill>
-                <a:latin typeface="Calibri"/>
-              </a:defRPr>
-            </a:pPr>
-            <a:r>
-              <a:t>  Connect Supabase database</a:t>
-            </a:r>
-          </a:p>
-          <a:p>
-            <a:pPr>
-              <a:spcAft>
-                <a:spcPts val="600"/>
-              </a:spcAft>
-              <a:defRPr sz="1000">
-                <a:solidFill>
-                  <a:srgbClr val="FDF8EC"/>
-                </a:solidFill>
-                <a:latin typeface="Calibri"/>
-              </a:defRPr>
-            </a:pPr>
-            <a:r>
-              <a:t>  Configure Stripe payments</a:t>
-            </a:r>
-          </a:p>
-          <a:p>
-            <a:pPr>
-              <a:spcAft>
-                <a:spcPts val="600"/>
-              </a:spcAft>
-              <a:defRPr sz="1000">
-                <a:solidFill>
-                  <a:srgbClr val="FDF8EC"/>
-                </a:solidFill>
-                <a:latin typeface="Calibri"/>
-              </a:defRPr>
-            </a:pPr>
-            <a:r>
-              <a:t>  Upload wine menu + photos</a:t>
-            </a:r>
-          </a:p>
-          <a:p>
-            <a:pPr>
-              <a:spcAft>
-                <a:spcPts val="600"/>
-              </a:spcAft>
-              <a:defRPr sz="1000">
-                <a:solidFill>
-                  <a:srgbClr val="FDF8EC"/>
-                </a:solidFill>
-                <a:latin typeface="Calibri"/>
-              </a:defRPr>
-            </a:pPr>
-            <a:r>
-              <a:t>  Set admin accounts for Clark &amp; Zac</a:t>
-            </a:r>
-          </a:p>
-        </p:txBody>
-      </p:sp>
-      <p:sp>
-        <p:nvSpPr>
-          <p:cNvPr id="9" name="Rounded Rectangle 8"/>
-          <p:cNvSpPr/>
-          <p:nvPr/>
-        </p:nvSpPr>
-        <p:spPr>
-          <a:xfrm>
-            <a:off x="2697479" y="1645920"/>
-            <a:ext cx="2148840" cy="4389120"/>
+            <a:off x="6492240" y="1645920"/>
+            <a:ext cx="5394960" cy="1371600"/>
           </a:xfrm>
           <a:prstGeom prst="roundRect">
             <a:avLst/>
@@ -10334,216 +13240,86 @@
       </p:sp>
       <p:sp>
         <p:nvSpPr>
-          <p:cNvPr id="10" name="TextBox 9"/>
-          <p:cNvSpPr txBox="1"/>
-          <p:nvPr/>
-        </p:nvSpPr>
-        <p:spPr>
-          <a:xfrm>
-            <a:off x="2834639" y="1783080"/>
-            <a:ext cx="1874519" cy="274320"/>
-          </a:xfrm>
-          <a:prstGeom prst="rect">
-            <a:avLst/>
-          </a:prstGeom>
-          <a:noFill/>
-        </p:spPr>
-        <p:txBody>
-          <a:bodyPr wrap="square">
-            <a:spAutoFit/>
-          </a:bodyPr>
-          <a:lstStyle/>
-          <a:p>
-            <a:pPr algn="ctr">
+          <p:cNvPr id="8" name="TextBox 7"/>
+          <p:cNvSpPr txBox="1"/>
+          <p:nvPr/>
+        </p:nvSpPr>
+        <p:spPr>
+          <a:xfrm>
+            <a:off x="6766559" y="1783080"/>
+            <a:ext cx="4846320" cy="365760"/>
+          </a:xfrm>
+          <a:prstGeom prst="rect">
+            <a:avLst/>
+          </a:prstGeom>
+          <a:noFill/>
+        </p:spPr>
+        <p:txBody>
+          <a:bodyPr wrap="square">
+            <a:spAutoFit/>
+          </a:bodyPr>
+          <a:lstStyle/>
+          <a:p>
+            <a:pPr algn="l">
+              <a:defRPr sz="1500" b="1">
+                <a:solidFill>
+                  <a:srgbClr val="D4A843"/>
+                </a:solidFill>
+                <a:latin typeface="Calibri"/>
+              </a:defRPr>
+            </a:pPr>
+            <a:r>
+              <a:t>Three Revenue Engines</a:t>
+            </a:r>
+          </a:p>
+        </p:txBody>
+      </p:sp>
+      <p:sp>
+        <p:nvSpPr>
+          <p:cNvPr id="9" name="TextBox 8"/>
+          <p:cNvSpPr txBox="1"/>
+          <p:nvPr/>
+        </p:nvSpPr>
+        <p:spPr>
+          <a:xfrm>
+            <a:off x="6766559" y="2148840"/>
+            <a:ext cx="4846320" cy="777240"/>
+          </a:xfrm>
+          <a:prstGeom prst="rect">
+            <a:avLst/>
+          </a:prstGeom>
+          <a:noFill/>
+        </p:spPr>
+        <p:txBody>
+          <a:bodyPr wrap="square">
+            <a:spAutoFit/>
+          </a:bodyPr>
+          <a:lstStyle/>
+          <a:p>
+            <a:pPr algn="l">
               <a:defRPr sz="1100" b="0">
                 <a:solidFill>
-                  <a:srgbClr val="6B6B6B"/>
-                </a:solidFill>
-                <a:latin typeface="Calibri"/>
-              </a:defRPr>
-            </a:pPr>
-            <a:r>
-              <a:t>Week 3</a:t>
-            </a:r>
-          </a:p>
-        </p:txBody>
-      </p:sp>
-      <p:sp>
-        <p:nvSpPr>
-          <p:cNvPr id="11" name="TextBox 10"/>
-          <p:cNvSpPr txBox="1"/>
-          <p:nvPr/>
-        </p:nvSpPr>
-        <p:spPr>
-          <a:xfrm>
-            <a:off x="2834639" y="2057400"/>
-            <a:ext cx="1874519" cy="365760"/>
-          </a:xfrm>
-          <a:prstGeom prst="rect">
-            <a:avLst/>
-          </a:prstGeom>
-          <a:noFill/>
-        </p:spPr>
-        <p:txBody>
-          <a:bodyPr wrap="square">
-            <a:spAutoFit/>
-          </a:bodyPr>
-          <a:lstStyle/>
-          <a:p>
-            <a:pPr algn="ctr">
-              <a:defRPr sz="1600" b="1">
-                <a:solidFill>
-                  <a:srgbClr val="D4A843"/>
-                </a:solidFill>
-                <a:latin typeface="Calibri"/>
-              </a:defRPr>
-            </a:pPr>
-            <a:r>
-              <a:t>TESTING</a:t>
-            </a:r>
-          </a:p>
-        </p:txBody>
-      </p:sp>
-      <p:sp>
-        <p:nvSpPr>
-          <p:cNvPr id="12" name="Rectangle 11"/>
+                  <a:srgbClr val="FDF8EC"/>
+                </a:solidFill>
+                <a:latin typeface="Calibri"/>
+              </a:defRPr>
+            </a:pPr>
+            <a:r>
+              <a:t>Subscriptions provide predictable monthly income. Events generate high-margin ticket sales. At-Home creates a premium service line.</a:t>
+            </a:r>
+          </a:p>
+        </p:txBody>
+      </p:sp>
+      <p:sp>
+        <p:nvSpPr>
+          <p:cNvPr id="10" name="Rounded Rectangle 9"/>
           <p:cNvSpPr/>
           <p:nvPr/>
         </p:nvSpPr>
         <p:spPr>
           <a:xfrm>
-            <a:off x="2971799" y="2468880"/>
-            <a:ext cx="1600200" cy="27432"/>
-          </a:xfrm>
-          <a:prstGeom prst="rect">
-            <a:avLst/>
-          </a:prstGeom>
-          <a:solidFill>
-            <a:srgbClr val="D4A843"/>
-          </a:solidFill>
-          <a:ln>
-            <a:noFill/>
-          </a:ln>
-        </p:spPr>
-        <p:style>
-          <a:lnRef idx="1">
-            <a:schemeClr val="accent1"/>
-          </a:lnRef>
-          <a:fillRef idx="3">
-            <a:schemeClr val="accent1"/>
-          </a:fillRef>
-          <a:effectRef idx="2">
-            <a:schemeClr val="accent1"/>
-          </a:effectRef>
-          <a:fontRef idx="minor">
-            <a:schemeClr val="lt1"/>
-          </a:fontRef>
-        </p:style>
-        <p:txBody>
-          <a:bodyPr rtlCol="0" anchor="ctr"/>
-          <a:lstStyle/>
-          <a:p>
-            <a:pPr algn="ctr"/>
-          </a:p>
-        </p:txBody>
-      </p:sp>
-      <p:sp>
-        <p:nvSpPr>
-          <p:cNvPr id="13" name="TextBox 12"/>
-          <p:cNvSpPr txBox="1"/>
-          <p:nvPr/>
-        </p:nvSpPr>
-        <p:spPr>
-          <a:xfrm>
-            <a:off x="2834639" y="2606040"/>
-            <a:ext cx="1874519" cy="3200400"/>
-          </a:xfrm>
-          <a:prstGeom prst="rect">
-            <a:avLst/>
-          </a:prstGeom>
-          <a:noFill/>
-        </p:spPr>
-        <p:txBody>
-          <a:bodyPr wrap="square">
-            <a:spAutoFit/>
-          </a:bodyPr>
-          <a:lstStyle/>
-          <a:p>
-            <a:pPr>
-              <a:spcAft>
-                <a:spcPts val="600"/>
-              </a:spcAft>
-              <a:defRPr sz="1000">
-                <a:solidFill>
-                  <a:srgbClr val="FDF8EC"/>
-                </a:solidFill>
-                <a:latin typeface="Calibri"/>
-              </a:defRPr>
-            </a:pPr>
-            <a:r>
-              <a:t>  Internal testing with staff</a:t>
-            </a:r>
-          </a:p>
-          <a:p>
-            <a:pPr>
-              <a:spcAft>
-                <a:spcPts val="600"/>
-              </a:spcAft>
-              <a:defRPr sz="1000">
-                <a:solidFill>
-                  <a:srgbClr val="FDF8EC"/>
-                </a:solidFill>
-                <a:latin typeface="Calibri"/>
-              </a:defRPr>
-            </a:pPr>
-            <a:r>
-              <a:t>  Verify all menu items</a:t>
-            </a:r>
-          </a:p>
-          <a:p>
-            <a:pPr>
-              <a:spcAft>
-                <a:spcPts val="600"/>
-              </a:spcAft>
-              <a:defRPr sz="1000">
-                <a:solidFill>
-                  <a:srgbClr val="FDF8EC"/>
-                </a:solidFill>
-                <a:latin typeface="Calibri"/>
-              </a:defRPr>
-            </a:pPr>
-            <a:r>
-              <a:t>  Test event booking flow</a:t>
-            </a:r>
-          </a:p>
-          <a:p>
-            <a:pPr>
-              <a:spcAft>
-                <a:spcPts val="600"/>
-              </a:spcAft>
-              <a:defRPr sz="1000">
-                <a:solidFill>
-                  <a:srgbClr val="FDF8EC"/>
-                </a:solidFill>
-                <a:latin typeface="Calibri"/>
-              </a:defRPr>
-            </a:pPr>
-            <a:r>
-              <a:t>  QA on iOS, Android, and web</a:t>
-            </a:r>
-          </a:p>
-        </p:txBody>
-      </p:sp>
-      <p:sp>
-        <p:nvSpPr>
-          <p:cNvPr id="14" name="Rounded Rectangle 13"/>
-          <p:cNvSpPr/>
-          <p:nvPr/>
-        </p:nvSpPr>
-        <p:spPr>
-          <a:xfrm>
-            <a:off x="5029200" y="1645920"/>
-            <a:ext cx="2148840" cy="4389120"/>
+            <a:off x="731520" y="3291840"/>
+            <a:ext cx="5394960" cy="1371600"/>
           </a:xfrm>
           <a:prstGeom prst="roundRect">
             <a:avLst/>
@@ -10581,216 +13357,86 @@
       </p:sp>
       <p:sp>
         <p:nvSpPr>
-          <p:cNvPr id="15" name="TextBox 14"/>
-          <p:cNvSpPr txBox="1"/>
-          <p:nvPr/>
-        </p:nvSpPr>
-        <p:spPr>
-          <a:xfrm>
-            <a:off x="5166360" y="1783080"/>
-            <a:ext cx="1874519" cy="274320"/>
-          </a:xfrm>
-          <a:prstGeom prst="rect">
-            <a:avLst/>
-          </a:prstGeom>
-          <a:noFill/>
-        </p:spPr>
-        <p:txBody>
-          <a:bodyPr wrap="square">
-            <a:spAutoFit/>
-          </a:bodyPr>
-          <a:lstStyle/>
-          <a:p>
-            <a:pPr algn="ctr">
+          <p:cNvPr id="11" name="TextBox 10"/>
+          <p:cNvSpPr txBox="1"/>
+          <p:nvPr/>
+        </p:nvSpPr>
+        <p:spPr>
+          <a:xfrm>
+            <a:off x="1005840" y="3429000"/>
+            <a:ext cx="4846320" cy="365760"/>
+          </a:xfrm>
+          <a:prstGeom prst="rect">
+            <a:avLst/>
+          </a:prstGeom>
+          <a:noFill/>
+        </p:spPr>
+        <p:txBody>
+          <a:bodyPr wrap="square">
+            <a:spAutoFit/>
+          </a:bodyPr>
+          <a:lstStyle/>
+          <a:p>
+            <a:pPr algn="l">
+              <a:defRPr sz="1500" b="1">
+                <a:solidFill>
+                  <a:srgbClr val="D4A843"/>
+                </a:solidFill>
+                <a:latin typeface="Calibri"/>
+              </a:defRPr>
+            </a:pPr>
+            <a:r>
+              <a:t>Zero Marketing Cost</a:t>
+            </a:r>
+          </a:p>
+        </p:txBody>
+      </p:sp>
+      <p:sp>
+        <p:nvSpPr>
+          <p:cNvPr id="12" name="TextBox 11"/>
+          <p:cNvSpPr txBox="1"/>
+          <p:nvPr/>
+        </p:nvSpPr>
+        <p:spPr>
+          <a:xfrm>
+            <a:off x="1005840" y="3794760"/>
+            <a:ext cx="4846320" cy="777240"/>
+          </a:xfrm>
+          <a:prstGeom prst="rect">
+            <a:avLst/>
+          </a:prstGeom>
+          <a:noFill/>
+        </p:spPr>
+        <p:txBody>
+          <a:bodyPr wrap="square">
+            <a:spAutoFit/>
+          </a:bodyPr>
+          <a:lstStyle/>
+          <a:p>
+            <a:pPr algn="l">
               <a:defRPr sz="1100" b="0">
                 <a:solidFill>
-                  <a:srgbClr val="6B6B6B"/>
-                </a:solidFill>
-                <a:latin typeface="Calibri"/>
-              </a:defRPr>
-            </a:pPr>
-            <a:r>
-              <a:t>Week 4</a:t>
-            </a:r>
-          </a:p>
-        </p:txBody>
-      </p:sp>
-      <p:sp>
-        <p:nvSpPr>
-          <p:cNvPr id="16" name="TextBox 15"/>
-          <p:cNvSpPr txBox="1"/>
-          <p:nvPr/>
-        </p:nvSpPr>
-        <p:spPr>
-          <a:xfrm>
-            <a:off x="5166360" y="2057400"/>
-            <a:ext cx="1874519" cy="365760"/>
-          </a:xfrm>
-          <a:prstGeom prst="rect">
-            <a:avLst/>
-          </a:prstGeom>
-          <a:noFill/>
-        </p:spPr>
-        <p:txBody>
-          <a:bodyPr wrap="square">
-            <a:spAutoFit/>
-          </a:bodyPr>
-          <a:lstStyle/>
-          <a:p>
-            <a:pPr algn="ctr">
-              <a:defRPr sz="1600" b="1">
-                <a:solidFill>
-                  <a:srgbClr val="D4A843"/>
-                </a:solidFill>
-                <a:latin typeface="Calibri"/>
-              </a:defRPr>
-            </a:pPr>
-            <a:r>
-              <a:t>SOFT LAUNCH</a:t>
-            </a:r>
-          </a:p>
-        </p:txBody>
-      </p:sp>
-      <p:sp>
-        <p:nvSpPr>
-          <p:cNvPr id="17" name="Rectangle 16"/>
+                  <a:srgbClr val="FDF8EC"/>
+                </a:solidFill>
+                <a:latin typeface="Calibri"/>
+              </a:defRPr>
+            </a:pPr>
+            <a:r>
+              <a:t>Push notifications replace paid ads. A single 'Happy Hour Starts Now' notification drives immediate visits — no Facebook spend required.</a:t>
+            </a:r>
+          </a:p>
+        </p:txBody>
+      </p:sp>
+      <p:sp>
+        <p:nvSpPr>
+          <p:cNvPr id="13" name="Rounded Rectangle 12"/>
           <p:cNvSpPr/>
           <p:nvPr/>
         </p:nvSpPr>
         <p:spPr>
           <a:xfrm>
-            <a:off x="5303520" y="2468880"/>
-            <a:ext cx="1600200" cy="27432"/>
-          </a:xfrm>
-          <a:prstGeom prst="rect">
-            <a:avLst/>
-          </a:prstGeom>
-          <a:solidFill>
-            <a:srgbClr val="D4A843"/>
-          </a:solidFill>
-          <a:ln>
-            <a:noFill/>
-          </a:ln>
-        </p:spPr>
-        <p:style>
-          <a:lnRef idx="1">
-            <a:schemeClr val="accent1"/>
-          </a:lnRef>
-          <a:fillRef idx="3">
-            <a:schemeClr val="accent1"/>
-          </a:fillRef>
-          <a:effectRef idx="2">
-            <a:schemeClr val="accent1"/>
-          </a:effectRef>
-          <a:fontRef idx="minor">
-            <a:schemeClr val="lt1"/>
-          </a:fontRef>
-        </p:style>
-        <p:txBody>
-          <a:bodyPr rtlCol="0" anchor="ctr"/>
-          <a:lstStyle/>
-          <a:p>
-            <a:pPr algn="ctr"/>
-          </a:p>
-        </p:txBody>
-      </p:sp>
-      <p:sp>
-        <p:nvSpPr>
-          <p:cNvPr id="18" name="TextBox 17"/>
-          <p:cNvSpPr txBox="1"/>
-          <p:nvPr/>
-        </p:nvSpPr>
-        <p:spPr>
-          <a:xfrm>
-            <a:off x="5166360" y="2606040"/>
-            <a:ext cx="1874519" cy="3200400"/>
-          </a:xfrm>
-          <a:prstGeom prst="rect">
-            <a:avLst/>
-          </a:prstGeom>
-          <a:noFill/>
-        </p:spPr>
-        <p:txBody>
-          <a:bodyPr wrap="square">
-            <a:spAutoFit/>
-          </a:bodyPr>
-          <a:lstStyle/>
-          <a:p>
-            <a:pPr>
-              <a:spcAft>
-                <a:spcPts val="600"/>
-              </a:spcAft>
-              <a:defRPr sz="1000">
-                <a:solidFill>
-                  <a:srgbClr val="FDF8EC"/>
-                </a:solidFill>
-                <a:latin typeface="Calibri"/>
-              </a:defRPr>
-            </a:pPr>
-            <a:r>
-              <a:t>  Launch to email list</a:t>
-            </a:r>
-          </a:p>
-          <a:p>
-            <a:pPr>
-              <a:spcAft>
-                <a:spcPts val="600"/>
-              </a:spcAft>
-              <a:defRPr sz="1000">
-                <a:solidFill>
-                  <a:srgbClr val="FDF8EC"/>
-                </a:solidFill>
-                <a:latin typeface="Calibri"/>
-              </a:defRPr>
-            </a:pPr>
-            <a:r>
-              <a:t>  Staff promotes to regulars</a:t>
-            </a:r>
-          </a:p>
-          <a:p>
-            <a:pPr>
-              <a:spcAft>
-                <a:spcPts val="600"/>
-              </a:spcAft>
-              <a:defRPr sz="1000">
-                <a:solidFill>
-                  <a:srgbClr val="FDF8EC"/>
-                </a:solidFill>
-                <a:latin typeface="Calibri"/>
-              </a:defRPr>
-            </a:pPr>
-            <a:r>
-              <a:t>  First members earn points</a:t>
-            </a:r>
-          </a:p>
-          <a:p>
-            <a:pPr>
-              <a:spcAft>
-                <a:spcPts val="600"/>
-              </a:spcAft>
-              <a:defRPr sz="1000">
-                <a:solidFill>
-                  <a:srgbClr val="FDF8EC"/>
-                </a:solidFill>
-                <a:latin typeface="Calibri"/>
-              </a:defRPr>
-            </a:pPr>
-            <a:r>
-              <a:t>  Gather initial feedback</a:t>
-            </a:r>
-          </a:p>
-        </p:txBody>
-      </p:sp>
-      <p:sp>
-        <p:nvSpPr>
-          <p:cNvPr id="19" name="Rounded Rectangle 18"/>
-          <p:cNvSpPr/>
-          <p:nvPr/>
-        </p:nvSpPr>
-        <p:spPr>
-          <a:xfrm>
-            <a:off x="7360919" y="1645920"/>
-            <a:ext cx="2148840" cy="4389120"/>
+            <a:off x="6492240" y="3291840"/>
+            <a:ext cx="5394960" cy="1371600"/>
           </a:xfrm>
           <a:prstGeom prst="roundRect">
             <a:avLst/>
@@ -10828,216 +13474,86 @@
       </p:sp>
       <p:sp>
         <p:nvSpPr>
-          <p:cNvPr id="20" name="TextBox 19"/>
-          <p:cNvSpPr txBox="1"/>
-          <p:nvPr/>
-        </p:nvSpPr>
-        <p:spPr>
-          <a:xfrm>
-            <a:off x="7498079" y="1783080"/>
-            <a:ext cx="1874519" cy="274320"/>
-          </a:xfrm>
-          <a:prstGeom prst="rect">
-            <a:avLst/>
-          </a:prstGeom>
-          <a:noFill/>
-        </p:spPr>
-        <p:txBody>
-          <a:bodyPr wrap="square">
-            <a:spAutoFit/>
-          </a:bodyPr>
-          <a:lstStyle/>
-          <a:p>
-            <a:pPr algn="ctr">
+          <p:cNvPr id="14" name="TextBox 13"/>
+          <p:cNvSpPr txBox="1"/>
+          <p:nvPr/>
+        </p:nvSpPr>
+        <p:spPr>
+          <a:xfrm>
+            <a:off x="6766559" y="3429000"/>
+            <a:ext cx="4846320" cy="365760"/>
+          </a:xfrm>
+          <a:prstGeom prst="rect">
+            <a:avLst/>
+          </a:prstGeom>
+          <a:noFill/>
+        </p:spPr>
+        <p:txBody>
+          <a:bodyPr wrap="square">
+            <a:spAutoFit/>
+          </a:bodyPr>
+          <a:lstStyle/>
+          <a:p>
+            <a:pPr algn="l">
+              <a:defRPr sz="1500" b="1">
+                <a:solidFill>
+                  <a:srgbClr val="D4A843"/>
+                </a:solidFill>
+                <a:latin typeface="Calibri"/>
+              </a:defRPr>
+            </a:pPr>
+            <a:r>
+              <a:t>Data You Don't Have Today</a:t>
+            </a:r>
+          </a:p>
+        </p:txBody>
+      </p:sp>
+      <p:sp>
+        <p:nvSpPr>
+          <p:cNvPr id="15" name="TextBox 14"/>
+          <p:cNvSpPr txBox="1"/>
+          <p:nvPr/>
+        </p:nvSpPr>
+        <p:spPr>
+          <a:xfrm>
+            <a:off x="6766559" y="3794760"/>
+            <a:ext cx="4846320" cy="777240"/>
+          </a:xfrm>
+          <a:prstGeom prst="rect">
+            <a:avLst/>
+          </a:prstGeom>
+          <a:noFill/>
+        </p:spPr>
+        <p:txBody>
+          <a:bodyPr wrap="square">
+            <a:spAutoFit/>
+          </a:bodyPr>
+          <a:lstStyle/>
+          <a:p>
+            <a:pPr algn="l">
               <a:defRPr sz="1100" b="0">
                 <a:solidFill>
-                  <a:srgbClr val="6B6B6B"/>
-                </a:solidFill>
-                <a:latin typeface="Calibri"/>
-              </a:defRPr>
-            </a:pPr>
-            <a:r>
-              <a:t>Month 2</a:t>
-            </a:r>
-          </a:p>
-        </p:txBody>
-      </p:sp>
-      <p:sp>
-        <p:nvSpPr>
-          <p:cNvPr id="21" name="TextBox 20"/>
-          <p:cNvSpPr txBox="1"/>
-          <p:nvPr/>
-        </p:nvSpPr>
-        <p:spPr>
-          <a:xfrm>
-            <a:off x="7498079" y="2057400"/>
-            <a:ext cx="1874519" cy="365760"/>
-          </a:xfrm>
-          <a:prstGeom prst="rect">
-            <a:avLst/>
-          </a:prstGeom>
-          <a:noFill/>
-        </p:spPr>
-        <p:txBody>
-          <a:bodyPr wrap="square">
-            <a:spAutoFit/>
-          </a:bodyPr>
-          <a:lstStyle/>
-          <a:p>
-            <a:pPr algn="ctr">
-              <a:defRPr sz="1600" b="1">
-                <a:solidFill>
-                  <a:srgbClr val="D4A843"/>
-                </a:solidFill>
-                <a:latin typeface="Calibri"/>
-              </a:defRPr>
-            </a:pPr>
-            <a:r>
-              <a:t>FULL LAUNCH</a:t>
-            </a:r>
-          </a:p>
-        </p:txBody>
-      </p:sp>
-      <p:sp>
-        <p:nvSpPr>
-          <p:cNvPr id="22" name="Rectangle 21"/>
+                  <a:srgbClr val="FDF8EC"/>
+                </a:solidFill>
+                <a:latin typeface="Calibri"/>
+              </a:defRPr>
+            </a:pPr>
+            <a:r>
+              <a:t>Know your top 10 spenders, most popular cocktails, peak visit times, and which events sell out fastest. Make smarter business decisions.</a:t>
+            </a:r>
+          </a:p>
+        </p:txBody>
+      </p:sp>
+      <p:sp>
+        <p:nvSpPr>
+          <p:cNvPr id="16" name="Rounded Rectangle 15"/>
           <p:cNvSpPr/>
           <p:nvPr/>
         </p:nvSpPr>
         <p:spPr>
           <a:xfrm>
-            <a:off x="7635240" y="2468880"/>
-            <a:ext cx="1600200" cy="27432"/>
-          </a:xfrm>
-          <a:prstGeom prst="rect">
-            <a:avLst/>
-          </a:prstGeom>
-          <a:solidFill>
-            <a:srgbClr val="D4A843"/>
-          </a:solidFill>
-          <a:ln>
-            <a:noFill/>
-          </a:ln>
-        </p:spPr>
-        <p:style>
-          <a:lnRef idx="1">
-            <a:schemeClr val="accent1"/>
-          </a:lnRef>
-          <a:fillRef idx="3">
-            <a:schemeClr val="accent1"/>
-          </a:fillRef>
-          <a:effectRef idx="2">
-            <a:schemeClr val="accent1"/>
-          </a:effectRef>
-          <a:fontRef idx="minor">
-            <a:schemeClr val="lt1"/>
-          </a:fontRef>
-        </p:style>
-        <p:txBody>
-          <a:bodyPr rtlCol="0" anchor="ctr"/>
-          <a:lstStyle/>
-          <a:p>
-            <a:pPr algn="ctr"/>
-          </a:p>
-        </p:txBody>
-      </p:sp>
-      <p:sp>
-        <p:nvSpPr>
-          <p:cNvPr id="23" name="TextBox 22"/>
-          <p:cNvSpPr txBox="1"/>
-          <p:nvPr/>
-        </p:nvSpPr>
-        <p:spPr>
-          <a:xfrm>
-            <a:off x="7498079" y="2606040"/>
-            <a:ext cx="1874519" cy="3200400"/>
-          </a:xfrm>
-          <a:prstGeom prst="rect">
-            <a:avLst/>
-          </a:prstGeom>
-          <a:noFill/>
-        </p:spPr>
-        <p:txBody>
-          <a:bodyPr wrap="square">
-            <a:spAutoFit/>
-          </a:bodyPr>
-          <a:lstStyle/>
-          <a:p>
-            <a:pPr>
-              <a:spcAft>
-                <a:spcPts val="600"/>
-              </a:spcAft>
-              <a:defRPr sz="1000">
-                <a:solidFill>
-                  <a:srgbClr val="FDF8EC"/>
-                </a:solidFill>
-                <a:latin typeface="Calibri"/>
-              </a:defRPr>
-            </a:pPr>
-            <a:r>
-              <a:t>  App Store + Google Play live</a:t>
-            </a:r>
-          </a:p>
-          <a:p>
-            <a:pPr>
-              <a:spcAft>
-                <a:spcPts val="600"/>
-              </a:spcAft>
-              <a:defRPr sz="1000">
-                <a:solidFill>
-                  <a:srgbClr val="FDF8EC"/>
-                </a:solidFill>
-                <a:latin typeface="Calibri"/>
-              </a:defRPr>
-            </a:pPr>
-            <a:r>
-              <a:t>  First member event</a:t>
-            </a:r>
-          </a:p>
-          <a:p>
-            <a:pPr>
-              <a:spcAft>
-                <a:spcPts val="600"/>
-              </a:spcAft>
-              <a:defRPr sz="1000">
-                <a:solidFill>
-                  <a:srgbClr val="FDF8EC"/>
-                </a:solidFill>
-                <a:latin typeface="Calibri"/>
-              </a:defRPr>
-            </a:pPr>
-            <a:r>
-              <a:t>  Push notification campaigns</a:t>
-            </a:r>
-          </a:p>
-          <a:p>
-            <a:pPr>
-              <a:spcAft>
-                <a:spcPts val="600"/>
-              </a:spcAft>
-              <a:defRPr sz="1000">
-                <a:solidFill>
-                  <a:srgbClr val="FDF8EC"/>
-                </a:solidFill>
-                <a:latin typeface="Calibri"/>
-              </a:defRPr>
-            </a:pPr>
-            <a:r>
-              <a:t>  Referral program activated</a:t>
-            </a:r>
-          </a:p>
-        </p:txBody>
-      </p:sp>
-      <p:sp>
-        <p:nvSpPr>
-          <p:cNvPr id="24" name="Rounded Rectangle 23"/>
-          <p:cNvSpPr/>
-          <p:nvPr/>
-        </p:nvSpPr>
-        <p:spPr>
-          <a:xfrm>
-            <a:off x="9692640" y="1645920"/>
-            <a:ext cx="2148840" cy="4389120"/>
+            <a:off x="731520" y="4937760"/>
+            <a:ext cx="5394960" cy="1371600"/>
           </a:xfrm>
           <a:prstGeom prst="roundRect">
             <a:avLst/>
@@ -11075,95 +13591,97 @@
       </p:sp>
       <p:sp>
         <p:nvSpPr>
-          <p:cNvPr id="25" name="TextBox 24"/>
-          <p:cNvSpPr txBox="1"/>
-          <p:nvPr/>
-        </p:nvSpPr>
-        <p:spPr>
-          <a:xfrm>
-            <a:off x="9829800" y="1783080"/>
-            <a:ext cx="1874519" cy="274320"/>
-          </a:xfrm>
-          <a:prstGeom prst="rect">
-            <a:avLst/>
-          </a:prstGeom>
-          <a:noFill/>
-        </p:spPr>
-        <p:txBody>
-          <a:bodyPr wrap="square">
-            <a:spAutoFit/>
-          </a:bodyPr>
-          <a:lstStyle/>
-          <a:p>
-            <a:pPr algn="ctr">
+          <p:cNvPr id="17" name="TextBox 16"/>
+          <p:cNvSpPr txBox="1"/>
+          <p:nvPr/>
+        </p:nvSpPr>
+        <p:spPr>
+          <a:xfrm>
+            <a:off x="1005840" y="5074920"/>
+            <a:ext cx="4846320" cy="365760"/>
+          </a:xfrm>
+          <a:prstGeom prst="rect">
+            <a:avLst/>
+          </a:prstGeom>
+          <a:noFill/>
+        </p:spPr>
+        <p:txBody>
+          <a:bodyPr wrap="square">
+            <a:spAutoFit/>
+          </a:bodyPr>
+          <a:lstStyle/>
+          <a:p>
+            <a:pPr algn="l">
+              <a:defRPr sz="1500" b="1">
+                <a:solidFill>
+                  <a:srgbClr val="D4A843"/>
+                </a:solidFill>
+                <a:latin typeface="Calibri"/>
+              </a:defRPr>
+            </a:pPr>
+            <a:r>
+              <a:t>Member Lock-In</a:t>
+            </a:r>
+          </a:p>
+        </p:txBody>
+      </p:sp>
+      <p:sp>
+        <p:nvSpPr>
+          <p:cNvPr id="18" name="TextBox 17"/>
+          <p:cNvSpPr txBox="1"/>
+          <p:nvPr/>
+        </p:nvSpPr>
+        <p:spPr>
+          <a:xfrm>
+            <a:off x="1005840" y="5440680"/>
+            <a:ext cx="4846320" cy="777240"/>
+          </a:xfrm>
+          <a:prstGeom prst="rect">
+            <a:avLst/>
+          </a:prstGeom>
+          <a:noFill/>
+        </p:spPr>
+        <p:txBody>
+          <a:bodyPr wrap="square">
+            <a:spAutoFit/>
+          </a:bodyPr>
+          <a:lstStyle/>
+          <a:p>
+            <a:pPr algn="l">
               <a:defRPr sz="1100" b="0">
                 <a:solidFill>
-                  <a:srgbClr val="6B6B6B"/>
-                </a:solidFill>
-                <a:latin typeface="Calibri"/>
-              </a:defRPr>
-            </a:pPr>
-            <a:r>
-              <a:t>Month 3+</a:t>
-            </a:r>
-          </a:p>
-        </p:txBody>
-      </p:sp>
-      <p:sp>
-        <p:nvSpPr>
-          <p:cNvPr id="26" name="TextBox 25"/>
-          <p:cNvSpPr txBox="1"/>
-          <p:nvPr/>
-        </p:nvSpPr>
-        <p:spPr>
-          <a:xfrm>
-            <a:off x="9829800" y="2057400"/>
-            <a:ext cx="1874519" cy="365760"/>
-          </a:xfrm>
-          <a:prstGeom prst="rect">
-            <a:avLst/>
-          </a:prstGeom>
-          <a:noFill/>
-        </p:spPr>
-        <p:txBody>
-          <a:bodyPr wrap="square">
-            <a:spAutoFit/>
-          </a:bodyPr>
-          <a:lstStyle/>
-          <a:p>
-            <a:pPr algn="ctr">
-              <a:defRPr sz="1600" b="1">
-                <a:solidFill>
-                  <a:srgbClr val="D4A843"/>
-                </a:solidFill>
-                <a:latin typeface="Calibri"/>
-              </a:defRPr>
-            </a:pPr>
-            <a:r>
-              <a:t>GROWTH</a:t>
-            </a:r>
-          </a:p>
-        </p:txBody>
-      </p:sp>
-      <p:sp>
-        <p:nvSpPr>
-          <p:cNvPr id="27" name="Rectangle 26"/>
+                  <a:srgbClr val="FDF8EC"/>
+                </a:solidFill>
+                <a:latin typeface="Calibri"/>
+              </a:defRPr>
+            </a:pPr>
+            <a:r>
+              <a:t>Points + tiers create switching costs. A member with 400 points toward Magnum won't leave for a competitor. Retention becomes automatic.</a:t>
+            </a:r>
+          </a:p>
+        </p:txBody>
+      </p:sp>
+      <p:sp>
+        <p:nvSpPr>
+          <p:cNvPr id="19" name="Rounded Rectangle 18"/>
           <p:cNvSpPr/>
           <p:nvPr/>
         </p:nvSpPr>
         <p:spPr>
           <a:xfrm>
-            <a:off x="9966960" y="2468880"/>
-            <a:ext cx="1600200" cy="27432"/>
-          </a:xfrm>
-          <a:prstGeom prst="rect">
+            <a:off x="6492240" y="4937760"/>
+            <a:ext cx="5394960" cy="1371600"/>
+          </a:xfrm>
+          <a:prstGeom prst="roundRect">
             <a:avLst/>
           </a:prstGeom>
           <a:solidFill>
-            <a:srgbClr val="D4A843"/>
+            <a:srgbClr val="111111"/>
           </a:solidFill>
-          <a:ln>
-            <a:noFill/>
+          <a:ln w="12700">
+            <a:solidFill>
+              <a:srgbClr val="2A2A2A"/>
+            </a:solidFill>
           </a:ln>
         </p:spPr>
         <p:style>
@@ -11190,31 +13708,64 @@
       </p:sp>
       <p:sp>
         <p:nvSpPr>
-          <p:cNvPr id="28" name="TextBox 27"/>
-          <p:cNvSpPr txBox="1"/>
-          <p:nvPr/>
-        </p:nvSpPr>
-        <p:spPr>
-          <a:xfrm>
-            <a:off x="9829800" y="2606040"/>
-            <a:ext cx="1874519" cy="3200400"/>
-          </a:xfrm>
-          <a:prstGeom prst="rect">
-            <a:avLst/>
-          </a:prstGeom>
-          <a:noFill/>
-        </p:spPr>
-        <p:txBody>
-          <a:bodyPr wrap="square">
-            <a:spAutoFit/>
-          </a:bodyPr>
-          <a:lstStyle/>
-          <a:p>
-            <a:pPr>
-              <a:spcAft>
-                <a:spcPts val="600"/>
-              </a:spcAft>
-              <a:defRPr sz="1000">
+          <p:cNvPr id="20" name="TextBox 19"/>
+          <p:cNvSpPr txBox="1"/>
+          <p:nvPr/>
+        </p:nvSpPr>
+        <p:spPr>
+          <a:xfrm>
+            <a:off x="6766559" y="5074920"/>
+            <a:ext cx="4846320" cy="365760"/>
+          </a:xfrm>
+          <a:prstGeom prst="rect">
+            <a:avLst/>
+          </a:prstGeom>
+          <a:noFill/>
+        </p:spPr>
+        <p:txBody>
+          <a:bodyPr wrap="square">
+            <a:spAutoFit/>
+          </a:bodyPr>
+          <a:lstStyle/>
+          <a:p>
+            <a:pPr algn="l">
+              <a:defRPr sz="1500" b="1">
+                <a:solidFill>
+                  <a:srgbClr val="D4A843"/>
+                </a:solidFill>
+                <a:latin typeface="Calibri"/>
+              </a:defRPr>
+            </a:pPr>
+            <a:r>
+              <a:t>Viral Growth Built-In</a:t>
+            </a:r>
+          </a:p>
+        </p:txBody>
+      </p:sp>
+      <p:sp>
+        <p:nvSpPr>
+          <p:cNvPr id="21" name="TextBox 20"/>
+          <p:cNvSpPr txBox="1"/>
+          <p:nvPr/>
+        </p:nvSpPr>
+        <p:spPr>
+          <a:xfrm>
+            <a:off x="6766559" y="5440680"/>
+            <a:ext cx="4846320" cy="777240"/>
+          </a:xfrm>
+          <a:prstGeom prst="rect">
+            <a:avLst/>
+          </a:prstGeom>
+          <a:noFill/>
+        </p:spPr>
+        <p:txBody>
+          <a:bodyPr wrap="square">
+            <a:spAutoFit/>
+          </a:bodyPr>
+          <a:lstStyle/>
+          <a:p>
+            <a:pPr algn="l">
+              <a:defRPr sz="1100" b="0">
                 <a:solidFill>
                   <a:srgbClr val="FDF8EC"/>
                 </a:solidFill>
@@ -11222,55 +13773,7 @@
               </a:defRPr>
             </a:pPr>
             <a:r>
-              <a:t>  Monthly events calendar</a:t>
-            </a:r>
-          </a:p>
-          <a:p>
-            <a:pPr>
-              <a:spcAft>
-                <a:spcPts val="600"/>
-              </a:spcAft>
-              <a:defRPr sz="1000">
-                <a:solidFill>
-                  <a:srgbClr val="FDF8EC"/>
-                </a:solidFill>
-                <a:latin typeface="Calibri"/>
-              </a:defRPr>
-            </a:pPr>
-            <a:r>
-              <a:t>  Gift card holiday push</a:t>
-            </a:r>
-          </a:p>
-          <a:p>
-            <a:pPr>
-              <a:spcAft>
-                <a:spcPts val="600"/>
-              </a:spcAft>
-              <a:defRPr sz="1000">
-                <a:solidFill>
-                  <a:srgbClr val="FDF8EC"/>
-                </a:solidFill>
-                <a:latin typeface="Calibri"/>
-              </a:defRPr>
-            </a:pPr>
-            <a:r>
-              <a:t>  At-Home marketing</a:t>
-            </a:r>
-          </a:p>
-          <a:p>
-            <a:pPr>
-              <a:spcAft>
-                <a:spcPts val="600"/>
-              </a:spcAft>
-              <a:defRPr sz="1000">
-                <a:solidFill>
-                  <a:srgbClr val="FDF8EC"/>
-                </a:solidFill>
-                <a:latin typeface="Calibri"/>
-              </a:defRPr>
-            </a:pPr>
-            <a:r>
-              <a:t>  Data-driven optimization</a:t>
+              <a:t>Referral program + shareable events + gift cards turn every member into a marketer. Organic growth compounds month over month.</a:t>
             </a:r>
           </a:p>
         </p:txBody>
